--- a/ai101/slides/week-10.pptx
+++ b/ai101/slides/week-10.pptx
@@ -12,6 +12,12 @@
     <p:sldId id="260" r:id="rId11"/>
     <p:sldId id="261" r:id="rId12"/>
     <p:sldId id="262" r:id="rId13"/>
+    <p:sldId id="263" r:id="rId14"/>
+    <p:sldId id="264" r:id="rId15"/>
+    <p:sldId id="265" r:id="rId16"/>
+    <p:sldId id="266" r:id="rId17"/>
+    <p:sldId id="267" r:id="rId18"/>
+    <p:sldId id="268" r:id="rId19"/>
   </p:sldIdLst>
   <p:sldSz cx="12191695" cy="6858000" type="screen4x3"/>
   <p:notesSz cx="6858000" cy="9144000"/>
@@ -3166,6 +3172,1224 @@
 </p:sld>
 </file>
 
+<file path=ppt/slides/slide10.xml><?xml version="1.0" encoding="utf-8"?>
+<p:sld xmlns:a="http://schemas.openxmlformats.org/drawingml/2006/main" xmlns:p="http://schemas.openxmlformats.org/presentationml/2006/main" xmlns:r="http://schemas.openxmlformats.org/officeDocument/2006/relationships">
+  <p:cSld>
+    <p:bg>
+      <p:bgPr>
+        <a:solidFill>
+          <a:srgbClr val="102127"/>
+        </a:solidFill>
+        <a:effectLst/>
+      </p:bgPr>
+    </p:bg>
+    <p:spTree>
+      <p:nvGrpSpPr>
+        <p:cNvPr id="1" name=""/>
+        <p:cNvGrpSpPr/>
+        <p:nvPr/>
+      </p:nvGrpSpPr>
+      <p:grpSpPr/>
+      <p:sp>
+        <p:nvSpPr>
+          <p:cNvPr id="2" name="TextBox 1"/>
+          <p:cNvSpPr txBox="1"/>
+          <p:nvPr/>
+        </p:nvSpPr>
+        <p:spPr>
+          <a:xfrm>
+            <a:off x="502920" y="274320"/>
+            <a:ext cx="11155680" cy="731520"/>
+          </a:xfrm>
+          <a:prstGeom prst="rect">
+            <a:avLst/>
+          </a:prstGeom>
+          <a:noFill/>
+        </p:spPr>
+        <p:txBody>
+          <a:bodyPr wrap="none">
+            <a:spAutoFit/>
+          </a:bodyPr>
+          <a:lstStyle/>
+          <a:p>
+            <a:r>
+              <a:rPr sz="2600" b="1">
+                <a:solidFill>
+                  <a:srgbClr val="01AEFD"/>
+                </a:solidFill>
+              </a:rPr>
+              <a:t>Type this into script.js  (1 of 3)</a:t>
+            </a:r>
+          </a:p>
+        </p:txBody>
+      </p:sp>
+      <p:sp>
+        <p:nvSpPr>
+          <p:cNvPr id="3" name="TextBox 2"/>
+          <p:cNvSpPr txBox="1"/>
+          <p:nvPr/>
+        </p:nvSpPr>
+        <p:spPr>
+          <a:xfrm>
+            <a:off x="502920" y="1051560"/>
+            <a:ext cx="11155680" cy="5394960"/>
+          </a:xfrm>
+          <a:prstGeom prst="rect">
+            <a:avLst/>
+          </a:prstGeom>
+          <a:noFill/>
+        </p:spPr>
+        <p:txBody>
+          <a:bodyPr wrap="none">
+            <a:spAutoFit/>
+          </a:bodyPr>
+          <a:lstStyle/>
+          <a:p>
+            <a:pPr>
+              <a:spcAft>
+                <a:spcPts val="0"/>
+              </a:spcAft>
+            </a:pPr>
+            <a:r>
+              <a:rPr sz="1400">
+                <a:solidFill>
+                  <a:srgbClr val="6D8C97"/>
+                </a:solidFill>
+                <a:latin typeface="Consolas"/>
+              </a:rPr>
+              <a:t>  68  </a:t>
+            </a:r>
+            <a:r>
+              <a:rPr sz="1400">
+                <a:solidFill>
+                  <a:srgbClr val="DCECEF"/>
+                </a:solidFill>
+                <a:latin typeface="Consolas"/>
+              </a:rPr>
+              <a:t> </a:t>
+            </a:r>
+          </a:p>
+          <a:p>
+            <a:pPr>
+              <a:spcAft>
+                <a:spcPts val="0"/>
+              </a:spcAft>
+            </a:pPr>
+            <a:r>
+              <a:rPr sz="1400">
+                <a:solidFill>
+                  <a:srgbClr val="6D8C97"/>
+                </a:solidFill>
+                <a:latin typeface="Consolas"/>
+              </a:rPr>
+              <a:t>  69  </a:t>
+            </a:r>
+            <a:r>
+              <a:rPr sz="1400">
+                <a:solidFill>
+                  <a:srgbClr val="7FE0A0"/>
+                </a:solidFill>
+                <a:latin typeface="Consolas"/>
+              </a:rPr>
+              <a:t>// Week 10: with stream:true the answer arrives in pieces while it is still</a:t>
+            </a:r>
+          </a:p>
+          <a:p>
+            <a:pPr>
+              <a:spcAft>
+                <a:spcPts val="0"/>
+              </a:spcAft>
+            </a:pPr>
+            <a:r>
+              <a:rPr sz="1400">
+                <a:solidFill>
+                  <a:srgbClr val="6D8C97"/>
+                </a:solidFill>
+                <a:latin typeface="Consolas"/>
+              </a:rPr>
+              <a:t>  70  </a:t>
+            </a:r>
+            <a:r>
+              <a:rPr sz="1400">
+                <a:solidFill>
+                  <a:srgbClr val="7FE0A0"/>
+                </a:solidFill>
+                <a:latin typeface="Consolas"/>
+              </a:rPr>
+              <a:t>// being written. Same words, same total time - they just start sooner.</a:t>
+            </a:r>
+          </a:p>
+          <a:p>
+            <a:pPr>
+              <a:spcAft>
+                <a:spcPts val="0"/>
+              </a:spcAft>
+            </a:pPr>
+            <a:r>
+              <a:rPr sz="1400">
+                <a:solidFill>
+                  <a:srgbClr val="6D8C97"/>
+                </a:solidFill>
+                <a:latin typeface="Consolas"/>
+              </a:rPr>
+              <a:t>  71  </a:t>
+            </a:r>
+            <a:r>
+              <a:rPr sz="1400">
+                <a:solidFill>
+                  <a:srgbClr val="7FE0A0"/>
+                </a:solidFill>
+                <a:latin typeface="Consolas"/>
+              </a:rPr>
+              <a:t>//</a:t>
+            </a:r>
+          </a:p>
+          <a:p>
+            <a:pPr>
+              <a:spcAft>
+                <a:spcPts val="0"/>
+              </a:spcAft>
+            </a:pPr>
+            <a:r>
+              <a:rPr sz="1400">
+                <a:solidFill>
+                  <a:srgbClr val="6D8C97"/>
+                </a:solidFill>
+                <a:latin typeface="Consolas"/>
+              </a:rPr>
+              <a:t>  72  </a:t>
+            </a:r>
+            <a:r>
+              <a:rPr sz="1400">
+                <a:solidFill>
+                  <a:srgbClr val="7FE0A0"/>
+                </a:solidFill>
+                <a:latin typeface="Consolas"/>
+              </a:rPr>
+              <a:t>// The pieces look like this, one per line:</a:t>
+            </a:r>
+          </a:p>
+          <a:p>
+            <a:pPr>
+              <a:spcAft>
+                <a:spcPts val="0"/>
+              </a:spcAft>
+            </a:pPr>
+            <a:r>
+              <a:rPr sz="1400">
+                <a:solidFill>
+                  <a:srgbClr val="6D8C97"/>
+                </a:solidFill>
+                <a:latin typeface="Consolas"/>
+              </a:rPr>
+              <a:t>  73  </a:t>
+            </a:r>
+            <a:r>
+              <a:rPr sz="1400">
+                <a:solidFill>
+                  <a:srgbClr val="7FE0A0"/>
+                </a:solidFill>
+                <a:latin typeface="Consolas"/>
+              </a:rPr>
+              <a:t>//   data: {"choices":[{"delta":{"content":"Hel"}}]}</a:t>
+            </a:r>
+          </a:p>
+          <a:p>
+            <a:pPr>
+              <a:spcAft>
+                <a:spcPts val="0"/>
+              </a:spcAft>
+            </a:pPr>
+            <a:r>
+              <a:rPr sz="1400">
+                <a:solidFill>
+                  <a:srgbClr val="6D8C97"/>
+                </a:solidFill>
+                <a:latin typeface="Consolas"/>
+              </a:rPr>
+              <a:t>  74  </a:t>
+            </a:r>
+            <a:r>
+              <a:rPr sz="1400">
+                <a:solidFill>
+                  <a:srgbClr val="7FE0A0"/>
+                </a:solidFill>
+                <a:latin typeface="Consolas"/>
+              </a:rPr>
+              <a:t>//   data: [DONE]</a:t>
+            </a:r>
+          </a:p>
+          <a:p>
+            <a:pPr>
+              <a:spcAft>
+                <a:spcPts val="0"/>
+              </a:spcAft>
+            </a:pPr>
+            <a:r>
+              <a:rPr sz="1400">
+                <a:solidFill>
+                  <a:srgbClr val="6D8C97"/>
+                </a:solidFill>
+                <a:latin typeface="Consolas"/>
+              </a:rPr>
+              <a:t>  75  </a:t>
+            </a:r>
+            <a:r>
+              <a:rPr sz="1400">
+                <a:solidFill>
+                  <a:srgbClr val="7FE0A0"/>
+                </a:solidFill>
+                <a:latin typeface="Consolas"/>
+              </a:rPr>
+              <a:t>async function readStream(res) {</a:t>
+            </a:r>
+          </a:p>
+          <a:p>
+            <a:pPr>
+              <a:spcAft>
+                <a:spcPts val="0"/>
+              </a:spcAft>
+            </a:pPr>
+            <a:r>
+              <a:rPr sz="1400">
+                <a:solidFill>
+                  <a:srgbClr val="6D8C97"/>
+                </a:solidFill>
+                <a:latin typeface="Consolas"/>
+              </a:rPr>
+              <a:t>  76  </a:t>
+            </a:r>
+            <a:r>
+              <a:rPr sz="1400">
+                <a:solidFill>
+                  <a:srgbClr val="7FE0A0"/>
+                </a:solidFill>
+                <a:latin typeface="Consolas"/>
+              </a:rPr>
+              <a:t>  const reader = res.body.getReader();</a:t>
+            </a:r>
+          </a:p>
+          <a:p>
+            <a:pPr>
+              <a:spcAft>
+                <a:spcPts val="0"/>
+              </a:spcAft>
+            </a:pPr>
+            <a:r>
+              <a:rPr sz="1400">
+                <a:solidFill>
+                  <a:srgbClr val="6D8C97"/>
+                </a:solidFill>
+                <a:latin typeface="Consolas"/>
+              </a:rPr>
+              <a:t>  77  </a:t>
+            </a:r>
+            <a:r>
+              <a:rPr sz="1400">
+                <a:solidFill>
+                  <a:srgbClr val="7FE0A0"/>
+                </a:solidFill>
+                <a:latin typeface="Consolas"/>
+              </a:rPr>
+              <a:t>  const decoder = new TextDecoder();</a:t>
+            </a:r>
+          </a:p>
+          <a:p>
+            <a:pPr>
+              <a:spcAft>
+                <a:spcPts val="0"/>
+              </a:spcAft>
+            </a:pPr>
+            <a:r>
+              <a:rPr sz="1400">
+                <a:solidFill>
+                  <a:srgbClr val="6D8C97"/>
+                </a:solidFill>
+                <a:latin typeface="Consolas"/>
+              </a:rPr>
+              <a:t>  78  </a:t>
+            </a:r>
+            <a:r>
+              <a:rPr sz="1400">
+                <a:solidFill>
+                  <a:srgbClr val="7FE0A0"/>
+                </a:solidFill>
+                <a:latin typeface="Consolas"/>
+              </a:rPr>
+              <a:t>  let buffer = '';       // a piece can be cut in half mid-arrival</a:t>
+            </a:r>
+          </a:p>
+          <a:p>
+            <a:pPr>
+              <a:spcAft>
+                <a:spcPts val="0"/>
+              </a:spcAft>
+            </a:pPr>
+            <a:r>
+              <a:rPr sz="1400">
+                <a:solidFill>
+                  <a:srgbClr val="6D8C97"/>
+                </a:solidFill>
+                <a:latin typeface="Consolas"/>
+              </a:rPr>
+              <a:t>  79  </a:t>
+            </a:r>
+            <a:r>
+              <a:rPr sz="1400">
+                <a:solidFill>
+                  <a:srgbClr val="7FE0A0"/>
+                </a:solidFill>
+                <a:latin typeface="Consolas"/>
+              </a:rPr>
+              <a:t>  let answer = '';</a:t>
+            </a:r>
+          </a:p>
+          <a:p>
+            <a:pPr>
+              <a:spcAft>
+                <a:spcPts val="0"/>
+              </a:spcAft>
+            </a:pPr>
+            <a:r>
+              <a:rPr sz="1400">
+                <a:solidFill>
+                  <a:srgbClr val="6D8C97"/>
+                </a:solidFill>
+                <a:latin typeface="Consolas"/>
+              </a:rPr>
+              <a:t>  80  </a:t>
+            </a:r>
+            <a:r>
+              <a:rPr sz="1400">
+                <a:solidFill>
+                  <a:srgbClr val="7FE0A0"/>
+                </a:solidFill>
+                <a:latin typeface="Consolas"/>
+              </a:rPr>
+              <a:t> </a:t>
+            </a:r>
+          </a:p>
+          <a:p>
+            <a:pPr>
+              <a:spcAft>
+                <a:spcPts val="0"/>
+              </a:spcAft>
+            </a:pPr>
+            <a:r>
+              <a:rPr sz="1400">
+                <a:solidFill>
+                  <a:srgbClr val="6D8C97"/>
+                </a:solidFill>
+                <a:latin typeface="Consolas"/>
+              </a:rPr>
+              <a:t>  81  </a:t>
+            </a:r>
+            <a:r>
+              <a:rPr sz="1400">
+                <a:solidFill>
+                  <a:srgbClr val="7FE0A0"/>
+                </a:solidFill>
+                <a:latin typeface="Consolas"/>
+              </a:rPr>
+              <a:t>  while (true) {</a:t>
+            </a:r>
+          </a:p>
+          <a:p>
+            <a:pPr>
+              <a:spcAft>
+                <a:spcPts val="0"/>
+              </a:spcAft>
+            </a:pPr>
+            <a:r>
+              <a:rPr sz="1400">
+                <a:solidFill>
+                  <a:srgbClr val="6D8C97"/>
+                </a:solidFill>
+                <a:latin typeface="Consolas"/>
+              </a:rPr>
+              <a:t>  82  </a:t>
+            </a:r>
+            <a:r>
+              <a:rPr sz="1400">
+                <a:solidFill>
+                  <a:srgbClr val="7FE0A0"/>
+                </a:solidFill>
+                <a:latin typeface="Consolas"/>
+              </a:rPr>
+              <a:t>    const chunk = await reader.read();</a:t>
+            </a:r>
+          </a:p>
+        </p:txBody>
+      </p:sp>
+    </p:spTree>
+  </p:cSld>
+  <p:clrMapOvr>
+    <a:masterClrMapping/>
+  </p:clrMapOvr>
+</p:sld>
+</file>
+
+<file path=ppt/slides/slide11.xml><?xml version="1.0" encoding="utf-8"?>
+<p:sld xmlns:a="http://schemas.openxmlformats.org/drawingml/2006/main" xmlns:p="http://schemas.openxmlformats.org/presentationml/2006/main" xmlns:r="http://schemas.openxmlformats.org/officeDocument/2006/relationships">
+  <p:cSld>
+    <p:bg>
+      <p:bgPr>
+        <a:solidFill>
+          <a:srgbClr val="102127"/>
+        </a:solidFill>
+        <a:effectLst/>
+      </p:bgPr>
+    </p:bg>
+    <p:spTree>
+      <p:nvGrpSpPr>
+        <p:cNvPr id="1" name=""/>
+        <p:cNvGrpSpPr/>
+        <p:nvPr/>
+      </p:nvGrpSpPr>
+      <p:grpSpPr/>
+      <p:sp>
+        <p:nvSpPr>
+          <p:cNvPr id="2" name="TextBox 1"/>
+          <p:cNvSpPr txBox="1"/>
+          <p:nvPr/>
+        </p:nvSpPr>
+        <p:spPr>
+          <a:xfrm>
+            <a:off x="502920" y="274320"/>
+            <a:ext cx="11155680" cy="731520"/>
+          </a:xfrm>
+          <a:prstGeom prst="rect">
+            <a:avLst/>
+          </a:prstGeom>
+          <a:noFill/>
+        </p:spPr>
+        <p:txBody>
+          <a:bodyPr wrap="none">
+            <a:spAutoFit/>
+          </a:bodyPr>
+          <a:lstStyle/>
+          <a:p>
+            <a:r>
+              <a:rPr sz="2600" b="1">
+                <a:solidFill>
+                  <a:srgbClr val="01AEFD"/>
+                </a:solidFill>
+              </a:rPr>
+              <a:t>Type this into script.js  (2 of 3)</a:t>
+            </a:r>
+          </a:p>
+        </p:txBody>
+      </p:sp>
+      <p:sp>
+        <p:nvSpPr>
+          <p:cNvPr id="3" name="TextBox 2"/>
+          <p:cNvSpPr txBox="1"/>
+          <p:nvPr/>
+        </p:nvSpPr>
+        <p:spPr>
+          <a:xfrm>
+            <a:off x="502920" y="1051560"/>
+            <a:ext cx="11155680" cy="5394960"/>
+          </a:xfrm>
+          <a:prstGeom prst="rect">
+            <a:avLst/>
+          </a:prstGeom>
+          <a:noFill/>
+        </p:spPr>
+        <p:txBody>
+          <a:bodyPr wrap="none">
+            <a:spAutoFit/>
+          </a:bodyPr>
+          <a:lstStyle/>
+          <a:p>
+            <a:pPr>
+              <a:spcAft>
+                <a:spcPts val="0"/>
+              </a:spcAft>
+            </a:pPr>
+            <a:r>
+              <a:rPr sz="1400">
+                <a:solidFill>
+                  <a:srgbClr val="6D8C97"/>
+                </a:solidFill>
+                <a:latin typeface="Consolas"/>
+              </a:rPr>
+              <a:t>  83  </a:t>
+            </a:r>
+            <a:r>
+              <a:rPr sz="1400">
+                <a:solidFill>
+                  <a:srgbClr val="7FE0A0"/>
+                </a:solidFill>
+                <a:latin typeface="Consolas"/>
+              </a:rPr>
+              <a:t>    if (chunk.done) { break; }</a:t>
+            </a:r>
+          </a:p>
+          <a:p>
+            <a:pPr>
+              <a:spcAft>
+                <a:spcPts val="0"/>
+              </a:spcAft>
+            </a:pPr>
+            <a:r>
+              <a:rPr sz="1400">
+                <a:solidFill>
+                  <a:srgbClr val="6D8C97"/>
+                </a:solidFill>
+                <a:latin typeface="Consolas"/>
+              </a:rPr>
+              <a:t>  84  </a:t>
+            </a:r>
+            <a:r>
+              <a:rPr sz="1400">
+                <a:solidFill>
+                  <a:srgbClr val="7FE0A0"/>
+                </a:solidFill>
+                <a:latin typeface="Consolas"/>
+              </a:rPr>
+              <a:t>    buffer += decoder.decode(chunk.value, { stream: true });</a:t>
+            </a:r>
+          </a:p>
+          <a:p>
+            <a:pPr>
+              <a:spcAft>
+                <a:spcPts val="0"/>
+              </a:spcAft>
+            </a:pPr>
+            <a:r>
+              <a:rPr sz="1400">
+                <a:solidFill>
+                  <a:srgbClr val="6D8C97"/>
+                </a:solidFill>
+                <a:latin typeface="Consolas"/>
+              </a:rPr>
+              <a:t>  85  </a:t>
+            </a:r>
+            <a:r>
+              <a:rPr sz="1400">
+                <a:solidFill>
+                  <a:srgbClr val="7FE0A0"/>
+                </a:solidFill>
+                <a:latin typeface="Consolas"/>
+              </a:rPr>
+              <a:t> </a:t>
+            </a:r>
+          </a:p>
+          <a:p>
+            <a:pPr>
+              <a:spcAft>
+                <a:spcPts val="0"/>
+              </a:spcAft>
+            </a:pPr>
+            <a:r>
+              <a:rPr sz="1400">
+                <a:solidFill>
+                  <a:srgbClr val="6D8C97"/>
+                </a:solidFill>
+                <a:latin typeface="Consolas"/>
+              </a:rPr>
+              <a:t>  86  </a:t>
+            </a:r>
+            <a:r>
+              <a:rPr sz="1400">
+                <a:solidFill>
+                  <a:srgbClr val="7FE0A0"/>
+                </a:solidFill>
+                <a:latin typeface="Consolas"/>
+              </a:rPr>
+              <a:t>    // Complete pieces are separated by a blank line. Keep the last,</a:t>
+            </a:r>
+          </a:p>
+          <a:p>
+            <a:pPr>
+              <a:spcAft>
+                <a:spcPts val="0"/>
+              </a:spcAft>
+            </a:pPr>
+            <a:r>
+              <a:rPr sz="1400">
+                <a:solidFill>
+                  <a:srgbClr val="6D8C97"/>
+                </a:solidFill>
+                <a:latin typeface="Consolas"/>
+              </a:rPr>
+              <a:t>  87  </a:t>
+            </a:r>
+            <a:r>
+              <a:rPr sz="1400">
+                <a:solidFill>
+                  <a:srgbClr val="7FE0A0"/>
+                </a:solidFill>
+                <a:latin typeface="Consolas"/>
+              </a:rPr>
+              <a:t>    // possibly unfinished, piece in the buffer for the next round.</a:t>
+            </a:r>
+          </a:p>
+          <a:p>
+            <a:pPr>
+              <a:spcAft>
+                <a:spcPts val="0"/>
+              </a:spcAft>
+            </a:pPr>
+            <a:r>
+              <a:rPr sz="1400">
+                <a:solidFill>
+                  <a:srgbClr val="6D8C97"/>
+                </a:solidFill>
+                <a:latin typeface="Consolas"/>
+              </a:rPr>
+              <a:t>  88  </a:t>
+            </a:r>
+            <a:r>
+              <a:rPr sz="1400">
+                <a:solidFill>
+                  <a:srgbClr val="7FE0A0"/>
+                </a:solidFill>
+                <a:latin typeface="Consolas"/>
+              </a:rPr>
+              <a:t>    const parts = buffer.split('\n\n');</a:t>
+            </a:r>
+          </a:p>
+          <a:p>
+            <a:pPr>
+              <a:spcAft>
+                <a:spcPts val="0"/>
+              </a:spcAft>
+            </a:pPr>
+            <a:r>
+              <a:rPr sz="1400">
+                <a:solidFill>
+                  <a:srgbClr val="6D8C97"/>
+                </a:solidFill>
+                <a:latin typeface="Consolas"/>
+              </a:rPr>
+              <a:t>  89  </a:t>
+            </a:r>
+            <a:r>
+              <a:rPr sz="1400">
+                <a:solidFill>
+                  <a:srgbClr val="7FE0A0"/>
+                </a:solidFill>
+                <a:latin typeface="Consolas"/>
+              </a:rPr>
+              <a:t>    buffer = parts.pop();</a:t>
+            </a:r>
+          </a:p>
+          <a:p>
+            <a:pPr>
+              <a:spcAft>
+                <a:spcPts val="0"/>
+              </a:spcAft>
+            </a:pPr>
+            <a:r>
+              <a:rPr sz="1400">
+                <a:solidFill>
+                  <a:srgbClr val="6D8C97"/>
+                </a:solidFill>
+                <a:latin typeface="Consolas"/>
+              </a:rPr>
+              <a:t>  90  </a:t>
+            </a:r>
+            <a:r>
+              <a:rPr sz="1400">
+                <a:solidFill>
+                  <a:srgbClr val="7FE0A0"/>
+                </a:solidFill>
+                <a:latin typeface="Consolas"/>
+              </a:rPr>
+              <a:t> </a:t>
+            </a:r>
+          </a:p>
+          <a:p>
+            <a:pPr>
+              <a:spcAft>
+                <a:spcPts val="0"/>
+              </a:spcAft>
+            </a:pPr>
+            <a:r>
+              <a:rPr sz="1400">
+                <a:solidFill>
+                  <a:srgbClr val="6D8C97"/>
+                </a:solidFill>
+                <a:latin typeface="Consolas"/>
+              </a:rPr>
+              <a:t>  91  </a:t>
+            </a:r>
+            <a:r>
+              <a:rPr sz="1400">
+                <a:solidFill>
+                  <a:srgbClr val="7FE0A0"/>
+                </a:solidFill>
+                <a:latin typeface="Consolas"/>
+              </a:rPr>
+              <a:t>    for (const part of parts) {</a:t>
+            </a:r>
+          </a:p>
+          <a:p>
+            <a:pPr>
+              <a:spcAft>
+                <a:spcPts val="0"/>
+              </a:spcAft>
+            </a:pPr>
+            <a:r>
+              <a:rPr sz="1400">
+                <a:solidFill>
+                  <a:srgbClr val="6D8C97"/>
+                </a:solidFill>
+                <a:latin typeface="Consolas"/>
+              </a:rPr>
+              <a:t>  92  </a:t>
+            </a:r>
+            <a:r>
+              <a:rPr sz="1400">
+                <a:solidFill>
+                  <a:srgbClr val="7FE0A0"/>
+                </a:solidFill>
+                <a:latin typeface="Consolas"/>
+              </a:rPr>
+              <a:t>      const line = part.trim();</a:t>
+            </a:r>
+          </a:p>
+          <a:p>
+            <a:pPr>
+              <a:spcAft>
+                <a:spcPts val="0"/>
+              </a:spcAft>
+            </a:pPr>
+            <a:r>
+              <a:rPr sz="1400">
+                <a:solidFill>
+                  <a:srgbClr val="6D8C97"/>
+                </a:solidFill>
+                <a:latin typeface="Consolas"/>
+              </a:rPr>
+              <a:t>  93  </a:t>
+            </a:r>
+            <a:r>
+              <a:rPr sz="1400">
+                <a:solidFill>
+                  <a:srgbClr val="7FE0A0"/>
+                </a:solidFill>
+                <a:latin typeface="Consolas"/>
+              </a:rPr>
+              <a:t>      if (!line.startsWith('data: ')) { continue; }</a:t>
+            </a:r>
+          </a:p>
+          <a:p>
+            <a:pPr>
+              <a:spcAft>
+                <a:spcPts val="0"/>
+              </a:spcAft>
+            </a:pPr>
+            <a:r>
+              <a:rPr sz="1400">
+                <a:solidFill>
+                  <a:srgbClr val="6D8C97"/>
+                </a:solidFill>
+                <a:latin typeface="Consolas"/>
+              </a:rPr>
+              <a:t>  94  </a:t>
+            </a:r>
+            <a:r>
+              <a:rPr sz="1400">
+                <a:solidFill>
+                  <a:srgbClr val="7FE0A0"/>
+                </a:solidFill>
+                <a:latin typeface="Consolas"/>
+              </a:rPr>
+              <a:t>      const payload = line.slice(6);</a:t>
+            </a:r>
+          </a:p>
+          <a:p>
+            <a:pPr>
+              <a:spcAft>
+                <a:spcPts val="0"/>
+              </a:spcAft>
+            </a:pPr>
+            <a:r>
+              <a:rPr sz="1400">
+                <a:solidFill>
+                  <a:srgbClr val="6D8C97"/>
+                </a:solidFill>
+                <a:latin typeface="Consolas"/>
+              </a:rPr>
+              <a:t>  95  </a:t>
+            </a:r>
+            <a:r>
+              <a:rPr sz="1400">
+                <a:solidFill>
+                  <a:srgbClr val="7FE0A0"/>
+                </a:solidFill>
+                <a:latin typeface="Consolas"/>
+              </a:rPr>
+              <a:t>      if (payload === '[DONE]') { continue; }</a:t>
+            </a:r>
+          </a:p>
+          <a:p>
+            <a:pPr>
+              <a:spcAft>
+                <a:spcPts val="0"/>
+              </a:spcAft>
+            </a:pPr>
+            <a:r>
+              <a:rPr sz="1400">
+                <a:solidFill>
+                  <a:srgbClr val="6D8C97"/>
+                </a:solidFill>
+                <a:latin typeface="Consolas"/>
+              </a:rPr>
+              <a:t>  96  </a:t>
+            </a:r>
+            <a:r>
+              <a:rPr sz="1400">
+                <a:solidFill>
+                  <a:srgbClr val="7FE0A0"/>
+                </a:solidFill>
+                <a:latin typeface="Consolas"/>
+              </a:rPr>
+              <a:t>      const piece = JSON.parse(payload);</a:t>
+            </a:r>
+          </a:p>
+          <a:p>
+            <a:pPr>
+              <a:spcAft>
+                <a:spcPts val="0"/>
+              </a:spcAft>
+            </a:pPr>
+            <a:r>
+              <a:rPr sz="1400">
+                <a:solidFill>
+                  <a:srgbClr val="6D8C97"/>
+                </a:solidFill>
+                <a:latin typeface="Consolas"/>
+              </a:rPr>
+              <a:t>  97  </a:t>
+            </a:r>
+            <a:r>
+              <a:rPr sz="1400">
+                <a:solidFill>
+                  <a:srgbClr val="7FE0A0"/>
+                </a:solidFill>
+                <a:latin typeface="Consolas"/>
+              </a:rPr>
+              <a:t>      const bit = piece.choices[0].delta.content;</a:t>
+            </a:r>
+          </a:p>
+        </p:txBody>
+      </p:sp>
+    </p:spTree>
+  </p:cSld>
+  <p:clrMapOvr>
+    <a:masterClrMapping/>
+  </p:clrMapOvr>
+</p:sld>
+</file>
+
+<file path=ppt/slides/slide12.xml><?xml version="1.0" encoding="utf-8"?>
+<p:sld xmlns:a="http://schemas.openxmlformats.org/drawingml/2006/main" xmlns:p="http://schemas.openxmlformats.org/presentationml/2006/main" xmlns:r="http://schemas.openxmlformats.org/officeDocument/2006/relationships">
+  <p:cSld>
+    <p:bg>
+      <p:bgPr>
+        <a:solidFill>
+          <a:srgbClr val="102127"/>
+        </a:solidFill>
+        <a:effectLst/>
+      </p:bgPr>
+    </p:bg>
+    <p:spTree>
+      <p:nvGrpSpPr>
+        <p:cNvPr id="1" name=""/>
+        <p:cNvGrpSpPr/>
+        <p:nvPr/>
+      </p:nvGrpSpPr>
+      <p:grpSpPr/>
+      <p:sp>
+        <p:nvSpPr>
+          <p:cNvPr id="2" name="TextBox 1"/>
+          <p:cNvSpPr txBox="1"/>
+          <p:nvPr/>
+        </p:nvSpPr>
+        <p:spPr>
+          <a:xfrm>
+            <a:off x="502920" y="274320"/>
+            <a:ext cx="11155680" cy="731520"/>
+          </a:xfrm>
+          <a:prstGeom prst="rect">
+            <a:avLst/>
+          </a:prstGeom>
+          <a:noFill/>
+        </p:spPr>
+        <p:txBody>
+          <a:bodyPr wrap="none">
+            <a:spAutoFit/>
+          </a:bodyPr>
+          <a:lstStyle/>
+          <a:p>
+            <a:r>
+              <a:rPr sz="2600" b="1">
+                <a:solidFill>
+                  <a:srgbClr val="01AEFD"/>
+                </a:solidFill>
+              </a:rPr>
+              <a:t>Type this into script.js  (3 of 3)</a:t>
+            </a:r>
+          </a:p>
+        </p:txBody>
+      </p:sp>
+      <p:sp>
+        <p:nvSpPr>
+          <p:cNvPr id="3" name="TextBox 2"/>
+          <p:cNvSpPr txBox="1"/>
+          <p:nvPr/>
+        </p:nvSpPr>
+        <p:spPr>
+          <a:xfrm>
+            <a:off x="502920" y="1051560"/>
+            <a:ext cx="11155680" cy="5394960"/>
+          </a:xfrm>
+          <a:prstGeom prst="rect">
+            <a:avLst/>
+          </a:prstGeom>
+          <a:noFill/>
+        </p:spPr>
+        <p:txBody>
+          <a:bodyPr wrap="none">
+            <a:spAutoFit/>
+          </a:bodyPr>
+          <a:lstStyle/>
+          <a:p>
+            <a:pPr>
+              <a:spcAft>
+                <a:spcPts val="0"/>
+              </a:spcAft>
+            </a:pPr>
+            <a:r>
+              <a:rPr sz="1700">
+                <a:solidFill>
+                  <a:srgbClr val="6D8C97"/>
+                </a:solidFill>
+                <a:latin typeface="Consolas"/>
+              </a:rPr>
+              <a:t>  98  </a:t>
+            </a:r>
+            <a:r>
+              <a:rPr sz="1700">
+                <a:solidFill>
+                  <a:srgbClr val="7FE0A0"/>
+                </a:solidFill>
+                <a:latin typeface="Consolas"/>
+              </a:rPr>
+              <a:t>      if (bit) { answer += bit; }</a:t>
+            </a:r>
+          </a:p>
+          <a:p>
+            <a:pPr>
+              <a:spcAft>
+                <a:spcPts val="0"/>
+              </a:spcAft>
+            </a:pPr>
+            <a:r>
+              <a:rPr sz="1700">
+                <a:solidFill>
+                  <a:srgbClr val="6D8C97"/>
+                </a:solidFill>
+                <a:latin typeface="Consolas"/>
+              </a:rPr>
+              <a:t>  99  </a:t>
+            </a:r>
+            <a:r>
+              <a:rPr sz="1700">
+                <a:solidFill>
+                  <a:srgbClr val="7FE0A0"/>
+                </a:solidFill>
+                <a:latin typeface="Consolas"/>
+              </a:rPr>
+              <a:t>    }</a:t>
+            </a:r>
+          </a:p>
+          <a:p>
+            <a:pPr>
+              <a:spcAft>
+                <a:spcPts val="0"/>
+              </a:spcAft>
+            </a:pPr>
+            <a:r>
+              <a:rPr sz="1700">
+                <a:solidFill>
+                  <a:srgbClr val="6D8C97"/>
+                </a:solidFill>
+                <a:latin typeface="Consolas"/>
+              </a:rPr>
+              <a:t> 100  </a:t>
+            </a:r>
+            <a:r>
+              <a:rPr sz="1700">
+                <a:solidFill>
+                  <a:srgbClr val="7FE0A0"/>
+                </a:solidFill>
+                <a:latin typeface="Consolas"/>
+              </a:rPr>
+              <a:t>  }</a:t>
+            </a:r>
+          </a:p>
+          <a:p>
+            <a:pPr>
+              <a:spcAft>
+                <a:spcPts val="0"/>
+              </a:spcAft>
+            </a:pPr>
+            <a:r>
+              <a:rPr sz="1700">
+                <a:solidFill>
+                  <a:srgbClr val="6D8C97"/>
+                </a:solidFill>
+                <a:latin typeface="Consolas"/>
+              </a:rPr>
+              <a:t> 101  </a:t>
+            </a:r>
+            <a:r>
+              <a:rPr sz="1700">
+                <a:solidFill>
+                  <a:srgbClr val="7FE0A0"/>
+                </a:solidFill>
+                <a:latin typeface="Consolas"/>
+              </a:rPr>
+              <a:t>  return answer;</a:t>
+            </a:r>
+          </a:p>
+          <a:p>
+            <a:pPr>
+              <a:spcAft>
+                <a:spcPts val="0"/>
+              </a:spcAft>
+            </a:pPr>
+            <a:r>
+              <a:rPr sz="1700">
+                <a:solidFill>
+                  <a:srgbClr val="6D8C97"/>
+                </a:solidFill>
+                <a:latin typeface="Consolas"/>
+              </a:rPr>
+              <a:t> 102  </a:t>
+            </a:r>
+            <a:r>
+              <a:rPr sz="1700">
+                <a:solidFill>
+                  <a:srgbClr val="7FE0A0"/>
+                </a:solidFill>
+                <a:latin typeface="Consolas"/>
+              </a:rPr>
+              <a:t>}</a:t>
+            </a:r>
+          </a:p>
+        </p:txBody>
+      </p:sp>
+    </p:spTree>
+  </p:cSld>
+  <p:clrMapOvr>
+    <a:masterClrMapping/>
+  </p:clrMapOvr>
+</p:sld>
+</file>
+
+<file path=ppt/slides/slide13.xml><?xml version="1.0" encoding="utf-8"?>
+<p:sld xmlns:a="http://schemas.openxmlformats.org/drawingml/2006/main" xmlns:p="http://schemas.openxmlformats.org/presentationml/2006/main" xmlns:r="http://schemas.openxmlformats.org/officeDocument/2006/relationships">
+  <p:cSld>
+    <p:spTree>
+      <p:nvGrpSpPr>
+        <p:cNvPr id="1" name=""/>
+        <p:cNvGrpSpPr/>
+        <p:nvPr/>
+      </p:nvGrpSpPr>
+      <p:grpSpPr/>
+      <p:sp>
+        <p:nvSpPr>
+          <p:cNvPr id="2" name="Title 1"/>
+          <p:cNvSpPr>
+            <a:spLocks noGrp="1"/>
+          </p:cNvSpPr>
+          <p:nvPr>
+            <p:ph type="title"/>
+          </p:nvPr>
+        </p:nvSpPr>
+        <p:spPr/>
+        <p:txBody>
+          <a:bodyPr/>
+          <a:lstStyle/>
+          <a:p>
+            <a:r>
+              <a:rPr sz="3800" b="1">
+                <a:solidFill>
+                  <a:srgbClr val="1F2A37"/>
+                </a:solidFill>
+              </a:rPr>
+              <a:t>Today was plumbing</a:t>
+            </a:r>
+          </a:p>
+        </p:txBody>
+      </p:sp>
+      <p:sp>
+        <p:nvSpPr>
+          <p:cNvPr id="3" name="TextBox 2"/>
+          <p:cNvSpPr txBox="1"/>
+          <p:nvPr/>
+        </p:nvSpPr>
+        <p:spPr>
+          <a:xfrm>
+            <a:off x="822960" y="1828800"/>
+            <a:ext cx="10515600" cy="4206240"/>
+          </a:xfrm>
+          <a:prstGeom prst="rect">
+            <a:avLst/>
+          </a:prstGeom>
+          <a:noFill/>
+        </p:spPr>
+        <p:txBody>
+          <a:bodyPr wrap="square">
+            <a:spAutoFit/>
+          </a:bodyPr>
+          <a:lstStyle/>
+          <a:p>
+            <a:pPr>
+              <a:spcAft>
+                <a:spcPts val="1400"/>
+              </a:spcAft>
+            </a:pPr>
+            <a:r>
+              <a:rPr sz="2800">
+                <a:solidFill>
+                  <a:srgbClr val="01AEFD"/>
+                </a:solidFill>
+              </a:rPr>
+              <a:t>It looks identical</a:t>
+            </a:r>
+          </a:p>
+          <a:p>
+            <a:pPr>
+              <a:spcAft>
+                <a:spcPts val="1400"/>
+              </a:spcAft>
+            </a:pPr>
+            <a:r>
+              <a:rPr sz="2400">
+                <a:solidFill>
+                  <a:srgbClr val="1F2A37"/>
+                </a:solidFill>
+              </a:rPr>
+              <a:t>• Next week it pays off</a:t>
+            </a:r>
+          </a:p>
+        </p:txBody>
+      </p:sp>
+    </p:spTree>
+  </p:cSld>
+  <p:clrMapOvr>
+    <a:masterClrMapping/>
+  </p:clrMapOvr>
+</p:sld>
+</file>
+
 <file path=ppt/slides/slide2.xml><?xml version="1.0" encoding="utf-8"?>
 <p:sld xmlns:a="http://schemas.openxmlformats.org/drawingml/2006/main" xmlns:p="http://schemas.openxmlformats.org/presentationml/2006/main" xmlns:r="http://schemas.openxmlformats.org/officeDocument/2006/relationships">
   <p:cSld>
@@ -3520,6 +4744,14 @@
 <file path=ppt/slides/slide5.xml><?xml version="1.0" encoding="utf-8"?>
 <p:sld xmlns:a="http://schemas.openxmlformats.org/drawingml/2006/main" xmlns:p="http://schemas.openxmlformats.org/presentationml/2006/main" xmlns:r="http://schemas.openxmlformats.org/officeDocument/2006/relationships">
   <p:cSld>
+    <p:bg>
+      <p:bgPr>
+        <a:solidFill>
+          <a:srgbClr val="102127"/>
+        </a:solidFill>
+        <a:effectLst/>
+      </p:bgPr>
+    </p:bg>
     <p:spTree>
       <p:nvGrpSpPr>
         <p:cNvPr id="1" name=""/>
@@ -3529,40 +4761,14 @@
       <p:grpSpPr/>
       <p:sp>
         <p:nvSpPr>
-          <p:cNvPr id="2" name="Title 1"/>
-          <p:cNvSpPr>
-            <a:spLocks noGrp="1"/>
-          </p:cNvSpPr>
-          <p:nvPr>
-            <p:ph type="title"/>
-          </p:nvPr>
-        </p:nvSpPr>
-        <p:spPr/>
-        <p:txBody>
-          <a:bodyPr/>
-          <a:lstStyle/>
-          <a:p>
-            <a:r>
-              <a:rPr sz="3800" b="1">
-                <a:solidFill>
-                  <a:srgbClr val="1F2A37"/>
-                </a:solidFill>
-              </a:rPr>
-              <a:t>What a stream looks like</a:t>
-            </a:r>
-          </a:p>
-        </p:txBody>
-      </p:sp>
-      <p:sp>
-        <p:nvSpPr>
-          <p:cNvPr id="3" name="TextBox 2"/>
+          <p:cNvPr id="2" name="TextBox 1"/>
           <p:cNvSpPr txBox="1"/>
           <p:nvPr/>
         </p:nvSpPr>
         <p:spPr>
           <a:xfrm>
-            <a:off x="822960" y="1828800"/>
-            <a:ext cx="10515600" cy="4206240"/>
+            <a:off x="502920" y="274320"/>
+            <a:ext cx="11155680" cy="731520"/>
           </a:xfrm>
           <a:prstGeom prst="rect">
             <a:avLst/>
@@ -3570,53 +4776,416 @@
           <a:noFill/>
         </p:spPr>
         <p:txBody>
-          <a:bodyPr wrap="square">
+          <a:bodyPr wrap="none">
             <a:spAutoFit/>
           </a:bodyPr>
           <a:lstStyle/>
           <a:p>
-            <a:pPr>
-              <a:spcAft>
-                <a:spcPts val="1400"/>
-              </a:spcAft>
-            </a:pPr>
-            <a:r>
-              <a:rPr sz="2400">
-                <a:solidFill>
-                  <a:srgbClr val="1F2A37"/>
-                </a:solidFill>
-              </a:rPr>
-              <a:t>• data: {"choices":[{"delta":{"content":"Hel"}}]}</a:t>
-            </a:r>
-          </a:p>
-          <a:p>
-            <a:pPr>
-              <a:spcAft>
-                <a:spcPts val="1400"/>
-              </a:spcAft>
-            </a:pPr>
-            <a:r>
-              <a:rPr sz="2400">
-                <a:solidFill>
-                  <a:srgbClr val="1F2A37"/>
-                </a:solidFill>
-              </a:rPr>
-              <a:t>• data: {"choices":[{"delta":{"content":"lo"}}]}</a:t>
-            </a:r>
-          </a:p>
-          <a:p>
-            <a:pPr>
-              <a:spcAft>
-                <a:spcPts val="1400"/>
-              </a:spcAft>
-            </a:pPr>
-            <a:r>
-              <a:rPr sz="2400">
-                <a:solidFill>
-                  <a:srgbClr val="1F2A37"/>
-                </a:solidFill>
-              </a:rPr>
-              <a:t>• data: [DONE]</a:t>
+            <a:r>
+              <a:rPr sz="2600" b="1">
+                <a:solidFill>
+                  <a:srgbClr val="01AEFD"/>
+                </a:solidFill>
+              </a:rPr>
+              <a:t>Type this into script.js  (1 of 3)</a:t>
+            </a:r>
+          </a:p>
+        </p:txBody>
+      </p:sp>
+      <p:sp>
+        <p:nvSpPr>
+          <p:cNvPr id="3" name="TextBox 2"/>
+          <p:cNvSpPr txBox="1"/>
+          <p:nvPr/>
+        </p:nvSpPr>
+        <p:spPr>
+          <a:xfrm>
+            <a:off x="502920" y="1051560"/>
+            <a:ext cx="11155680" cy="5394960"/>
+          </a:xfrm>
+          <a:prstGeom prst="rect">
+            <a:avLst/>
+          </a:prstGeom>
+          <a:noFill/>
+        </p:spPr>
+        <p:txBody>
+          <a:bodyPr wrap="none">
+            <a:spAutoFit/>
+          </a:bodyPr>
+          <a:lstStyle/>
+          <a:p>
+            <a:pPr>
+              <a:spcAft>
+                <a:spcPts val="0"/>
+              </a:spcAft>
+            </a:pPr>
+            <a:r>
+              <a:rPr sz="1400">
+                <a:solidFill>
+                  <a:srgbClr val="6D8C97"/>
+                </a:solidFill>
+                <a:latin typeface="Consolas"/>
+              </a:rPr>
+              <a:t> 103  </a:t>
+            </a:r>
+            <a:r>
+              <a:rPr sz="1400">
+                <a:solidFill>
+                  <a:srgbClr val="7FE0A0"/>
+                </a:solidFill>
+                <a:latin typeface="Consolas"/>
+              </a:rPr>
+              <a:t> </a:t>
+            </a:r>
+          </a:p>
+          <a:p>
+            <a:pPr>
+              <a:spcAft>
+                <a:spcPts val="0"/>
+              </a:spcAft>
+            </a:pPr>
+            <a:r>
+              <a:rPr sz="1400">
+                <a:solidFill>
+                  <a:srgbClr val="6D8C97"/>
+                </a:solidFill>
+                <a:latin typeface="Consolas"/>
+              </a:rPr>
+              <a:t> 104  </a:t>
+            </a:r>
+            <a:r>
+              <a:rPr sz="1400">
+                <a:solidFill>
+                  <a:srgbClr val="DCECEF"/>
+                </a:solidFill>
+                <a:latin typeface="Consolas"/>
+              </a:rPr>
+              <a:t>// Week 4: ask the AI a real question.</a:t>
+            </a:r>
+          </a:p>
+          <a:p>
+            <a:pPr>
+              <a:spcAft>
+                <a:spcPts val="0"/>
+              </a:spcAft>
+            </a:pPr>
+            <a:r>
+              <a:rPr sz="1400">
+                <a:solidFill>
+                  <a:srgbClr val="6D8C97"/>
+                </a:solidFill>
+                <a:latin typeface="Consolas"/>
+              </a:rPr>
+              <a:t> 105  </a:t>
+            </a:r>
+            <a:r>
+              <a:rPr sz="1400">
+                <a:solidFill>
+                  <a:srgbClr val="DCECEF"/>
+                </a:solidFill>
+                <a:latin typeface="Consolas"/>
+              </a:rPr>
+              <a:t>// A chat request is a LIST of messages. Each one says who said it.</a:t>
+            </a:r>
+          </a:p>
+          <a:p>
+            <a:pPr>
+              <a:spcAft>
+                <a:spcPts val="0"/>
+              </a:spcAft>
+            </a:pPr>
+            <a:r>
+              <a:rPr sz="1400">
+                <a:solidFill>
+                  <a:srgbClr val="6D8C97"/>
+                </a:solidFill>
+                <a:latin typeface="Consolas"/>
+              </a:rPr>
+              <a:t> 106  </a:t>
+            </a:r>
+            <a:r>
+              <a:rPr sz="1400">
+                <a:solidFill>
+                  <a:srgbClr val="DCECEF"/>
+                </a:solidFill>
+                <a:latin typeface="Consolas"/>
+              </a:rPr>
+              <a:t>async function askAI() {</a:t>
+            </a:r>
+          </a:p>
+          <a:p>
+            <a:pPr>
+              <a:spcAft>
+                <a:spcPts val="0"/>
+              </a:spcAft>
+            </a:pPr>
+            <a:r>
+              <a:rPr sz="1400">
+                <a:solidFill>
+                  <a:srgbClr val="6D8C97"/>
+                </a:solidFill>
+                <a:latin typeface="Consolas"/>
+              </a:rPr>
+              <a:t> 107  </a:t>
+            </a:r>
+            <a:r>
+              <a:rPr sz="1400">
+                <a:solidFill>
+                  <a:srgbClr val="DCECEF"/>
+                </a:solidFill>
+                <a:latin typeface="Consolas"/>
+              </a:rPr>
+              <a:t>  trimHistory();   // week 8: never send more than the server will read</a:t>
+            </a:r>
+          </a:p>
+          <a:p>
+            <a:pPr>
+              <a:spcAft>
+                <a:spcPts val="0"/>
+              </a:spcAft>
+            </a:pPr>
+            <a:r>
+              <a:rPr sz="1400">
+                <a:solidFill>
+                  <a:srgbClr val="6D8C97"/>
+                </a:solidFill>
+                <a:latin typeface="Consolas"/>
+              </a:rPr>
+              <a:t> 108  </a:t>
+            </a:r>
+            <a:r>
+              <a:rPr sz="1400">
+                <a:solidFill>
+                  <a:srgbClr val="DCECEF"/>
+                </a:solidFill>
+                <a:latin typeface="Consolas"/>
+              </a:rPr>
+              <a:t>  const res = await fetch(AI_BASE + '/v1/chat/completions', {</a:t>
+            </a:r>
+          </a:p>
+          <a:p>
+            <a:pPr>
+              <a:spcAft>
+                <a:spcPts val="0"/>
+              </a:spcAft>
+            </a:pPr>
+            <a:r>
+              <a:rPr sz="1400">
+                <a:solidFill>
+                  <a:srgbClr val="6D8C97"/>
+                </a:solidFill>
+                <a:latin typeface="Consolas"/>
+              </a:rPr>
+              <a:t> 109  </a:t>
+            </a:r>
+            <a:r>
+              <a:rPr sz="1400">
+                <a:solidFill>
+                  <a:srgbClr val="DCECEF"/>
+                </a:solidFill>
+                <a:latin typeface="Consolas"/>
+              </a:rPr>
+              <a:t>    method: 'POST',                       // POST = I am sending you something</a:t>
+            </a:r>
+          </a:p>
+          <a:p>
+            <a:pPr>
+              <a:spcAft>
+                <a:spcPts val="0"/>
+              </a:spcAft>
+            </a:pPr>
+            <a:r>
+              <a:rPr sz="1400">
+                <a:solidFill>
+                  <a:srgbClr val="6D8C97"/>
+                </a:solidFill>
+                <a:latin typeface="Consolas"/>
+              </a:rPr>
+              <a:t> 110  </a:t>
+            </a:r>
+            <a:r>
+              <a:rPr sz="1400">
+                <a:solidFill>
+                  <a:srgbClr val="DCECEF"/>
+                </a:solidFill>
+                <a:latin typeface="Consolas"/>
+              </a:rPr>
+              <a:t>    headers: {</a:t>
+            </a:r>
+          </a:p>
+          <a:p>
+            <a:pPr>
+              <a:spcAft>
+                <a:spcPts val="0"/>
+              </a:spcAft>
+            </a:pPr>
+            <a:r>
+              <a:rPr sz="1400">
+                <a:solidFill>
+                  <a:srgbClr val="6D8C97"/>
+                </a:solidFill>
+                <a:latin typeface="Consolas"/>
+              </a:rPr>
+              <a:t> 111  </a:t>
+            </a:r>
+            <a:r>
+              <a:rPr sz="1400">
+                <a:solidFill>
+                  <a:srgbClr val="DCECEF"/>
+                </a:solidFill>
+                <a:latin typeface="Consolas"/>
+              </a:rPr>
+              <a:t>      'Content-Type': 'application/json', // what I am sending is JSON</a:t>
+            </a:r>
+          </a:p>
+          <a:p>
+            <a:pPr>
+              <a:spcAft>
+                <a:spcPts val="0"/>
+              </a:spcAft>
+            </a:pPr>
+            <a:r>
+              <a:rPr sz="1400">
+                <a:solidFill>
+                  <a:srgbClr val="6D8C97"/>
+                </a:solidFill>
+                <a:latin typeface="Consolas"/>
+              </a:rPr>
+              <a:t> 112  </a:t>
+            </a:r>
+            <a:r>
+              <a:rPr sz="1400">
+                <a:solidFill>
+                  <a:srgbClr val="DCECEF"/>
+                </a:solidFill>
+                <a:latin typeface="Consolas"/>
+              </a:rPr>
+              <a:t>      'Authorization': 'Bearer ' + API_KEY</a:t>
+            </a:r>
+          </a:p>
+          <a:p>
+            <a:pPr>
+              <a:spcAft>
+                <a:spcPts val="0"/>
+              </a:spcAft>
+            </a:pPr>
+            <a:r>
+              <a:rPr sz="1400">
+                <a:solidFill>
+                  <a:srgbClr val="6D8C97"/>
+                </a:solidFill>
+                <a:latin typeface="Consolas"/>
+              </a:rPr>
+              <a:t> 113  </a:t>
+            </a:r>
+            <a:r>
+              <a:rPr sz="1400">
+                <a:solidFill>
+                  <a:srgbClr val="DCECEF"/>
+                </a:solidFill>
+                <a:latin typeface="Consolas"/>
+              </a:rPr>
+              <a:t>    },</a:t>
+            </a:r>
+          </a:p>
+          <a:p>
+            <a:pPr>
+              <a:spcAft>
+                <a:spcPts val="0"/>
+              </a:spcAft>
+            </a:pPr>
+            <a:r>
+              <a:rPr sz="1400">
+                <a:solidFill>
+                  <a:srgbClr val="6D8C97"/>
+                </a:solidFill>
+                <a:latin typeface="Consolas"/>
+              </a:rPr>
+              <a:t> 114  </a:t>
+            </a:r>
+            <a:r>
+              <a:rPr sz="1400">
+                <a:solidFill>
+                  <a:srgbClr val="DCECEF"/>
+                </a:solidFill>
+                <a:latin typeface="Consolas"/>
+              </a:rPr>
+              <a:t>    body: JSON.stringify({</a:t>
+            </a:r>
+          </a:p>
+          <a:p>
+            <a:pPr>
+              <a:spcAft>
+                <a:spcPts val="0"/>
+              </a:spcAft>
+            </a:pPr>
+            <a:r>
+              <a:rPr sz="1400">
+                <a:solidFill>
+                  <a:srgbClr val="6D8C97"/>
+                </a:solidFill>
+                <a:latin typeface="Consolas"/>
+              </a:rPr>
+              <a:t> 115  </a:t>
+            </a:r>
+            <a:r>
+              <a:rPr sz="1400">
+                <a:solidFill>
+                  <a:srgbClr val="DCECEF"/>
+                </a:solidFill>
+                <a:latin typeface="Consolas"/>
+              </a:rPr>
+              <a:t>      model: modelBox.value,                    // week 9: chosen on the page</a:t>
+            </a:r>
+          </a:p>
+          <a:p>
+            <a:pPr>
+              <a:spcAft>
+                <a:spcPts val="0"/>
+              </a:spcAft>
+            </a:pPr>
+            <a:r>
+              <a:rPr sz="1400">
+                <a:solidFill>
+                  <a:srgbClr val="6D8C97"/>
+                </a:solidFill>
+                <a:latin typeface="Consolas"/>
+              </a:rPr>
+              <a:t> 116  </a:t>
+            </a:r>
+            <a:r>
+              <a:rPr sz="1400">
+                <a:solidFill>
+                  <a:srgbClr val="DCECEF"/>
+                </a:solidFill>
+                <a:latin typeface="Consolas"/>
+              </a:rPr>
+              <a:t>      temperature: Number(tempBox.value),       // 0 = careful, 1.5 = wild</a:t>
+            </a:r>
+          </a:p>
+          <a:p>
+            <a:pPr>
+              <a:spcAft>
+                <a:spcPts val="0"/>
+              </a:spcAft>
+            </a:pPr>
+            <a:r>
+              <a:rPr sz="1400">
+                <a:solidFill>
+                  <a:srgbClr val="6D8C97"/>
+                </a:solidFill>
+                <a:latin typeface="Consolas"/>
+              </a:rPr>
+              <a:t> 117  </a:t>
+            </a:r>
+            <a:r>
+              <a:rPr sz="1400">
+                <a:solidFill>
+                  <a:srgbClr val="7FE0A0"/>
+                </a:solidFill>
+                <a:latin typeface="Consolas"/>
+              </a:rPr>
+              <a:t>      stream: true,                             // week 10: send it in pieces</a:t>
             </a:r>
           </a:p>
         </p:txBody>
@@ -3632,6 +5201,14 @@
 <file path=ppt/slides/slide6.xml><?xml version="1.0" encoding="utf-8"?>
 <p:sld xmlns:a="http://schemas.openxmlformats.org/drawingml/2006/main" xmlns:p="http://schemas.openxmlformats.org/presentationml/2006/main" xmlns:r="http://schemas.openxmlformats.org/officeDocument/2006/relationships">
   <p:cSld>
+    <p:bg>
+      <p:bgPr>
+        <a:solidFill>
+          <a:srgbClr val="102127"/>
+        </a:solidFill>
+        <a:effectLst/>
+      </p:bgPr>
+    </p:bg>
     <p:spTree>
       <p:nvGrpSpPr>
         <p:cNvPr id="1" name=""/>
@@ -3641,40 +5218,14 @@
       <p:grpSpPr/>
       <p:sp>
         <p:nvSpPr>
-          <p:cNvPr id="2" name="Title 1"/>
-          <p:cNvSpPr>
-            <a:spLocks noGrp="1"/>
-          </p:cNvSpPr>
-          <p:nvPr>
-            <p:ph type="title"/>
-          </p:nvPr>
-        </p:nvSpPr>
-        <p:spPr/>
-        <p:txBody>
-          <a:bodyPr/>
-          <a:lstStyle/>
-          <a:p>
-            <a:r>
-              <a:rPr sz="3800" b="1">
-                <a:solidFill>
-                  <a:srgbClr val="1F2A37"/>
-                </a:solidFill>
-              </a:rPr>
-              <a:t>Pieces get cut in half</a:t>
-            </a:r>
-          </a:p>
-        </p:txBody>
-      </p:sp>
-      <p:sp>
-        <p:nvSpPr>
-          <p:cNvPr id="3" name="TextBox 2"/>
+          <p:cNvPr id="2" name="TextBox 1"/>
           <p:cNvSpPr txBox="1"/>
           <p:nvPr/>
         </p:nvSpPr>
         <p:spPr>
           <a:xfrm>
-            <a:off x="822960" y="1828800"/>
-            <a:ext cx="10515600" cy="4206240"/>
+            <a:off x="502920" y="274320"/>
+            <a:ext cx="11155680" cy="731520"/>
           </a:xfrm>
           <a:prstGeom prst="rect">
             <a:avLst/>
@@ -3682,68 +5233,416 @@
           <a:noFill/>
         </p:spPr>
         <p:txBody>
-          <a:bodyPr wrap="square">
+          <a:bodyPr wrap="none">
             <a:spAutoFit/>
           </a:bodyPr>
           <a:lstStyle/>
           <a:p>
-            <a:pPr>
-              <a:spcAft>
-                <a:spcPts val="1400"/>
-              </a:spcAft>
-            </a:pPr>
-            <a:r>
-              <a:rPr sz="2800">
+            <a:r>
+              <a:rPr sz="2600" b="1">
                 <a:solidFill>
                   <a:srgbClr val="01AEFD"/>
                 </a:solidFill>
               </a:rPr>
-              <a:t>That is what the buffer is for</a:t>
-            </a:r>
-          </a:p>
-          <a:p>
-            <a:pPr>
-              <a:spcAft>
-                <a:spcPts val="1400"/>
-              </a:spcAft>
-            </a:pPr>
-            <a:r>
-              <a:rPr sz="2400">
-                <a:solidFill>
-                  <a:srgbClr val="1F2A37"/>
-                </a:solidFill>
-              </a:rPr>
-              <a:t>• Keep the unfinished piece</a:t>
-            </a:r>
-          </a:p>
-          <a:p>
-            <a:pPr>
-              <a:spcAft>
-                <a:spcPts val="1400"/>
-              </a:spcAft>
-            </a:pPr>
-            <a:r>
-              <a:rPr sz="2400">
-                <a:solidFill>
-                  <a:srgbClr val="1F2A37"/>
-                </a:solidFill>
-              </a:rPr>
-              <a:t>• Wait for the rest</a:t>
-            </a:r>
-          </a:p>
-          <a:p>
-            <a:pPr>
-              <a:spcAft>
-                <a:spcPts val="1400"/>
-              </a:spcAft>
-            </a:pPr>
-            <a:r>
-              <a:rPr sz="2400">
-                <a:solidFill>
-                  <a:srgbClr val="1F2A37"/>
-                </a:solidFill>
-              </a:rPr>
-              <a:t>• Then read it</a:t>
+              <a:t>Type this into script.js  (2 of 3)</a:t>
+            </a:r>
+          </a:p>
+        </p:txBody>
+      </p:sp>
+      <p:sp>
+        <p:nvSpPr>
+          <p:cNvPr id="3" name="TextBox 2"/>
+          <p:cNvSpPr txBox="1"/>
+          <p:nvPr/>
+        </p:nvSpPr>
+        <p:spPr>
+          <a:xfrm>
+            <a:off x="502920" y="1051560"/>
+            <a:ext cx="11155680" cy="5394960"/>
+          </a:xfrm>
+          <a:prstGeom prst="rect">
+            <a:avLst/>
+          </a:prstGeom>
+          <a:noFill/>
+        </p:spPr>
+        <p:txBody>
+          <a:bodyPr wrap="none">
+            <a:spAutoFit/>
+          </a:bodyPr>
+          <a:lstStyle/>
+          <a:p>
+            <a:pPr>
+              <a:spcAft>
+                <a:spcPts val="0"/>
+              </a:spcAft>
+            </a:pPr>
+            <a:r>
+              <a:rPr sz="1400">
+                <a:solidFill>
+                  <a:srgbClr val="6D8C97"/>
+                </a:solidFill>
+                <a:latin typeface="Consolas"/>
+              </a:rPr>
+              <a:t> 118  </a:t>
+            </a:r>
+            <a:r>
+              <a:rPr sz="1400">
+                <a:solidFill>
+                  <a:srgbClr val="DCECEF"/>
+                </a:solidFill>
+                <a:latin typeface="Consolas"/>
+              </a:rPr>
+              <a:t>      messages: [</a:t>
+            </a:r>
+          </a:p>
+          <a:p>
+            <a:pPr>
+              <a:spcAft>
+                <a:spcPts val="0"/>
+              </a:spcAft>
+            </a:pPr>
+            <a:r>
+              <a:rPr sz="1400">
+                <a:solidFill>
+                  <a:srgbClr val="6D8C97"/>
+                </a:solidFill>
+                <a:latin typeface="Consolas"/>
+              </a:rPr>
+              <a:t> 119  </a:t>
+            </a:r>
+            <a:r>
+              <a:rPr sz="1400">
+                <a:solidFill>
+                  <a:srgbClr val="DCECEF"/>
+                </a:solidFill>
+                <a:latin typeface="Consolas"/>
+              </a:rPr>
+              <a:t>        // Week 6: the standing instruction, read before every single reply.</a:t>
+            </a:r>
+          </a:p>
+          <a:p>
+            <a:pPr>
+              <a:spcAft>
+                <a:spcPts val="0"/>
+              </a:spcAft>
+            </a:pPr>
+            <a:r>
+              <a:rPr sz="1400">
+                <a:solidFill>
+                  <a:srgbClr val="6D8C97"/>
+                </a:solidFill>
+                <a:latin typeface="Consolas"/>
+              </a:rPr>
+              <a:t> 120  </a:t>
+            </a:r>
+            <a:r>
+              <a:rPr sz="1400">
+                <a:solidFill>
+                  <a:srgbClr val="DCECEF"/>
+                </a:solidFill>
+                <a:latin typeface="Consolas"/>
+              </a:rPr>
+              <a:t>        { role: 'system', content: personaBox.value },</a:t>
+            </a:r>
+          </a:p>
+          <a:p>
+            <a:pPr>
+              <a:spcAft>
+                <a:spcPts val="0"/>
+              </a:spcAft>
+            </a:pPr>
+            <a:r>
+              <a:rPr sz="1400">
+                <a:solidFill>
+                  <a:srgbClr val="6D8C97"/>
+                </a:solidFill>
+                <a:latin typeface="Consolas"/>
+              </a:rPr>
+              <a:t> 121  </a:t>
+            </a:r>
+            <a:r>
+              <a:rPr sz="1400">
+                <a:solidFill>
+                  <a:srgbClr val="DCECEF"/>
+                </a:solidFill>
+                <a:latin typeface="Consolas"/>
+              </a:rPr>
+              <a:t>        // Week 7: everything said so far, oldest first.</a:t>
+            </a:r>
+          </a:p>
+          <a:p>
+            <a:pPr>
+              <a:spcAft>
+                <a:spcPts val="0"/>
+              </a:spcAft>
+            </a:pPr>
+            <a:r>
+              <a:rPr sz="1400">
+                <a:solidFill>
+                  <a:srgbClr val="6D8C97"/>
+                </a:solidFill>
+                <a:latin typeface="Consolas"/>
+              </a:rPr>
+              <a:t> 122  </a:t>
+            </a:r>
+            <a:r>
+              <a:rPr sz="1400">
+                <a:solidFill>
+                  <a:srgbClr val="DCECEF"/>
+                </a:solidFill>
+                <a:latin typeface="Consolas"/>
+              </a:rPr>
+              <a:t>        ...history</a:t>
+            </a:r>
+          </a:p>
+          <a:p>
+            <a:pPr>
+              <a:spcAft>
+                <a:spcPts val="0"/>
+              </a:spcAft>
+            </a:pPr>
+            <a:r>
+              <a:rPr sz="1400">
+                <a:solidFill>
+                  <a:srgbClr val="6D8C97"/>
+                </a:solidFill>
+                <a:latin typeface="Consolas"/>
+              </a:rPr>
+              <a:t> 123  </a:t>
+            </a:r>
+            <a:r>
+              <a:rPr sz="1400">
+                <a:solidFill>
+                  <a:srgbClr val="DCECEF"/>
+                </a:solidFill>
+                <a:latin typeface="Consolas"/>
+              </a:rPr>
+              <a:t>      ]</a:t>
+            </a:r>
+          </a:p>
+          <a:p>
+            <a:pPr>
+              <a:spcAft>
+                <a:spcPts val="0"/>
+              </a:spcAft>
+            </a:pPr>
+            <a:r>
+              <a:rPr sz="1400">
+                <a:solidFill>
+                  <a:srgbClr val="6D8C97"/>
+                </a:solidFill>
+                <a:latin typeface="Consolas"/>
+              </a:rPr>
+              <a:t> 124  </a:t>
+            </a:r>
+            <a:r>
+              <a:rPr sz="1400">
+                <a:solidFill>
+                  <a:srgbClr val="DCECEF"/>
+                </a:solidFill>
+                <a:latin typeface="Consolas"/>
+              </a:rPr>
+              <a:t>    })</a:t>
+            </a:r>
+          </a:p>
+          <a:p>
+            <a:pPr>
+              <a:spcAft>
+                <a:spcPts val="0"/>
+              </a:spcAft>
+            </a:pPr>
+            <a:r>
+              <a:rPr sz="1400">
+                <a:solidFill>
+                  <a:srgbClr val="6D8C97"/>
+                </a:solidFill>
+                <a:latin typeface="Consolas"/>
+              </a:rPr>
+              <a:t> 125  </a:t>
+            </a:r>
+            <a:r>
+              <a:rPr sz="1400">
+                <a:solidFill>
+                  <a:srgbClr val="DCECEF"/>
+                </a:solidFill>
+                <a:latin typeface="Consolas"/>
+              </a:rPr>
+              <a:t>  });</a:t>
+            </a:r>
+          </a:p>
+          <a:p>
+            <a:pPr>
+              <a:spcAft>
+                <a:spcPts val="0"/>
+              </a:spcAft>
+            </a:pPr>
+            <a:r>
+              <a:rPr sz="1400">
+                <a:solidFill>
+                  <a:srgbClr val="6D8C97"/>
+                </a:solidFill>
+                <a:latin typeface="Consolas"/>
+              </a:rPr>
+              <a:t> 126  </a:t>
+            </a:r>
+            <a:r>
+              <a:rPr sz="1400">
+                <a:solidFill>
+                  <a:srgbClr val="DCECEF"/>
+                </a:solidFill>
+                <a:latin typeface="Consolas"/>
+              </a:rPr>
+              <a:t> </a:t>
+            </a:r>
+          </a:p>
+          <a:p>
+            <a:pPr>
+              <a:spcAft>
+                <a:spcPts val="0"/>
+              </a:spcAft>
+            </a:pPr>
+            <a:r>
+              <a:rPr sz="1400">
+                <a:solidFill>
+                  <a:srgbClr val="6D8C97"/>
+                </a:solidFill>
+                <a:latin typeface="Consolas"/>
+              </a:rPr>
+              <a:t> 127  </a:t>
+            </a:r>
+            <a:r>
+              <a:rPr sz="1400">
+                <a:solidFill>
+                  <a:srgbClr val="DCECEF"/>
+                </a:solidFill>
+                <a:latin typeface="Consolas"/>
+              </a:rPr>
+              <a:t>  // Week 5: fetch does NOT throw when the server says no. A 429 arrives</a:t>
+            </a:r>
+          </a:p>
+          <a:p>
+            <a:pPr>
+              <a:spcAft>
+                <a:spcPts val="0"/>
+              </a:spcAft>
+            </a:pPr>
+            <a:r>
+              <a:rPr sz="1400">
+                <a:solidFill>
+                  <a:srgbClr val="6D8C97"/>
+                </a:solidFill>
+                <a:latin typeface="Consolas"/>
+              </a:rPr>
+              <a:t> 128  </a:t>
+            </a:r>
+            <a:r>
+              <a:rPr sz="1400">
+                <a:solidFill>
+                  <a:srgbClr val="DCECEF"/>
+                </a:solidFill>
+                <a:latin typeface="Consolas"/>
+              </a:rPr>
+              <a:t>  // looking just like a success until you actually check.</a:t>
+            </a:r>
+          </a:p>
+          <a:p>
+            <a:pPr>
+              <a:spcAft>
+                <a:spcPts val="0"/>
+              </a:spcAft>
+            </a:pPr>
+            <a:r>
+              <a:rPr sz="1400">
+                <a:solidFill>
+                  <a:srgbClr val="6D8C97"/>
+                </a:solidFill>
+                <a:latin typeface="Consolas"/>
+              </a:rPr>
+              <a:t> 129  </a:t>
+            </a:r>
+            <a:r>
+              <a:rPr sz="1400">
+                <a:solidFill>
+                  <a:srgbClr val="DCECEF"/>
+                </a:solidFill>
+                <a:latin typeface="Consolas"/>
+              </a:rPr>
+              <a:t>  if (!res.ok) {</a:t>
+            </a:r>
+          </a:p>
+          <a:p>
+            <a:pPr>
+              <a:spcAft>
+                <a:spcPts val="0"/>
+              </a:spcAft>
+            </a:pPr>
+            <a:r>
+              <a:rPr sz="1400">
+                <a:solidFill>
+                  <a:srgbClr val="6D8C97"/>
+                </a:solidFill>
+                <a:latin typeface="Consolas"/>
+              </a:rPr>
+              <a:t> 130  </a:t>
+            </a:r>
+            <a:r>
+              <a:rPr sz="1400">
+                <a:solidFill>
+                  <a:srgbClr val="DCECEF"/>
+                </a:solidFill>
+                <a:latin typeface="Consolas"/>
+              </a:rPr>
+              <a:t>    const problem = await res.json();</a:t>
+            </a:r>
+          </a:p>
+          <a:p>
+            <a:pPr>
+              <a:spcAft>
+                <a:spcPts val="0"/>
+              </a:spcAft>
+            </a:pPr>
+            <a:r>
+              <a:rPr sz="1400">
+                <a:solidFill>
+                  <a:srgbClr val="6D8C97"/>
+                </a:solidFill>
+                <a:latin typeface="Consolas"/>
+              </a:rPr>
+              <a:t> 131  </a:t>
+            </a:r>
+            <a:r>
+              <a:rPr sz="1400">
+                <a:solidFill>
+                  <a:srgbClr val="DCECEF"/>
+                </a:solidFill>
+                <a:latin typeface="Consolas"/>
+              </a:rPr>
+              <a:t>    throw new Error(explain(res.status, problem));</a:t>
+            </a:r>
+          </a:p>
+          <a:p>
+            <a:pPr>
+              <a:spcAft>
+                <a:spcPts val="0"/>
+              </a:spcAft>
+            </a:pPr>
+            <a:r>
+              <a:rPr sz="1400">
+                <a:solidFill>
+                  <a:srgbClr val="6D8C97"/>
+                </a:solidFill>
+                <a:latin typeface="Consolas"/>
+              </a:rPr>
+              <a:t> 132  </a:t>
+            </a:r>
+            <a:r>
+              <a:rPr sz="1400">
+                <a:solidFill>
+                  <a:srgbClr val="DCECEF"/>
+                </a:solidFill>
+                <a:latin typeface="Consolas"/>
+              </a:rPr>
+              <a:t>  }</a:t>
             </a:r>
           </a:p>
         </p:txBody>
@@ -3759,6 +5658,14 @@
 <file path=ppt/slides/slide7.xml><?xml version="1.0" encoding="utf-8"?>
 <p:sld xmlns:a="http://schemas.openxmlformats.org/drawingml/2006/main" xmlns:p="http://schemas.openxmlformats.org/presentationml/2006/main" xmlns:r="http://schemas.openxmlformats.org/officeDocument/2006/relationships">
   <p:cSld>
+    <p:bg>
+      <p:bgPr>
+        <a:solidFill>
+          <a:srgbClr val="102127"/>
+        </a:solidFill>
+        <a:effectLst/>
+      </p:bgPr>
+    </p:bg>
     <p:spTree>
       <p:nvGrpSpPr>
         <p:cNvPr id="1" name=""/>
@@ -3768,6 +5675,155 @@
       <p:grpSpPr/>
       <p:sp>
         <p:nvSpPr>
+          <p:cNvPr id="2" name="TextBox 1"/>
+          <p:cNvSpPr txBox="1"/>
+          <p:nvPr/>
+        </p:nvSpPr>
+        <p:spPr>
+          <a:xfrm>
+            <a:off x="502920" y="274320"/>
+            <a:ext cx="11155680" cy="731520"/>
+          </a:xfrm>
+          <a:prstGeom prst="rect">
+            <a:avLst/>
+          </a:prstGeom>
+          <a:noFill/>
+        </p:spPr>
+        <p:txBody>
+          <a:bodyPr wrap="none">
+            <a:spAutoFit/>
+          </a:bodyPr>
+          <a:lstStyle/>
+          <a:p>
+            <a:r>
+              <a:rPr sz="2600" b="1">
+                <a:solidFill>
+                  <a:srgbClr val="01AEFD"/>
+                </a:solidFill>
+              </a:rPr>
+              <a:t>Type this into script.js  (3 of 3)</a:t>
+            </a:r>
+          </a:p>
+        </p:txBody>
+      </p:sp>
+      <p:sp>
+        <p:nvSpPr>
+          <p:cNvPr id="3" name="TextBox 2"/>
+          <p:cNvSpPr txBox="1"/>
+          <p:nvPr/>
+        </p:nvSpPr>
+        <p:spPr>
+          <a:xfrm>
+            <a:off x="502920" y="1051560"/>
+            <a:ext cx="11155680" cy="5394960"/>
+          </a:xfrm>
+          <a:prstGeom prst="rect">
+            <a:avLst/>
+          </a:prstGeom>
+          <a:noFill/>
+        </p:spPr>
+        <p:txBody>
+          <a:bodyPr wrap="none">
+            <a:spAutoFit/>
+          </a:bodyPr>
+          <a:lstStyle/>
+          <a:p>
+            <a:pPr>
+              <a:spcAft>
+                <a:spcPts val="0"/>
+              </a:spcAft>
+            </a:pPr>
+            <a:r>
+              <a:rPr sz="1700">
+                <a:solidFill>
+                  <a:srgbClr val="6D8C97"/>
+                </a:solidFill>
+                <a:latin typeface="Consolas"/>
+              </a:rPr>
+              <a:t> 133  </a:t>
+            </a:r>
+            <a:r>
+              <a:rPr sz="1700">
+                <a:solidFill>
+                  <a:srgbClr val="DCECEF"/>
+                </a:solidFill>
+                <a:latin typeface="Consolas"/>
+              </a:rPr>
+              <a:t> </a:t>
+            </a:r>
+          </a:p>
+          <a:p>
+            <a:pPr>
+              <a:spcAft>
+                <a:spcPts val="0"/>
+              </a:spcAft>
+            </a:pPr>
+            <a:r>
+              <a:rPr sz="1700">
+                <a:solidFill>
+                  <a:srgbClr val="6D8C97"/>
+                </a:solidFill>
+                <a:latin typeface="Consolas"/>
+              </a:rPr>
+              <a:t> 134  </a:t>
+            </a:r>
+            <a:r>
+              <a:rPr sz="1700">
+                <a:solidFill>
+                  <a:srgbClr val="7FE0A0"/>
+                </a:solidFill>
+                <a:latin typeface="Consolas"/>
+              </a:rPr>
+              <a:t>  return readStream(res);   // week 10: no more res.json() - it arrives in bits</a:t>
+            </a:r>
+          </a:p>
+          <a:p>
+            <a:pPr>
+              <a:spcAft>
+                <a:spcPts val="0"/>
+              </a:spcAft>
+            </a:pPr>
+            <a:r>
+              <a:rPr sz="1700">
+                <a:solidFill>
+                  <a:srgbClr val="6D8C97"/>
+                </a:solidFill>
+                <a:latin typeface="Consolas"/>
+              </a:rPr>
+              <a:t> 135  </a:t>
+            </a:r>
+            <a:r>
+              <a:rPr sz="1700">
+                <a:solidFill>
+                  <a:srgbClr val="DCECEF"/>
+                </a:solidFill>
+                <a:latin typeface="Consolas"/>
+              </a:rPr>
+              <a:t>}</a:t>
+            </a:r>
+          </a:p>
+        </p:txBody>
+      </p:sp>
+    </p:spTree>
+  </p:cSld>
+  <p:clrMapOvr>
+    <a:masterClrMapping/>
+  </p:clrMapOvr>
+</p:sld>
+</file>
+
+<file path=ppt/slides/slide8.xml><?xml version="1.0" encoding="utf-8"?>
+<p:sld xmlns:a="http://schemas.openxmlformats.org/drawingml/2006/main" xmlns:p="http://schemas.openxmlformats.org/presentationml/2006/main" xmlns:r="http://schemas.openxmlformats.org/officeDocument/2006/relationships">
+  <p:cSld>
+    <p:spTree>
+      <p:nvGrpSpPr>
+        <p:cNvPr id="1" name=""/>
+        <p:cNvGrpSpPr/>
+        <p:nvPr/>
+      </p:nvGrpSpPr>
+      <p:grpSpPr/>
+      <p:sp>
+        <p:nvSpPr>
           <p:cNvPr id="2" name="Title 1"/>
           <p:cNvSpPr>
             <a:spLocks noGrp="1"/>
@@ -3787,7 +5843,7 @@
                   <a:srgbClr val="1F2A37"/>
                 </a:solidFill>
               </a:rPr>
-              <a:t>Today was plumbing</a:t>
+              <a:t>What a stream looks like</a:t>
             </a:r>
           </a:p>
         </p:txBody>
@@ -3820,12 +5876,124 @@
               </a:spcAft>
             </a:pPr>
             <a:r>
+              <a:rPr sz="2400">
+                <a:solidFill>
+                  <a:srgbClr val="1F2A37"/>
+                </a:solidFill>
+              </a:rPr>
+              <a:t>• data: {"choices":[{"delta":{"content":"Hel"}}]}</a:t>
+            </a:r>
+          </a:p>
+          <a:p>
+            <a:pPr>
+              <a:spcAft>
+                <a:spcPts val="1400"/>
+              </a:spcAft>
+            </a:pPr>
+            <a:r>
+              <a:rPr sz="2400">
+                <a:solidFill>
+                  <a:srgbClr val="1F2A37"/>
+                </a:solidFill>
+              </a:rPr>
+              <a:t>• data: {"choices":[{"delta":{"content":"lo"}}]}</a:t>
+            </a:r>
+          </a:p>
+          <a:p>
+            <a:pPr>
+              <a:spcAft>
+                <a:spcPts val="1400"/>
+              </a:spcAft>
+            </a:pPr>
+            <a:r>
+              <a:rPr sz="2400">
+                <a:solidFill>
+                  <a:srgbClr val="1F2A37"/>
+                </a:solidFill>
+              </a:rPr>
+              <a:t>• data: [DONE]</a:t>
+            </a:r>
+          </a:p>
+        </p:txBody>
+      </p:sp>
+    </p:spTree>
+  </p:cSld>
+  <p:clrMapOvr>
+    <a:masterClrMapping/>
+  </p:clrMapOvr>
+</p:sld>
+</file>
+
+<file path=ppt/slides/slide9.xml><?xml version="1.0" encoding="utf-8"?>
+<p:sld xmlns:a="http://schemas.openxmlformats.org/drawingml/2006/main" xmlns:p="http://schemas.openxmlformats.org/presentationml/2006/main" xmlns:r="http://schemas.openxmlformats.org/officeDocument/2006/relationships">
+  <p:cSld>
+    <p:spTree>
+      <p:nvGrpSpPr>
+        <p:cNvPr id="1" name=""/>
+        <p:cNvGrpSpPr/>
+        <p:nvPr/>
+      </p:nvGrpSpPr>
+      <p:grpSpPr/>
+      <p:sp>
+        <p:nvSpPr>
+          <p:cNvPr id="2" name="Title 1"/>
+          <p:cNvSpPr>
+            <a:spLocks noGrp="1"/>
+          </p:cNvSpPr>
+          <p:nvPr>
+            <p:ph type="title"/>
+          </p:nvPr>
+        </p:nvSpPr>
+        <p:spPr/>
+        <p:txBody>
+          <a:bodyPr/>
+          <a:lstStyle/>
+          <a:p>
+            <a:r>
+              <a:rPr sz="3800" b="1">
+                <a:solidFill>
+                  <a:srgbClr val="1F2A37"/>
+                </a:solidFill>
+              </a:rPr>
+              <a:t>Pieces get cut in half</a:t>
+            </a:r>
+          </a:p>
+        </p:txBody>
+      </p:sp>
+      <p:sp>
+        <p:nvSpPr>
+          <p:cNvPr id="3" name="TextBox 2"/>
+          <p:cNvSpPr txBox="1"/>
+          <p:nvPr/>
+        </p:nvSpPr>
+        <p:spPr>
+          <a:xfrm>
+            <a:off x="822960" y="1828800"/>
+            <a:ext cx="10515600" cy="4206240"/>
+          </a:xfrm>
+          <a:prstGeom prst="rect">
+            <a:avLst/>
+          </a:prstGeom>
+          <a:noFill/>
+        </p:spPr>
+        <p:txBody>
+          <a:bodyPr wrap="square">
+            <a:spAutoFit/>
+          </a:bodyPr>
+          <a:lstStyle/>
+          <a:p>
+            <a:pPr>
+              <a:spcAft>
+                <a:spcPts val="1400"/>
+              </a:spcAft>
+            </a:pPr>
+            <a:r>
               <a:rPr sz="2800">
                 <a:solidFill>
                   <a:srgbClr val="01AEFD"/>
                 </a:solidFill>
               </a:rPr>
-              <a:t>It looks identical</a:t>
+              <a:t>That is what the buffer is for</a:t>
             </a:r>
           </a:p>
           <a:p>
@@ -3840,7 +6008,37 @@
                   <a:srgbClr val="1F2A37"/>
                 </a:solidFill>
               </a:rPr>
-              <a:t>• Next week it pays off</a:t>
+              <a:t>• Keep the unfinished piece</a:t>
+            </a:r>
+          </a:p>
+          <a:p>
+            <a:pPr>
+              <a:spcAft>
+                <a:spcPts val="1400"/>
+              </a:spcAft>
+            </a:pPr>
+            <a:r>
+              <a:rPr sz="2400">
+                <a:solidFill>
+                  <a:srgbClr val="1F2A37"/>
+                </a:solidFill>
+              </a:rPr>
+              <a:t>• Wait for the rest</a:t>
+            </a:r>
+          </a:p>
+          <a:p>
+            <a:pPr>
+              <a:spcAft>
+                <a:spcPts val="1400"/>
+              </a:spcAft>
+            </a:pPr>
+            <a:r>
+              <a:rPr sz="2400">
+                <a:solidFill>
+                  <a:srgbClr val="1F2A37"/>
+                </a:solidFill>
+              </a:rPr>
+              <a:t>• Then read it</a:t>
             </a:r>
           </a:p>
         </p:txBody>

--- a/ai101/slides/week-10.pptx
+++ b/ai101/slides/week-10.pptx
@@ -3257,7 +3257,7 @@
                 </a:solidFill>
                 <a:latin typeface="Consolas"/>
               </a:rPr>
-              <a:t>  68  </a:t>
+              <a:t>  71  </a:t>
             </a:r>
             <a:r>
               <a:rPr sz="1400">
@@ -3282,7 +3282,7 @@
                 </a:solidFill>
                 <a:latin typeface="Consolas"/>
               </a:rPr>
-              <a:t>  69  </a:t>
+              <a:t>  72  </a:t>
             </a:r>
             <a:r>
               <a:rPr sz="1400">
@@ -3307,7 +3307,7 @@
                 </a:solidFill>
                 <a:latin typeface="Consolas"/>
               </a:rPr>
-              <a:t>  70  </a:t>
+              <a:t>  73  </a:t>
             </a:r>
             <a:r>
               <a:rPr sz="1400">
@@ -3332,7 +3332,7 @@
                 </a:solidFill>
                 <a:latin typeface="Consolas"/>
               </a:rPr>
-              <a:t>  71  </a:t>
+              <a:t>  74  </a:t>
             </a:r>
             <a:r>
               <a:rPr sz="1400">
@@ -3357,7 +3357,7 @@
                 </a:solidFill>
                 <a:latin typeface="Consolas"/>
               </a:rPr>
-              <a:t>  72  </a:t>
+              <a:t>  75  </a:t>
             </a:r>
             <a:r>
               <a:rPr sz="1400">
@@ -3382,7 +3382,7 @@
                 </a:solidFill>
                 <a:latin typeface="Consolas"/>
               </a:rPr>
-              <a:t>  73  </a:t>
+              <a:t>  76  </a:t>
             </a:r>
             <a:r>
               <a:rPr sz="1400">
@@ -3407,7 +3407,7 @@
                 </a:solidFill>
                 <a:latin typeface="Consolas"/>
               </a:rPr>
-              <a:t>  74  </a:t>
+              <a:t>  77  </a:t>
             </a:r>
             <a:r>
               <a:rPr sz="1400">
@@ -3432,7 +3432,7 @@
                 </a:solidFill>
                 <a:latin typeface="Consolas"/>
               </a:rPr>
-              <a:t>  75  </a:t>
+              <a:t>  78  </a:t>
             </a:r>
             <a:r>
               <a:rPr sz="1400">
@@ -3457,7 +3457,7 @@
                 </a:solidFill>
                 <a:latin typeface="Consolas"/>
               </a:rPr>
-              <a:t>  76  </a:t>
+              <a:t>  79  </a:t>
             </a:r>
             <a:r>
               <a:rPr sz="1400">
@@ -3482,7 +3482,7 @@
                 </a:solidFill>
                 <a:latin typeface="Consolas"/>
               </a:rPr>
-              <a:t>  77  </a:t>
+              <a:t>  80  </a:t>
             </a:r>
             <a:r>
               <a:rPr sz="1400">
@@ -3507,7 +3507,7 @@
                 </a:solidFill>
                 <a:latin typeface="Consolas"/>
               </a:rPr>
-              <a:t>  78  </a:t>
+              <a:t>  81  </a:t>
             </a:r>
             <a:r>
               <a:rPr sz="1400">
@@ -3532,7 +3532,7 @@
                 </a:solidFill>
                 <a:latin typeface="Consolas"/>
               </a:rPr>
-              <a:t>  79  </a:t>
+              <a:t>  82  </a:t>
             </a:r>
             <a:r>
               <a:rPr sz="1400">
@@ -3557,7 +3557,7 @@
                 </a:solidFill>
                 <a:latin typeface="Consolas"/>
               </a:rPr>
-              <a:t>  80  </a:t>
+              <a:t>  83  </a:t>
             </a:r>
             <a:r>
               <a:rPr sz="1400">
@@ -3582,7 +3582,7 @@
                 </a:solidFill>
                 <a:latin typeface="Consolas"/>
               </a:rPr>
-              <a:t>  81  </a:t>
+              <a:t>  84  </a:t>
             </a:r>
             <a:r>
               <a:rPr sz="1400">
@@ -3607,7 +3607,7 @@
                 </a:solidFill>
                 <a:latin typeface="Consolas"/>
               </a:rPr>
-              <a:t>  82  </a:t>
+              <a:t>  85  </a:t>
             </a:r>
             <a:r>
               <a:rPr sz="1400">
@@ -3714,7 +3714,7 @@
                 </a:solidFill>
                 <a:latin typeface="Consolas"/>
               </a:rPr>
-              <a:t>  83  </a:t>
+              <a:t>  86  </a:t>
             </a:r>
             <a:r>
               <a:rPr sz="1400">
@@ -3739,7 +3739,7 @@
                 </a:solidFill>
                 <a:latin typeface="Consolas"/>
               </a:rPr>
-              <a:t>  84  </a:t>
+              <a:t>  87  </a:t>
             </a:r>
             <a:r>
               <a:rPr sz="1400">
@@ -3764,7 +3764,7 @@
                 </a:solidFill>
                 <a:latin typeface="Consolas"/>
               </a:rPr>
-              <a:t>  85  </a:t>
+              <a:t>  88  </a:t>
             </a:r>
             <a:r>
               <a:rPr sz="1400">
@@ -3789,7 +3789,7 @@
                 </a:solidFill>
                 <a:latin typeface="Consolas"/>
               </a:rPr>
-              <a:t>  86  </a:t>
+              <a:t>  89  </a:t>
             </a:r>
             <a:r>
               <a:rPr sz="1400">
@@ -3814,7 +3814,7 @@
                 </a:solidFill>
                 <a:latin typeface="Consolas"/>
               </a:rPr>
-              <a:t>  87  </a:t>
+              <a:t>  90  </a:t>
             </a:r>
             <a:r>
               <a:rPr sz="1400">
@@ -3839,7 +3839,7 @@
                 </a:solidFill>
                 <a:latin typeface="Consolas"/>
               </a:rPr>
-              <a:t>  88  </a:t>
+              <a:t>  91  </a:t>
             </a:r>
             <a:r>
               <a:rPr sz="1400">
@@ -3864,7 +3864,7 @@
                 </a:solidFill>
                 <a:latin typeface="Consolas"/>
               </a:rPr>
-              <a:t>  89  </a:t>
+              <a:t>  92  </a:t>
             </a:r>
             <a:r>
               <a:rPr sz="1400">
@@ -3889,7 +3889,7 @@
                 </a:solidFill>
                 <a:latin typeface="Consolas"/>
               </a:rPr>
-              <a:t>  90  </a:t>
+              <a:t>  93  </a:t>
             </a:r>
             <a:r>
               <a:rPr sz="1400">
@@ -3914,7 +3914,7 @@
                 </a:solidFill>
                 <a:latin typeface="Consolas"/>
               </a:rPr>
-              <a:t>  91  </a:t>
+              <a:t>  94  </a:t>
             </a:r>
             <a:r>
               <a:rPr sz="1400">
@@ -3939,7 +3939,7 @@
                 </a:solidFill>
                 <a:latin typeface="Consolas"/>
               </a:rPr>
-              <a:t>  92  </a:t>
+              <a:t>  95  </a:t>
             </a:r>
             <a:r>
               <a:rPr sz="1400">
@@ -3964,7 +3964,7 @@
                 </a:solidFill>
                 <a:latin typeface="Consolas"/>
               </a:rPr>
-              <a:t>  93  </a:t>
+              <a:t>  96  </a:t>
             </a:r>
             <a:r>
               <a:rPr sz="1400">
@@ -3989,7 +3989,7 @@
                 </a:solidFill>
                 <a:latin typeface="Consolas"/>
               </a:rPr>
-              <a:t>  94  </a:t>
+              <a:t>  97  </a:t>
             </a:r>
             <a:r>
               <a:rPr sz="1400">
@@ -4014,7 +4014,7 @@
                 </a:solidFill>
                 <a:latin typeface="Consolas"/>
               </a:rPr>
-              <a:t>  95  </a:t>
+              <a:t>  98  </a:t>
             </a:r>
             <a:r>
               <a:rPr sz="1400">
@@ -4039,7 +4039,7 @@
                 </a:solidFill>
                 <a:latin typeface="Consolas"/>
               </a:rPr>
-              <a:t>  96  </a:t>
+              <a:t>  99  </a:t>
             </a:r>
             <a:r>
               <a:rPr sz="1400">
@@ -4064,7 +4064,7 @@
                 </a:solidFill>
                 <a:latin typeface="Consolas"/>
               </a:rPr>
-              <a:t>  97  </a:t>
+              <a:t> 100  </a:t>
             </a:r>
             <a:r>
               <a:rPr sz="1400">
@@ -4171,7 +4171,7 @@
                 </a:solidFill>
                 <a:latin typeface="Consolas"/>
               </a:rPr>
-              <a:t>  98  </a:t>
+              <a:t> 101  </a:t>
             </a:r>
             <a:r>
               <a:rPr sz="1700">
@@ -4196,7 +4196,7 @@
                 </a:solidFill>
                 <a:latin typeface="Consolas"/>
               </a:rPr>
-              <a:t>  99  </a:t>
+              <a:t> 102  </a:t>
             </a:r>
             <a:r>
               <a:rPr sz="1700">
@@ -4221,7 +4221,7 @@
                 </a:solidFill>
                 <a:latin typeface="Consolas"/>
               </a:rPr>
-              <a:t> 100  </a:t>
+              <a:t> 103  </a:t>
             </a:r>
             <a:r>
               <a:rPr sz="1700">
@@ -4246,7 +4246,7 @@
                 </a:solidFill>
                 <a:latin typeface="Consolas"/>
               </a:rPr>
-              <a:t> 101  </a:t>
+              <a:t> 104  </a:t>
             </a:r>
             <a:r>
               <a:rPr sz="1700">
@@ -4271,7 +4271,7 @@
                 </a:solidFill>
                 <a:latin typeface="Consolas"/>
               </a:rPr>
-              <a:t> 102  </a:t>
+              <a:t> 105  </a:t>
             </a:r>
             <a:r>
               <a:rPr sz="1700">
@@ -4826,7 +4826,7 @@
                 </a:solidFill>
                 <a:latin typeface="Consolas"/>
               </a:rPr>
-              <a:t> 103  </a:t>
+              <a:t> 106  </a:t>
             </a:r>
             <a:r>
               <a:rPr sz="1400">
@@ -4851,7 +4851,7 @@
                 </a:solidFill>
                 <a:latin typeface="Consolas"/>
               </a:rPr>
-              <a:t> 104  </a:t>
+              <a:t> 107  </a:t>
             </a:r>
             <a:r>
               <a:rPr sz="1400">
@@ -4876,7 +4876,7 @@
                 </a:solidFill>
                 <a:latin typeface="Consolas"/>
               </a:rPr>
-              <a:t> 105  </a:t>
+              <a:t> 108  </a:t>
             </a:r>
             <a:r>
               <a:rPr sz="1400">
@@ -4901,7 +4901,7 @@
                 </a:solidFill>
                 <a:latin typeface="Consolas"/>
               </a:rPr>
-              <a:t> 106  </a:t>
+              <a:t> 109  </a:t>
             </a:r>
             <a:r>
               <a:rPr sz="1400">
@@ -4926,7 +4926,7 @@
                 </a:solidFill>
                 <a:latin typeface="Consolas"/>
               </a:rPr>
-              <a:t> 107  </a:t>
+              <a:t> 110  </a:t>
             </a:r>
             <a:r>
               <a:rPr sz="1400">
@@ -4951,7 +4951,7 @@
                 </a:solidFill>
                 <a:latin typeface="Consolas"/>
               </a:rPr>
-              <a:t> 108  </a:t>
+              <a:t> 111  </a:t>
             </a:r>
             <a:r>
               <a:rPr sz="1400">
@@ -4976,7 +4976,7 @@
                 </a:solidFill>
                 <a:latin typeface="Consolas"/>
               </a:rPr>
-              <a:t> 109  </a:t>
+              <a:t> 112  </a:t>
             </a:r>
             <a:r>
               <a:rPr sz="1400">
@@ -5001,7 +5001,7 @@
                 </a:solidFill>
                 <a:latin typeface="Consolas"/>
               </a:rPr>
-              <a:t> 110  </a:t>
+              <a:t> 113  </a:t>
             </a:r>
             <a:r>
               <a:rPr sz="1400">
@@ -5026,7 +5026,7 @@
                 </a:solidFill>
                 <a:latin typeface="Consolas"/>
               </a:rPr>
-              <a:t> 111  </a:t>
+              <a:t> 114  </a:t>
             </a:r>
             <a:r>
               <a:rPr sz="1400">
@@ -5051,7 +5051,7 @@
                 </a:solidFill>
                 <a:latin typeface="Consolas"/>
               </a:rPr>
-              <a:t> 112  </a:t>
+              <a:t> 115  </a:t>
             </a:r>
             <a:r>
               <a:rPr sz="1400">
@@ -5076,7 +5076,7 @@
                 </a:solidFill>
                 <a:latin typeface="Consolas"/>
               </a:rPr>
-              <a:t> 113  </a:t>
+              <a:t> 116  </a:t>
             </a:r>
             <a:r>
               <a:rPr sz="1400">
@@ -5101,7 +5101,7 @@
                 </a:solidFill>
                 <a:latin typeface="Consolas"/>
               </a:rPr>
-              <a:t> 114  </a:t>
+              <a:t> 117  </a:t>
             </a:r>
             <a:r>
               <a:rPr sz="1400">
@@ -5126,7 +5126,7 @@
                 </a:solidFill>
                 <a:latin typeface="Consolas"/>
               </a:rPr>
-              <a:t> 115  </a:t>
+              <a:t> 118  </a:t>
             </a:r>
             <a:r>
               <a:rPr sz="1400">
@@ -5151,7 +5151,7 @@
                 </a:solidFill>
                 <a:latin typeface="Consolas"/>
               </a:rPr>
-              <a:t> 116  </a:t>
+              <a:t> 119  </a:t>
             </a:r>
             <a:r>
               <a:rPr sz="1400">
@@ -5176,7 +5176,7 @@
                 </a:solidFill>
                 <a:latin typeface="Consolas"/>
               </a:rPr>
-              <a:t> 117  </a:t>
+              <a:t> 120  </a:t>
             </a:r>
             <a:r>
               <a:rPr sz="1400">
@@ -5283,7 +5283,7 @@
                 </a:solidFill>
                 <a:latin typeface="Consolas"/>
               </a:rPr>
-              <a:t> 118  </a:t>
+              <a:t> 121  </a:t>
             </a:r>
             <a:r>
               <a:rPr sz="1400">
@@ -5308,7 +5308,7 @@
                 </a:solidFill>
                 <a:latin typeface="Consolas"/>
               </a:rPr>
-              <a:t> 119  </a:t>
+              <a:t> 122  </a:t>
             </a:r>
             <a:r>
               <a:rPr sz="1400">
@@ -5333,7 +5333,7 @@
                 </a:solidFill>
                 <a:latin typeface="Consolas"/>
               </a:rPr>
-              <a:t> 120  </a:t>
+              <a:t> 123  </a:t>
             </a:r>
             <a:r>
               <a:rPr sz="1400">
@@ -5358,7 +5358,7 @@
                 </a:solidFill>
                 <a:latin typeface="Consolas"/>
               </a:rPr>
-              <a:t> 121  </a:t>
+              <a:t> 124  </a:t>
             </a:r>
             <a:r>
               <a:rPr sz="1400">
@@ -5383,7 +5383,7 @@
                 </a:solidFill>
                 <a:latin typeface="Consolas"/>
               </a:rPr>
-              <a:t> 122  </a:t>
+              <a:t> 125  </a:t>
             </a:r>
             <a:r>
               <a:rPr sz="1400">
@@ -5408,7 +5408,7 @@
                 </a:solidFill>
                 <a:latin typeface="Consolas"/>
               </a:rPr>
-              <a:t> 123  </a:t>
+              <a:t> 126  </a:t>
             </a:r>
             <a:r>
               <a:rPr sz="1400">
@@ -5433,7 +5433,7 @@
                 </a:solidFill>
                 <a:latin typeface="Consolas"/>
               </a:rPr>
-              <a:t> 124  </a:t>
+              <a:t> 127  </a:t>
             </a:r>
             <a:r>
               <a:rPr sz="1400">
@@ -5458,7 +5458,7 @@
                 </a:solidFill>
                 <a:latin typeface="Consolas"/>
               </a:rPr>
-              <a:t> 125  </a:t>
+              <a:t> 128  </a:t>
             </a:r>
             <a:r>
               <a:rPr sz="1400">
@@ -5483,7 +5483,7 @@
                 </a:solidFill>
                 <a:latin typeface="Consolas"/>
               </a:rPr>
-              <a:t> 126  </a:t>
+              <a:t> 129  </a:t>
             </a:r>
             <a:r>
               <a:rPr sz="1400">
@@ -5508,7 +5508,7 @@
                 </a:solidFill>
                 <a:latin typeface="Consolas"/>
               </a:rPr>
-              <a:t> 127  </a:t>
+              <a:t> 130  </a:t>
             </a:r>
             <a:r>
               <a:rPr sz="1400">
@@ -5533,7 +5533,7 @@
                 </a:solidFill>
                 <a:latin typeface="Consolas"/>
               </a:rPr>
-              <a:t> 128  </a:t>
+              <a:t> 131  </a:t>
             </a:r>
             <a:r>
               <a:rPr sz="1400">
@@ -5558,7 +5558,7 @@
                 </a:solidFill>
                 <a:latin typeface="Consolas"/>
               </a:rPr>
-              <a:t> 129  </a:t>
+              <a:t> 132  </a:t>
             </a:r>
             <a:r>
               <a:rPr sz="1400">
@@ -5583,7 +5583,7 @@
                 </a:solidFill>
                 <a:latin typeface="Consolas"/>
               </a:rPr>
-              <a:t> 130  </a:t>
+              <a:t> 133  </a:t>
             </a:r>
             <a:r>
               <a:rPr sz="1400">
@@ -5608,7 +5608,7 @@
                 </a:solidFill>
                 <a:latin typeface="Consolas"/>
               </a:rPr>
-              <a:t> 131  </a:t>
+              <a:t> 134  </a:t>
             </a:r>
             <a:r>
               <a:rPr sz="1400">
@@ -5633,7 +5633,7 @@
                 </a:solidFill>
                 <a:latin typeface="Consolas"/>
               </a:rPr>
-              <a:t> 132  </a:t>
+              <a:t> 135  </a:t>
             </a:r>
             <a:r>
               <a:rPr sz="1400">
@@ -5740,7 +5740,7 @@
                 </a:solidFill>
                 <a:latin typeface="Consolas"/>
               </a:rPr>
-              <a:t> 133  </a:t>
+              <a:t> 136  </a:t>
             </a:r>
             <a:r>
               <a:rPr sz="1700">
@@ -5765,7 +5765,7 @@
                 </a:solidFill>
                 <a:latin typeface="Consolas"/>
               </a:rPr>
-              <a:t> 134  </a:t>
+              <a:t> 137  </a:t>
             </a:r>
             <a:r>
               <a:rPr sz="1700">
@@ -5790,7 +5790,7 @@
                 </a:solidFill>
                 <a:latin typeface="Consolas"/>
               </a:rPr>
-              <a:t> 135  </a:t>
+              <a:t> 138  </a:t>
             </a:r>
             <a:r>
               <a:rPr sz="1700">

--- a/ai101/slides/week-10.pptx
+++ b/ai101/slides/week-10.pptx
@@ -3257,7 +3257,7 @@
                 </a:solidFill>
                 <a:latin typeface="Consolas"/>
               </a:rPr>
-              <a:t>  71  </a:t>
+              <a:t>  79  </a:t>
             </a:r>
             <a:r>
               <a:rPr sz="1400">
@@ -3282,7 +3282,7 @@
                 </a:solidFill>
                 <a:latin typeface="Consolas"/>
               </a:rPr>
-              <a:t>  72  </a:t>
+              <a:t>  80  </a:t>
             </a:r>
             <a:r>
               <a:rPr sz="1400">
@@ -3307,7 +3307,7 @@
                 </a:solidFill>
                 <a:latin typeface="Consolas"/>
               </a:rPr>
-              <a:t>  73  </a:t>
+              <a:t>  81  </a:t>
             </a:r>
             <a:r>
               <a:rPr sz="1400">
@@ -3332,7 +3332,7 @@
                 </a:solidFill>
                 <a:latin typeface="Consolas"/>
               </a:rPr>
-              <a:t>  74  </a:t>
+              <a:t>  82  </a:t>
             </a:r>
             <a:r>
               <a:rPr sz="1400">
@@ -3357,7 +3357,7 @@
                 </a:solidFill>
                 <a:latin typeface="Consolas"/>
               </a:rPr>
-              <a:t>  75  </a:t>
+              <a:t>  83  </a:t>
             </a:r>
             <a:r>
               <a:rPr sz="1400">
@@ -3382,7 +3382,7 @@
                 </a:solidFill>
                 <a:latin typeface="Consolas"/>
               </a:rPr>
-              <a:t>  76  </a:t>
+              <a:t>  84  </a:t>
             </a:r>
             <a:r>
               <a:rPr sz="1400">
@@ -3407,7 +3407,7 @@
                 </a:solidFill>
                 <a:latin typeface="Consolas"/>
               </a:rPr>
-              <a:t>  77  </a:t>
+              <a:t>  85  </a:t>
             </a:r>
             <a:r>
               <a:rPr sz="1400">
@@ -3432,7 +3432,7 @@
                 </a:solidFill>
                 <a:latin typeface="Consolas"/>
               </a:rPr>
-              <a:t>  78  </a:t>
+              <a:t>  86  </a:t>
             </a:r>
             <a:r>
               <a:rPr sz="1400">
@@ -3457,7 +3457,7 @@
                 </a:solidFill>
                 <a:latin typeface="Consolas"/>
               </a:rPr>
-              <a:t>  79  </a:t>
+              <a:t>  87  </a:t>
             </a:r>
             <a:r>
               <a:rPr sz="1400">
@@ -3482,7 +3482,7 @@
                 </a:solidFill>
                 <a:latin typeface="Consolas"/>
               </a:rPr>
-              <a:t>  80  </a:t>
+              <a:t>  88  </a:t>
             </a:r>
             <a:r>
               <a:rPr sz="1400">
@@ -3507,7 +3507,7 @@
                 </a:solidFill>
                 <a:latin typeface="Consolas"/>
               </a:rPr>
-              <a:t>  81  </a:t>
+              <a:t>  89  </a:t>
             </a:r>
             <a:r>
               <a:rPr sz="1400">
@@ -3532,7 +3532,7 @@
                 </a:solidFill>
                 <a:latin typeface="Consolas"/>
               </a:rPr>
-              <a:t>  82  </a:t>
+              <a:t>  90  </a:t>
             </a:r>
             <a:r>
               <a:rPr sz="1400">
@@ -3557,7 +3557,7 @@
                 </a:solidFill>
                 <a:latin typeface="Consolas"/>
               </a:rPr>
-              <a:t>  83  </a:t>
+              <a:t>  91  </a:t>
             </a:r>
             <a:r>
               <a:rPr sz="1400">
@@ -3582,7 +3582,7 @@
                 </a:solidFill>
                 <a:latin typeface="Consolas"/>
               </a:rPr>
-              <a:t>  84  </a:t>
+              <a:t>  92  </a:t>
             </a:r>
             <a:r>
               <a:rPr sz="1400">
@@ -3607,7 +3607,7 @@
                 </a:solidFill>
                 <a:latin typeface="Consolas"/>
               </a:rPr>
-              <a:t>  85  </a:t>
+              <a:t>  93  </a:t>
             </a:r>
             <a:r>
               <a:rPr sz="1400">
@@ -3714,7 +3714,7 @@
                 </a:solidFill>
                 <a:latin typeface="Consolas"/>
               </a:rPr>
-              <a:t>  86  </a:t>
+              <a:t>  94  </a:t>
             </a:r>
             <a:r>
               <a:rPr sz="1400">
@@ -3739,7 +3739,7 @@
                 </a:solidFill>
                 <a:latin typeface="Consolas"/>
               </a:rPr>
-              <a:t>  87  </a:t>
+              <a:t>  95  </a:t>
             </a:r>
             <a:r>
               <a:rPr sz="1400">
@@ -3764,7 +3764,7 @@
                 </a:solidFill>
                 <a:latin typeface="Consolas"/>
               </a:rPr>
-              <a:t>  88  </a:t>
+              <a:t>  96  </a:t>
             </a:r>
             <a:r>
               <a:rPr sz="1400">
@@ -3789,7 +3789,7 @@
                 </a:solidFill>
                 <a:latin typeface="Consolas"/>
               </a:rPr>
-              <a:t>  89  </a:t>
+              <a:t>  97  </a:t>
             </a:r>
             <a:r>
               <a:rPr sz="1400">
@@ -3814,7 +3814,7 @@
                 </a:solidFill>
                 <a:latin typeface="Consolas"/>
               </a:rPr>
-              <a:t>  90  </a:t>
+              <a:t>  98  </a:t>
             </a:r>
             <a:r>
               <a:rPr sz="1400">
@@ -3839,7 +3839,7 @@
                 </a:solidFill>
                 <a:latin typeface="Consolas"/>
               </a:rPr>
-              <a:t>  91  </a:t>
+              <a:t>  99  </a:t>
             </a:r>
             <a:r>
               <a:rPr sz="1400">
@@ -3864,7 +3864,7 @@
                 </a:solidFill>
                 <a:latin typeface="Consolas"/>
               </a:rPr>
-              <a:t>  92  </a:t>
+              <a:t> 100  </a:t>
             </a:r>
             <a:r>
               <a:rPr sz="1400">
@@ -3889,7 +3889,7 @@
                 </a:solidFill>
                 <a:latin typeface="Consolas"/>
               </a:rPr>
-              <a:t>  93  </a:t>
+              <a:t> 101  </a:t>
             </a:r>
             <a:r>
               <a:rPr sz="1400">
@@ -3914,7 +3914,7 @@
                 </a:solidFill>
                 <a:latin typeface="Consolas"/>
               </a:rPr>
-              <a:t>  94  </a:t>
+              <a:t> 102  </a:t>
             </a:r>
             <a:r>
               <a:rPr sz="1400">
@@ -3939,7 +3939,7 @@
                 </a:solidFill>
                 <a:latin typeface="Consolas"/>
               </a:rPr>
-              <a:t>  95  </a:t>
+              <a:t> 103  </a:t>
             </a:r>
             <a:r>
               <a:rPr sz="1400">
@@ -3964,7 +3964,7 @@
                 </a:solidFill>
                 <a:latin typeface="Consolas"/>
               </a:rPr>
-              <a:t>  96  </a:t>
+              <a:t> 104  </a:t>
             </a:r>
             <a:r>
               <a:rPr sz="1400">
@@ -3989,7 +3989,7 @@
                 </a:solidFill>
                 <a:latin typeface="Consolas"/>
               </a:rPr>
-              <a:t>  97  </a:t>
+              <a:t> 105  </a:t>
             </a:r>
             <a:r>
               <a:rPr sz="1400">
@@ -4014,7 +4014,7 @@
                 </a:solidFill>
                 <a:latin typeface="Consolas"/>
               </a:rPr>
-              <a:t>  98  </a:t>
+              <a:t> 106  </a:t>
             </a:r>
             <a:r>
               <a:rPr sz="1400">
@@ -4039,7 +4039,7 @@
                 </a:solidFill>
                 <a:latin typeface="Consolas"/>
               </a:rPr>
-              <a:t>  99  </a:t>
+              <a:t> 107  </a:t>
             </a:r>
             <a:r>
               <a:rPr sz="1400">
@@ -4064,7 +4064,7 @@
                 </a:solidFill>
                 <a:latin typeface="Consolas"/>
               </a:rPr>
-              <a:t> 100  </a:t>
+              <a:t> 108  </a:t>
             </a:r>
             <a:r>
               <a:rPr sz="1400">
@@ -4171,7 +4171,7 @@
                 </a:solidFill>
                 <a:latin typeface="Consolas"/>
               </a:rPr>
-              <a:t> 101  </a:t>
+              <a:t> 109  </a:t>
             </a:r>
             <a:r>
               <a:rPr sz="1700">
@@ -4196,7 +4196,7 @@
                 </a:solidFill>
                 <a:latin typeface="Consolas"/>
               </a:rPr>
-              <a:t> 102  </a:t>
+              <a:t> 110  </a:t>
             </a:r>
             <a:r>
               <a:rPr sz="1700">
@@ -4221,7 +4221,7 @@
                 </a:solidFill>
                 <a:latin typeface="Consolas"/>
               </a:rPr>
-              <a:t> 103  </a:t>
+              <a:t> 111  </a:t>
             </a:r>
             <a:r>
               <a:rPr sz="1700">
@@ -4246,7 +4246,7 @@
                 </a:solidFill>
                 <a:latin typeface="Consolas"/>
               </a:rPr>
-              <a:t> 104  </a:t>
+              <a:t> 112  </a:t>
             </a:r>
             <a:r>
               <a:rPr sz="1700">
@@ -4271,7 +4271,7 @@
                 </a:solidFill>
                 <a:latin typeface="Consolas"/>
               </a:rPr>
-              <a:t> 105  </a:t>
+              <a:t> 113  </a:t>
             </a:r>
             <a:r>
               <a:rPr sz="1700">
@@ -4826,7 +4826,7 @@
                 </a:solidFill>
                 <a:latin typeface="Consolas"/>
               </a:rPr>
-              <a:t> 106  </a:t>
+              <a:t> 114  </a:t>
             </a:r>
             <a:r>
               <a:rPr sz="1400">
@@ -4851,7 +4851,7 @@
                 </a:solidFill>
                 <a:latin typeface="Consolas"/>
               </a:rPr>
-              <a:t> 107  </a:t>
+              <a:t> 115  </a:t>
             </a:r>
             <a:r>
               <a:rPr sz="1400">
@@ -4876,7 +4876,7 @@
                 </a:solidFill>
                 <a:latin typeface="Consolas"/>
               </a:rPr>
-              <a:t> 108  </a:t>
+              <a:t> 116  </a:t>
             </a:r>
             <a:r>
               <a:rPr sz="1400">
@@ -4901,7 +4901,7 @@
                 </a:solidFill>
                 <a:latin typeface="Consolas"/>
               </a:rPr>
-              <a:t> 109  </a:t>
+              <a:t> 117  </a:t>
             </a:r>
             <a:r>
               <a:rPr sz="1400">
@@ -4926,7 +4926,7 @@
                 </a:solidFill>
                 <a:latin typeface="Consolas"/>
               </a:rPr>
-              <a:t> 110  </a:t>
+              <a:t> 118  </a:t>
             </a:r>
             <a:r>
               <a:rPr sz="1400">
@@ -4951,7 +4951,7 @@
                 </a:solidFill>
                 <a:latin typeface="Consolas"/>
               </a:rPr>
-              <a:t> 111  </a:t>
+              <a:t> 119  </a:t>
             </a:r>
             <a:r>
               <a:rPr sz="1400">
@@ -4976,7 +4976,7 @@
                 </a:solidFill>
                 <a:latin typeface="Consolas"/>
               </a:rPr>
-              <a:t> 112  </a:t>
+              <a:t> 120  </a:t>
             </a:r>
             <a:r>
               <a:rPr sz="1400">
@@ -5001,7 +5001,7 @@
                 </a:solidFill>
                 <a:latin typeface="Consolas"/>
               </a:rPr>
-              <a:t> 113  </a:t>
+              <a:t> 121  </a:t>
             </a:r>
             <a:r>
               <a:rPr sz="1400">
@@ -5026,7 +5026,7 @@
                 </a:solidFill>
                 <a:latin typeface="Consolas"/>
               </a:rPr>
-              <a:t> 114  </a:t>
+              <a:t> 122  </a:t>
             </a:r>
             <a:r>
               <a:rPr sz="1400">
@@ -5051,7 +5051,7 @@
                 </a:solidFill>
                 <a:latin typeface="Consolas"/>
               </a:rPr>
-              <a:t> 115  </a:t>
+              <a:t> 123  </a:t>
             </a:r>
             <a:r>
               <a:rPr sz="1400">
@@ -5076,7 +5076,7 @@
                 </a:solidFill>
                 <a:latin typeface="Consolas"/>
               </a:rPr>
-              <a:t> 116  </a:t>
+              <a:t> 124  </a:t>
             </a:r>
             <a:r>
               <a:rPr sz="1400">
@@ -5101,7 +5101,7 @@
                 </a:solidFill>
                 <a:latin typeface="Consolas"/>
               </a:rPr>
-              <a:t> 117  </a:t>
+              <a:t> 125  </a:t>
             </a:r>
             <a:r>
               <a:rPr sz="1400">
@@ -5126,7 +5126,7 @@
                 </a:solidFill>
                 <a:latin typeface="Consolas"/>
               </a:rPr>
-              <a:t> 118  </a:t>
+              <a:t> 126  </a:t>
             </a:r>
             <a:r>
               <a:rPr sz="1400">
@@ -5151,7 +5151,7 @@
                 </a:solidFill>
                 <a:latin typeface="Consolas"/>
               </a:rPr>
-              <a:t> 119  </a:t>
+              <a:t> 127  </a:t>
             </a:r>
             <a:r>
               <a:rPr sz="1400">
@@ -5176,7 +5176,7 @@
                 </a:solidFill>
                 <a:latin typeface="Consolas"/>
               </a:rPr>
-              <a:t> 120  </a:t>
+              <a:t> 128  </a:t>
             </a:r>
             <a:r>
               <a:rPr sz="1400">
@@ -5283,7 +5283,7 @@
                 </a:solidFill>
                 <a:latin typeface="Consolas"/>
               </a:rPr>
-              <a:t> 121  </a:t>
+              <a:t> 129  </a:t>
             </a:r>
             <a:r>
               <a:rPr sz="1400">
@@ -5308,7 +5308,7 @@
                 </a:solidFill>
                 <a:latin typeface="Consolas"/>
               </a:rPr>
-              <a:t> 122  </a:t>
+              <a:t> 130  </a:t>
             </a:r>
             <a:r>
               <a:rPr sz="1400">
@@ -5333,7 +5333,7 @@
                 </a:solidFill>
                 <a:latin typeface="Consolas"/>
               </a:rPr>
-              <a:t> 123  </a:t>
+              <a:t> 131  </a:t>
             </a:r>
             <a:r>
               <a:rPr sz="1400">
@@ -5358,7 +5358,7 @@
                 </a:solidFill>
                 <a:latin typeface="Consolas"/>
               </a:rPr>
-              <a:t> 124  </a:t>
+              <a:t> 132  </a:t>
             </a:r>
             <a:r>
               <a:rPr sz="1400">
@@ -5383,7 +5383,7 @@
                 </a:solidFill>
                 <a:latin typeface="Consolas"/>
               </a:rPr>
-              <a:t> 125  </a:t>
+              <a:t> 133  </a:t>
             </a:r>
             <a:r>
               <a:rPr sz="1400">
@@ -5408,7 +5408,7 @@
                 </a:solidFill>
                 <a:latin typeface="Consolas"/>
               </a:rPr>
-              <a:t> 126  </a:t>
+              <a:t> 134  </a:t>
             </a:r>
             <a:r>
               <a:rPr sz="1400">
@@ -5433,7 +5433,7 @@
                 </a:solidFill>
                 <a:latin typeface="Consolas"/>
               </a:rPr>
-              <a:t> 127  </a:t>
+              <a:t> 135  </a:t>
             </a:r>
             <a:r>
               <a:rPr sz="1400">
@@ -5458,7 +5458,7 @@
                 </a:solidFill>
                 <a:latin typeface="Consolas"/>
               </a:rPr>
-              <a:t> 128  </a:t>
+              <a:t> 136  </a:t>
             </a:r>
             <a:r>
               <a:rPr sz="1400">
@@ -5483,7 +5483,7 @@
                 </a:solidFill>
                 <a:latin typeface="Consolas"/>
               </a:rPr>
-              <a:t> 129  </a:t>
+              <a:t> 137  </a:t>
             </a:r>
             <a:r>
               <a:rPr sz="1400">
@@ -5508,7 +5508,7 @@
                 </a:solidFill>
                 <a:latin typeface="Consolas"/>
               </a:rPr>
-              <a:t> 130  </a:t>
+              <a:t> 138  </a:t>
             </a:r>
             <a:r>
               <a:rPr sz="1400">
@@ -5533,7 +5533,7 @@
                 </a:solidFill>
                 <a:latin typeface="Consolas"/>
               </a:rPr>
-              <a:t> 131  </a:t>
+              <a:t> 139  </a:t>
             </a:r>
             <a:r>
               <a:rPr sz="1400">
@@ -5558,7 +5558,7 @@
                 </a:solidFill>
                 <a:latin typeface="Consolas"/>
               </a:rPr>
-              <a:t> 132  </a:t>
+              <a:t> 140  </a:t>
             </a:r>
             <a:r>
               <a:rPr sz="1400">
@@ -5583,7 +5583,7 @@
                 </a:solidFill>
                 <a:latin typeface="Consolas"/>
               </a:rPr>
-              <a:t> 133  </a:t>
+              <a:t> 141  </a:t>
             </a:r>
             <a:r>
               <a:rPr sz="1400">
@@ -5608,7 +5608,7 @@
                 </a:solidFill>
                 <a:latin typeface="Consolas"/>
               </a:rPr>
-              <a:t> 134  </a:t>
+              <a:t> 142  </a:t>
             </a:r>
             <a:r>
               <a:rPr sz="1400">
@@ -5633,7 +5633,7 @@
                 </a:solidFill>
                 <a:latin typeface="Consolas"/>
               </a:rPr>
-              <a:t> 135  </a:t>
+              <a:t> 143  </a:t>
             </a:r>
             <a:r>
               <a:rPr sz="1400">
@@ -5740,7 +5740,7 @@
                 </a:solidFill>
                 <a:latin typeface="Consolas"/>
               </a:rPr>
-              <a:t> 136  </a:t>
+              <a:t> 144  </a:t>
             </a:r>
             <a:r>
               <a:rPr sz="1700">
@@ -5765,7 +5765,7 @@
                 </a:solidFill>
                 <a:latin typeface="Consolas"/>
               </a:rPr>
-              <a:t> 137  </a:t>
+              <a:t> 145  </a:t>
             </a:r>
             <a:r>
               <a:rPr sz="1700">
@@ -5790,7 +5790,7 @@
                 </a:solidFill>
                 <a:latin typeface="Consolas"/>
               </a:rPr>
-              <a:t> 138  </a:t>
+              <a:t> 146  </a:t>
             </a:r>
             <a:r>
               <a:rPr sz="1700">

--- a/ai101/slides/week-10.pptx
+++ b/ai101/slides/week-10.pptx
@@ -5750,6 +5750,56 @@
                 <a:latin typeface="Consolas"/>
               </a:rPr>
               <a:t> </a:t>
+            </a:r>
+          </a:p>
+          <a:p>
+            <a:pPr>
+              <a:spcAft>
+                <a:spcPts val="0"/>
+              </a:spcAft>
+            </a:pPr>
+            <a:r>
+              <a:rPr sz="1700">
+                <a:solidFill>
+                  <a:srgbClr val="6D8C97"/>
+                </a:solidFill>
+                <a:latin typeface="Consolas"/>
+              </a:rPr>
+              <a:t>   -  </a:t>
+            </a:r>
+            <a:r>
+              <a:rPr sz="1700" strike="sngStrike">
+                <a:solidFill>
+                  <a:srgbClr val="F3928B"/>
+                </a:solidFill>
+                <a:latin typeface="Consolas"/>
+              </a:rPr>
+              <a:t>  const data = await res.json();</a:t>
+            </a:r>
+          </a:p>
+          <a:p>
+            <a:pPr>
+              <a:spcAft>
+                <a:spcPts val="0"/>
+              </a:spcAft>
+            </a:pPr>
+            <a:r>
+              <a:rPr sz="1700">
+                <a:solidFill>
+                  <a:srgbClr val="6D8C97"/>
+                </a:solidFill>
+                <a:latin typeface="Consolas"/>
+              </a:rPr>
+              <a:t>   -  </a:t>
+            </a:r>
+            <a:r>
+              <a:rPr sz="1700" strike="sngStrike">
+                <a:solidFill>
+                  <a:srgbClr val="F3928B"/>
+                </a:solidFill>
+                <a:latin typeface="Consolas"/>
+              </a:rPr>
+              <a:t>  return data.choices[0].message.content;</a:t>
             </a:r>
           </a:p>
           <a:p>

--- a/ai101/slides/week-10.pptx
+++ b/ai101/slides/week-10.pptx
@@ -7484,12 +7484,27 @@
               </a:spcAft>
             </a:pPr>
             <a:r>
+              <a:rPr sz="2800">
+                <a:solidFill>
+                  <a:srgbClr val="01AEFD"/>
+                </a:solidFill>
+              </a:rPr>
+              <a:t>buffer.split('\n\n')</a:t>
+            </a:r>
+          </a:p>
+          <a:p>
+            <a:pPr>
+              <a:spcAft>
+                <a:spcPts val="1400"/>
+              </a:spcAft>
+            </a:pPr>
+            <a:r>
               <a:rPr sz="2400">
                 <a:solidFill>
                   <a:srgbClr val="1F2A37"/>
                 </a:solidFill>
               </a:rPr>
-              <a:t>• Cuts a string into a LIST, breaking at each separator you give.</a:t>
+              <a:t>• Cuts a string (week 1) into a LIST (week 4), breaking at each separator.</a:t>
             </a:r>
           </a:p>
           <a:p>
@@ -7504,7 +7519,22 @@
                   <a:srgbClr val="1F2A37"/>
                 </a:solidFill>
               </a:rPr>
-              <a:t>• 'a\n\nb'.split('\n\n') gives ['a', 'b'].</a:t>
+              <a:t>• The reverse of joining text with + (week 2).</a:t>
+            </a:r>
+          </a:p>
+          <a:p>
+            <a:pPr>
+              <a:spcAft>
+                <a:spcPts val="1400"/>
+              </a:spcAft>
+            </a:pPr>
+            <a:r>
+              <a:rPr sz="2400">
+                <a:solidFill>
+                  <a:srgbClr val="1F2A37"/>
+                </a:solidFill>
+              </a:rPr>
+              <a:t>• split('\n\n') gives one piece per blank line.</a:t>
             </a:r>
           </a:p>
         </p:txBody>
@@ -8254,6 +8284,21 @@
               </a:spcAft>
             </a:pPr>
             <a:r>
+              <a:rPr sz="2800">
+                <a:solidFill>
+                  <a:srgbClr val="01AEFD"/>
+                </a:solidFill>
+              </a:rPr>
+              <a:t>buffer = parts.pop();</a:t>
+            </a:r>
+          </a:p>
+          <a:p>
+            <a:pPr>
+              <a:spcAft>
+                <a:spcPts val="1400"/>
+              </a:spcAft>
+            </a:pPr>
+            <a:r>
               <a:rPr sz="2400">
                 <a:solidFill>
                   <a:srgbClr val="1F2A37"/>
@@ -8274,7 +8319,22 @@
                   <a:srgbClr val="1F2A37"/>
                 </a:solidFill>
               </a:rPr>
-              <a:t>• (.shift takes the first; .pop takes the last.)</a:t>
+              <a:t>• The other end from .shift (week 8), which takes the FIRST.</a:t>
+            </a:r>
+          </a:p>
+          <a:p>
+            <a:pPr>
+              <a:spcAft>
+                <a:spcPts val="1400"/>
+              </a:spcAft>
+            </a:pPr>
+            <a:r>
+              <a:rPr sz="2400">
+                <a:solidFill>
+                  <a:srgbClr val="1F2A37"/>
+                </a:solidFill>
+              </a:rPr>
+              <a:t>• We pop the last, maybe-unfinished piece and keep it for next round.</a:t>
             </a:r>
           </a:p>
         </p:txBody>
@@ -10504,12 +10564,57 @@
               </a:spcAft>
             </a:pPr>
             <a:r>
+              <a:rPr sz="2800">
+                <a:solidFill>
+                  <a:srgbClr val="01AEFD"/>
+                </a:solidFill>
+              </a:rPr>
+              <a:t>line.startsWith('data: ')</a:t>
+            </a:r>
+          </a:p>
+          <a:p>
+            <a:pPr>
+              <a:spcAft>
+                <a:spcPts val="1400"/>
+              </a:spcAft>
+            </a:pPr>
+            <a:r>
               <a:rPr sz="2400">
                 <a:solidFill>
                   <a:srgbClr val="1F2A37"/>
                 </a:solidFill>
               </a:rPr>
               <a:t>• True if a string begins with the text you give it.</a:t>
+            </a:r>
+          </a:p>
+          <a:p>
+            <a:pPr>
+              <a:spcAft>
+                <a:spcPts val="1400"/>
+              </a:spcAft>
+            </a:pPr>
+            <a:r>
+              <a:rPr sz="2400">
+                <a:solidFill>
+                  <a:srgbClr val="1F2A37"/>
+                </a:solidFill>
+              </a:rPr>
+              <a:t>• A yes/no answer, so it drops straight into an if (week 2).</a:t>
+            </a:r>
+          </a:p>
+          <a:p>
+            <a:pPr>
+              <a:spcAft>
+                <a:spcPts val="1400"/>
+              </a:spcAft>
+            </a:pPr>
+            <a:r>
+              <a:rPr sz="2400">
+                <a:solidFill>
+                  <a:srgbClr val="1F2A37"/>
+                </a:solidFill>
+              </a:rPr>
+              <a:t>• It skips any line that is not a 'data: ' line.</a:t>
             </a:r>
           </a:p>
         </p:txBody>
@@ -11384,12 +11489,27 @@
               </a:spcAft>
             </a:pPr>
             <a:r>
+              <a:rPr sz="2800">
+                <a:solidFill>
+                  <a:srgbClr val="01AEFD"/>
+                </a:solidFill>
+              </a:rPr>
+              <a:t>line.slice(6)</a:t>
+            </a:r>
+          </a:p>
+          <a:p>
+            <a:pPr>
+              <a:spcAft>
+                <a:spcPts val="1400"/>
+              </a:spcAft>
+            </a:pPr>
+            <a:r>
               <a:rPr sz="2400">
                 <a:solidFill>
                   <a:srgbClr val="1F2A37"/>
                 </a:solidFill>
               </a:rPr>
-              <a:t>• Takes a section of a string (or list), starting at a position.</a:t>
+              <a:t>• Takes a SECTION of a string, from one position onward.</a:t>
             </a:r>
           </a:p>
           <a:p>
@@ -11404,7 +11524,22 @@
                   <a:srgbClr val="1F2A37"/>
                 </a:solidFill>
               </a:rPr>
-              <a:t>• line.slice(6) drops the first six characters.</a:t>
+              <a:t>• Counting starts at 0, like picking from a list with [0] (week 4).</a:t>
+            </a:r>
+          </a:p>
+          <a:p>
+            <a:pPr>
+              <a:spcAft>
+                <a:spcPts val="1400"/>
+              </a:spcAft>
+            </a:pPr>
+            <a:r>
+              <a:rPr sz="2400">
+                <a:solidFill>
+                  <a:srgbClr val="1F2A37"/>
+                </a:solidFill>
+              </a:rPr>
+              <a:t>• slice(6) drops the first six characters ('data: ').</a:t>
             </a:r>
           </a:p>
         </p:txBody>
@@ -13231,12 +13366,27 @@
               </a:spcAft>
             </a:pPr>
             <a:r>
+              <a:rPr sz="2800">
+                <a:solidFill>
+                  <a:srgbClr val="01AEFD"/>
+                </a:solidFill>
+              </a:rPr>
+              <a:t>const piece = JSON.parse(payload);</a:t>
+            </a:r>
+          </a:p>
+          <a:p>
+            <a:pPr>
+              <a:spcAft>
+                <a:spcPts val="1400"/>
+              </a:spcAft>
+            </a:pPr>
+            <a:r>
               <a:rPr sz="2400">
                 <a:solidFill>
                   <a:srgbClr val="1F2A37"/>
                 </a:solidFill>
               </a:rPr>
-              <a:t>• Turns a JSON string from the server back into a JavaScript object.</a:t>
+              <a:t>• Turns JSON TEXT back into a JavaScript object (week 3) or list.</a:t>
             </a:r>
           </a:p>
           <a:p>
@@ -13251,7 +13401,22 @@
                   <a:srgbClr val="1F2A37"/>
                 </a:solidFill>
               </a:rPr>
-              <a:t>• The opposite of JSON.stringify.</a:t>
+              <a:t>• The exact opposite of JSON.stringify (week 4), which made text FROM data.</a:t>
+            </a:r>
+          </a:p>
+          <a:p>
+            <a:pPr>
+              <a:spcAft>
+                <a:spcPts val="1400"/>
+              </a:spcAft>
+            </a:pPr>
+            <a:r>
+              <a:rPr sz="2400">
+                <a:solidFill>
+                  <a:srgbClr val="1F2A37"/>
+                </a:solidFill>
+              </a:rPr>
+              <a:t>• Each streamed piece arrives as text; parse it to read the .content.</a:t>
             </a:r>
           </a:p>
         </p:txBody>

--- a/ai101/slides/week-10.pptx
+++ b/ai101/slides/week-10.pptx
@@ -47,6 +47,14 @@
     <p:sldId id="295" r:id="rId46"/>
     <p:sldId id="296" r:id="rId47"/>
     <p:sldId id="297" r:id="rId48"/>
+    <p:sldId id="298" r:id="rId49"/>
+    <p:sldId id="299" r:id="rId50"/>
+    <p:sldId id="300" r:id="rId51"/>
+    <p:sldId id="301" r:id="rId52"/>
+    <p:sldId id="302" r:id="rId53"/>
+    <p:sldId id="303" r:id="rId54"/>
+    <p:sldId id="304" r:id="rId55"/>
+    <p:sldId id="305" r:id="rId56"/>
   </p:sldIdLst>
   <p:sldSz cx="12191695" cy="6858000" type="screen4x3"/>
   <p:notesSz cx="6858000" cy="9144000"/>
@@ -20982,7 +20990,7 @@
                   <a:srgbClr val="1F2A37"/>
                 </a:solidFill>
               </a:rPr>
-              <a:t>Checkpoint: it streams (quietly)</a:t>
+              <a:t>JSON.parse(text)  turns text into...?</a:t>
             </a:r>
           </a:p>
         </p:txBody>
@@ -21015,7 +21023,7 @@
                   <a:srgbClr val="01AEFD"/>
                 </a:solidFill>
               </a:rPr>
-              <a:t>CHECKPOINT - RUN IT</a:t>
+              <a:t>QUICK CHECK</a:t>
             </a:r>
           </a:p>
         </p:txBody>
@@ -21048,12 +21056,12 @@
               </a:spcAft>
             </a:pPr>
             <a:r>
-              <a:rPr sz="2800">
-                <a:solidFill>
-                  <a:srgbClr val="01AEFD"/>
-                </a:solidFill>
-              </a:rPr>
-              <a:t>Press Run and send a question. It should still reply exactly as before - the change is invisible ON PURPOSE. Open the console: the request now says stream: true and the reply arrives in pieces. Next week you make those pieces show as they land.</a:t>
+              <a:rPr sz="2400">
+                <a:solidFill>
+                  <a:srgbClr val="1F2A37"/>
+                </a:solidFill>
+              </a:rPr>
+              <a:t>• A. plain text</a:t>
             </a:r>
           </a:p>
           <a:p>
@@ -21068,7 +21076,7 @@
                   <a:srgbClr val="1F2A37"/>
                 </a:solidFill>
               </a:rPr>
-              <a:t>• Run it in the classroom, or press Show the output in the web deck.</a:t>
+              <a:t>• B. a real object</a:t>
             </a:r>
           </a:p>
           <a:p>
@@ -21083,7 +21091,37 @@
                   <a:srgbClr val="1F2A37"/>
                 </a:solidFill>
               </a:rPr>
-              <a:t>• Everyone's screen should match this.</a:t>
+              <a:t>• C. a number only</a:t>
+            </a:r>
+          </a:p>
+          <a:p>
+            <a:pPr>
+              <a:spcAft>
+                <a:spcPts val="1400"/>
+              </a:spcAft>
+            </a:pPr>
+            <a:r>
+              <a:rPr sz="2400">
+                <a:solidFill>
+                  <a:srgbClr val="1F2A37"/>
+                </a:solidFill>
+              </a:rPr>
+              <a:t>• D. an HTML tag</a:t>
+            </a:r>
+          </a:p>
+          <a:p>
+            <a:pPr>
+              <a:spcAft>
+                <a:spcPts val="1400"/>
+              </a:spcAft>
+            </a:pPr>
+            <a:r>
+              <a:rPr sz="2400">
+                <a:solidFill>
+                  <a:srgbClr val="1F2A37"/>
+                </a:solidFill>
+              </a:rPr>
+              <a:t>• Pick one - the answer is on the next slide.</a:t>
             </a:r>
           </a:p>
         </p:txBody>
@@ -21127,7 +21165,7 @@
                   <a:srgbClr val="1F2A37"/>
                 </a:solidFill>
               </a:rPr>
-              <a:t>Today was plumbing</a:t>
+              <a:t>JSON.parse(text)  turns text into...?</a:t>
             </a:r>
           </a:p>
         </p:txBody>
@@ -21135,6 +21173,39 @@
       <p:sp>
         <p:nvSpPr>
           <p:cNvPr id="3" name="TextBox 2"/>
+          <p:cNvSpPr txBox="1"/>
+          <p:nvPr/>
+        </p:nvSpPr>
+        <p:spPr>
+          <a:xfrm>
+            <a:off x="868680" y="502920"/>
+            <a:ext cx="5486400" cy="457200"/>
+          </a:xfrm>
+          <a:prstGeom prst="rect">
+            <a:avLst/>
+          </a:prstGeom>
+          <a:noFill/>
+        </p:spPr>
+        <p:txBody>
+          <a:bodyPr wrap="none">
+            <a:spAutoFit/>
+          </a:bodyPr>
+          <a:lstStyle/>
+          <a:p>
+            <a:r>
+              <a:rPr sz="1500" b="1">
+                <a:solidFill>
+                  <a:srgbClr val="01AEFD"/>
+                </a:solidFill>
+              </a:rPr>
+              <a:t>ANSWER</a:t>
+            </a:r>
+          </a:p>
+        </p:txBody>
+      </p:sp>
+      <p:sp>
+        <p:nvSpPr>
+          <p:cNvPr id="4" name="TextBox 3"/>
           <p:cNvSpPr txBox="1"/>
           <p:nvPr/>
         </p:nvSpPr>
@@ -21160,12 +21231,1237 @@
               </a:spcAft>
             </a:pPr>
             <a:r>
+              <a:rPr sz="2400">
+                <a:solidFill>
+                  <a:srgbClr val="1F2A37"/>
+                </a:solidFill>
+              </a:rPr>
+              <a:t>• A. plain text</a:t>
+            </a:r>
+          </a:p>
+          <a:p>
+            <a:pPr>
+              <a:spcAft>
+                <a:spcPts val="1400"/>
+              </a:spcAft>
+            </a:pPr>
+            <a:r>
+              <a:rPr sz="2400">
+                <a:solidFill>
+                  <a:srgbClr val="1F2A37"/>
+                </a:solidFill>
+              </a:rPr>
+              <a:t>• B. a real object (correct)</a:t>
+            </a:r>
+          </a:p>
+          <a:p>
+            <a:pPr>
+              <a:spcAft>
+                <a:spcPts val="1400"/>
+              </a:spcAft>
+            </a:pPr>
+            <a:r>
+              <a:rPr sz="2400">
+                <a:solidFill>
+                  <a:srgbClr val="1F2A37"/>
+                </a:solidFill>
+              </a:rPr>
+              <a:t>• C. a number only</a:t>
+            </a:r>
+          </a:p>
+          <a:p>
+            <a:pPr>
+              <a:spcAft>
+                <a:spcPts val="1400"/>
+              </a:spcAft>
+            </a:pPr>
+            <a:r>
+              <a:rPr sz="2400">
+                <a:solidFill>
+                  <a:srgbClr val="1F2A37"/>
+                </a:solidFill>
+              </a:rPr>
+              <a:t>• D. an HTML tag</a:t>
+            </a:r>
+          </a:p>
+          <a:p>
+            <a:pPr>
+              <a:spcAft>
+                <a:spcPts val="1400"/>
+              </a:spcAft>
+            </a:pPr>
+            <a:r>
+              <a:rPr sz="2400">
+                <a:solidFill>
+                  <a:srgbClr val="1F2A37"/>
+                </a:solidFill>
+              </a:rPr>
+              <a:t>• JSON.parse is the reverse of stringify - text back into an object.</a:t>
+            </a:r>
+          </a:p>
+        </p:txBody>
+      </p:sp>
+    </p:spTree>
+  </p:cSld>
+  <p:clrMapOvr>
+    <a:masterClrMapping/>
+  </p:clrMapOvr>
+</p:sld>
+</file>
+
+<file path=ppt/slides/slide43.xml><?xml version="1.0" encoding="utf-8"?>
+<p:sld xmlns:a="http://schemas.openxmlformats.org/drawingml/2006/main" xmlns:p="http://schemas.openxmlformats.org/presentationml/2006/main" xmlns:r="http://schemas.openxmlformats.org/officeDocument/2006/relationships">
+  <p:cSld>
+    <p:spTree>
+      <p:nvGrpSpPr>
+        <p:cNvPr id="1" name=""/>
+        <p:cNvGrpSpPr/>
+        <p:nvPr/>
+      </p:nvGrpSpPr>
+      <p:grpSpPr/>
+      <p:sp>
+        <p:nvSpPr>
+          <p:cNvPr id="2" name="Title 1"/>
+          <p:cNvSpPr>
+            <a:spLocks noGrp="1"/>
+          </p:cNvSpPr>
+          <p:nvPr>
+            <p:ph type="title"/>
+          </p:nvPr>
+        </p:nvSpPr>
+        <p:spPr/>
+        <p:txBody>
+          <a:bodyPr/>
+          <a:lstStyle/>
+          <a:p>
+            <a:r>
+              <a:rPr sz="3800" b="1">
+                <a:solidFill>
+                  <a:srgbClr val="1F2A37"/>
+                </a:solidFill>
+              </a:rPr>
+              <a:t>line.split(',')  returns...?</a:t>
+            </a:r>
+          </a:p>
+        </p:txBody>
+      </p:sp>
+      <p:sp>
+        <p:nvSpPr>
+          <p:cNvPr id="3" name="TextBox 2"/>
+          <p:cNvSpPr txBox="1"/>
+          <p:nvPr/>
+        </p:nvSpPr>
+        <p:spPr>
+          <a:xfrm>
+            <a:off x="868680" y="502920"/>
+            <a:ext cx="5486400" cy="457200"/>
+          </a:xfrm>
+          <a:prstGeom prst="rect">
+            <a:avLst/>
+          </a:prstGeom>
+          <a:noFill/>
+        </p:spPr>
+        <p:txBody>
+          <a:bodyPr wrap="none">
+            <a:spAutoFit/>
+          </a:bodyPr>
+          <a:lstStyle/>
+          <a:p>
+            <a:r>
+              <a:rPr sz="1500" b="1">
+                <a:solidFill>
+                  <a:srgbClr val="01AEFD"/>
+                </a:solidFill>
+              </a:rPr>
+              <a:t>QUICK CHECK</a:t>
+            </a:r>
+          </a:p>
+        </p:txBody>
+      </p:sp>
+      <p:sp>
+        <p:nvSpPr>
+          <p:cNvPr id="4" name="TextBox 3"/>
+          <p:cNvSpPr txBox="1"/>
+          <p:nvPr/>
+        </p:nvSpPr>
+        <p:spPr>
+          <a:xfrm>
+            <a:off x="822960" y="1828800"/>
+            <a:ext cx="10515600" cy="4206240"/>
+          </a:xfrm>
+          <a:prstGeom prst="rect">
+            <a:avLst/>
+          </a:prstGeom>
+          <a:noFill/>
+        </p:spPr>
+        <p:txBody>
+          <a:bodyPr wrap="square">
+            <a:spAutoFit/>
+          </a:bodyPr>
+          <a:lstStyle/>
+          <a:p>
+            <a:pPr>
+              <a:spcAft>
+                <a:spcPts val="1400"/>
+              </a:spcAft>
+            </a:pPr>
+            <a:r>
+              <a:rPr sz="2400">
+                <a:solidFill>
+                  <a:srgbClr val="1F2A37"/>
+                </a:solidFill>
+              </a:rPr>
+              <a:t>• A. one big string</a:t>
+            </a:r>
+          </a:p>
+          <a:p>
+            <a:pPr>
+              <a:spcAft>
+                <a:spcPts val="1400"/>
+              </a:spcAft>
+            </a:pPr>
+            <a:r>
+              <a:rPr sz="2400">
+                <a:solidFill>
+                  <a:srgbClr val="1F2A37"/>
+                </a:solidFill>
+              </a:rPr>
+              <a:t>• B. a list of the pieces</a:t>
+            </a:r>
+          </a:p>
+          <a:p>
+            <a:pPr>
+              <a:spcAft>
+                <a:spcPts val="1400"/>
+              </a:spcAft>
+            </a:pPr>
+            <a:r>
+              <a:rPr sz="2400">
+                <a:solidFill>
+                  <a:srgbClr val="1F2A37"/>
+                </a:solidFill>
+              </a:rPr>
+              <a:t>• C. the first letter</a:t>
+            </a:r>
+          </a:p>
+          <a:p>
+            <a:pPr>
+              <a:spcAft>
+                <a:spcPts val="1400"/>
+              </a:spcAft>
+            </a:pPr>
+            <a:r>
+              <a:rPr sz="2400">
+                <a:solidFill>
+                  <a:srgbClr val="1F2A37"/>
+                </a:solidFill>
+              </a:rPr>
+              <a:t>• D. a number</a:t>
+            </a:r>
+          </a:p>
+          <a:p>
+            <a:pPr>
+              <a:spcAft>
+                <a:spcPts val="1400"/>
+              </a:spcAft>
+            </a:pPr>
+            <a:r>
+              <a:rPr sz="2400">
+                <a:solidFill>
+                  <a:srgbClr val="1F2A37"/>
+                </a:solidFill>
+              </a:rPr>
+              <a:t>• Pick one - the answer is on the next slide.</a:t>
+            </a:r>
+          </a:p>
+        </p:txBody>
+      </p:sp>
+    </p:spTree>
+  </p:cSld>
+  <p:clrMapOvr>
+    <a:masterClrMapping/>
+  </p:clrMapOvr>
+</p:sld>
+</file>
+
+<file path=ppt/slides/slide44.xml><?xml version="1.0" encoding="utf-8"?>
+<p:sld xmlns:a="http://schemas.openxmlformats.org/drawingml/2006/main" xmlns:p="http://schemas.openxmlformats.org/presentationml/2006/main" xmlns:r="http://schemas.openxmlformats.org/officeDocument/2006/relationships">
+  <p:cSld>
+    <p:spTree>
+      <p:nvGrpSpPr>
+        <p:cNvPr id="1" name=""/>
+        <p:cNvGrpSpPr/>
+        <p:nvPr/>
+      </p:nvGrpSpPr>
+      <p:grpSpPr/>
+      <p:sp>
+        <p:nvSpPr>
+          <p:cNvPr id="2" name="Title 1"/>
+          <p:cNvSpPr>
+            <a:spLocks noGrp="1"/>
+          </p:cNvSpPr>
+          <p:nvPr>
+            <p:ph type="title"/>
+          </p:nvPr>
+        </p:nvSpPr>
+        <p:spPr/>
+        <p:txBody>
+          <a:bodyPr/>
+          <a:lstStyle/>
+          <a:p>
+            <a:r>
+              <a:rPr sz="3800" b="1">
+                <a:solidFill>
+                  <a:srgbClr val="1F2A37"/>
+                </a:solidFill>
+              </a:rPr>
+              <a:t>line.split(',')  returns...?</a:t>
+            </a:r>
+          </a:p>
+        </p:txBody>
+      </p:sp>
+      <p:sp>
+        <p:nvSpPr>
+          <p:cNvPr id="3" name="TextBox 2"/>
+          <p:cNvSpPr txBox="1"/>
+          <p:nvPr/>
+        </p:nvSpPr>
+        <p:spPr>
+          <a:xfrm>
+            <a:off x="868680" y="502920"/>
+            <a:ext cx="5486400" cy="457200"/>
+          </a:xfrm>
+          <a:prstGeom prst="rect">
+            <a:avLst/>
+          </a:prstGeom>
+          <a:noFill/>
+        </p:spPr>
+        <p:txBody>
+          <a:bodyPr wrap="none">
+            <a:spAutoFit/>
+          </a:bodyPr>
+          <a:lstStyle/>
+          <a:p>
+            <a:r>
+              <a:rPr sz="1500" b="1">
+                <a:solidFill>
+                  <a:srgbClr val="01AEFD"/>
+                </a:solidFill>
+              </a:rPr>
+              <a:t>ANSWER</a:t>
+            </a:r>
+          </a:p>
+        </p:txBody>
+      </p:sp>
+      <p:sp>
+        <p:nvSpPr>
+          <p:cNvPr id="4" name="TextBox 3"/>
+          <p:cNvSpPr txBox="1"/>
+          <p:nvPr/>
+        </p:nvSpPr>
+        <p:spPr>
+          <a:xfrm>
+            <a:off x="822960" y="1828800"/>
+            <a:ext cx="10515600" cy="4206240"/>
+          </a:xfrm>
+          <a:prstGeom prst="rect">
+            <a:avLst/>
+          </a:prstGeom>
+          <a:noFill/>
+        </p:spPr>
+        <p:txBody>
+          <a:bodyPr wrap="square">
+            <a:spAutoFit/>
+          </a:bodyPr>
+          <a:lstStyle/>
+          <a:p>
+            <a:pPr>
+              <a:spcAft>
+                <a:spcPts val="1400"/>
+              </a:spcAft>
+            </a:pPr>
+            <a:r>
+              <a:rPr sz="2400">
+                <a:solidFill>
+                  <a:srgbClr val="1F2A37"/>
+                </a:solidFill>
+              </a:rPr>
+              <a:t>• A. one big string</a:t>
+            </a:r>
+          </a:p>
+          <a:p>
+            <a:pPr>
+              <a:spcAft>
+                <a:spcPts val="1400"/>
+              </a:spcAft>
+            </a:pPr>
+            <a:r>
+              <a:rPr sz="2400">
+                <a:solidFill>
+                  <a:srgbClr val="1F2A37"/>
+                </a:solidFill>
+              </a:rPr>
+              <a:t>• B. a list of the pieces (correct)</a:t>
+            </a:r>
+          </a:p>
+          <a:p>
+            <a:pPr>
+              <a:spcAft>
+                <a:spcPts val="1400"/>
+              </a:spcAft>
+            </a:pPr>
+            <a:r>
+              <a:rPr sz="2400">
+                <a:solidFill>
+                  <a:srgbClr val="1F2A37"/>
+                </a:solidFill>
+              </a:rPr>
+              <a:t>• C. the first letter</a:t>
+            </a:r>
+          </a:p>
+          <a:p>
+            <a:pPr>
+              <a:spcAft>
+                <a:spcPts val="1400"/>
+              </a:spcAft>
+            </a:pPr>
+            <a:r>
+              <a:rPr sz="2400">
+                <a:solidFill>
+                  <a:srgbClr val="1F2A37"/>
+                </a:solidFill>
+              </a:rPr>
+              <a:t>• D. a number</a:t>
+            </a:r>
+          </a:p>
+          <a:p>
+            <a:pPr>
+              <a:spcAft>
+                <a:spcPts val="1400"/>
+              </a:spcAft>
+            </a:pPr>
+            <a:r>
+              <a:rPr sz="2400">
+                <a:solidFill>
+                  <a:srgbClr val="1F2A37"/>
+                </a:solidFill>
+              </a:rPr>
+              <a:t>• .split cuts a string into an array at each comma.</a:t>
+            </a:r>
+          </a:p>
+        </p:txBody>
+      </p:sp>
+    </p:spTree>
+  </p:cSld>
+  <p:clrMapOvr>
+    <a:masterClrMapping/>
+  </p:clrMapOvr>
+</p:sld>
+</file>
+
+<file path=ppt/slides/slide45.xml><?xml version="1.0" encoding="utf-8"?>
+<p:sld xmlns:a="http://schemas.openxmlformats.org/drawingml/2006/main" xmlns:p="http://schemas.openxmlformats.org/presentationml/2006/main" xmlns:r="http://schemas.openxmlformats.org/officeDocument/2006/relationships">
+  <p:cSld>
+    <p:spTree>
+      <p:nvGrpSpPr>
+        <p:cNvPr id="1" name=""/>
+        <p:cNvGrpSpPr/>
+        <p:nvPr/>
+      </p:nvGrpSpPr>
+      <p:grpSpPr/>
+      <p:sp>
+        <p:nvSpPr>
+          <p:cNvPr id="2" name="Title 1"/>
+          <p:cNvSpPr>
+            <a:spLocks noGrp="1"/>
+          </p:cNvSpPr>
+          <p:nvPr>
+            <p:ph type="title"/>
+          </p:nvPr>
+        </p:nvSpPr>
+        <p:spPr/>
+        <p:txBody>
+          <a:bodyPr/>
+          <a:lstStyle/>
+          <a:p>
+            <a:r>
+              <a:rPr sz="3800" b="1">
+                <a:solidFill>
+                  <a:srgbClr val="1F2A37"/>
+                </a:solidFill>
+              </a:rPr>
+              <a:t>line.startsWith('data:')  checks if the line...?</a:t>
+            </a:r>
+          </a:p>
+        </p:txBody>
+      </p:sp>
+      <p:sp>
+        <p:nvSpPr>
+          <p:cNvPr id="3" name="TextBox 2"/>
+          <p:cNvSpPr txBox="1"/>
+          <p:nvPr/>
+        </p:nvSpPr>
+        <p:spPr>
+          <a:xfrm>
+            <a:off x="868680" y="502920"/>
+            <a:ext cx="5486400" cy="457200"/>
+          </a:xfrm>
+          <a:prstGeom prst="rect">
+            <a:avLst/>
+          </a:prstGeom>
+          <a:noFill/>
+        </p:spPr>
+        <p:txBody>
+          <a:bodyPr wrap="none">
+            <a:spAutoFit/>
+          </a:bodyPr>
+          <a:lstStyle/>
+          <a:p>
+            <a:r>
+              <a:rPr sz="1500" b="1">
+                <a:solidFill>
+                  <a:srgbClr val="01AEFD"/>
+                </a:solidFill>
+              </a:rPr>
+              <a:t>QUICK CHECK</a:t>
+            </a:r>
+          </a:p>
+        </p:txBody>
+      </p:sp>
+      <p:sp>
+        <p:nvSpPr>
+          <p:cNvPr id="4" name="TextBox 3"/>
+          <p:cNvSpPr txBox="1"/>
+          <p:nvPr/>
+        </p:nvSpPr>
+        <p:spPr>
+          <a:xfrm>
+            <a:off x="822960" y="1828800"/>
+            <a:ext cx="10515600" cy="4206240"/>
+          </a:xfrm>
+          <a:prstGeom prst="rect">
+            <a:avLst/>
+          </a:prstGeom>
+          <a:noFill/>
+        </p:spPr>
+        <p:txBody>
+          <a:bodyPr wrap="square">
+            <a:spAutoFit/>
+          </a:bodyPr>
+          <a:lstStyle/>
+          <a:p>
+            <a:pPr>
+              <a:spcAft>
+                <a:spcPts val="1400"/>
+              </a:spcAft>
+            </a:pPr>
+            <a:r>
+              <a:rPr sz="2400">
+                <a:solidFill>
+                  <a:srgbClr val="1F2A37"/>
+                </a:solidFill>
+              </a:rPr>
+              <a:t>• A. ends with 'data:'</a:t>
+            </a:r>
+          </a:p>
+          <a:p>
+            <a:pPr>
+              <a:spcAft>
+                <a:spcPts val="1400"/>
+              </a:spcAft>
+            </a:pPr>
+            <a:r>
+              <a:rPr sz="2400">
+                <a:solidFill>
+                  <a:srgbClr val="1F2A37"/>
+                </a:solidFill>
+              </a:rPr>
+              <a:t>• B. begins with 'data:'</a:t>
+            </a:r>
+          </a:p>
+          <a:p>
+            <a:pPr>
+              <a:spcAft>
+                <a:spcPts val="1400"/>
+              </a:spcAft>
+            </a:pPr>
+            <a:r>
+              <a:rPr sz="2400">
+                <a:solidFill>
+                  <a:srgbClr val="1F2A37"/>
+                </a:solidFill>
+              </a:rPr>
+              <a:t>• C. contains a number</a:t>
+            </a:r>
+          </a:p>
+          <a:p>
+            <a:pPr>
+              <a:spcAft>
+                <a:spcPts val="1400"/>
+              </a:spcAft>
+            </a:pPr>
+            <a:r>
+              <a:rPr sz="2400">
+                <a:solidFill>
+                  <a:srgbClr val="1F2A37"/>
+                </a:solidFill>
+              </a:rPr>
+              <a:t>• D. is empty</a:t>
+            </a:r>
+          </a:p>
+          <a:p>
+            <a:pPr>
+              <a:spcAft>
+                <a:spcPts val="1400"/>
+              </a:spcAft>
+            </a:pPr>
+            <a:r>
+              <a:rPr sz="2400">
+                <a:solidFill>
+                  <a:srgbClr val="1F2A37"/>
+                </a:solidFill>
+              </a:rPr>
+              <a:t>• Pick one - the answer is on the next slide.</a:t>
+            </a:r>
+          </a:p>
+        </p:txBody>
+      </p:sp>
+    </p:spTree>
+  </p:cSld>
+  <p:clrMapOvr>
+    <a:masterClrMapping/>
+  </p:clrMapOvr>
+</p:sld>
+</file>
+
+<file path=ppt/slides/slide46.xml><?xml version="1.0" encoding="utf-8"?>
+<p:sld xmlns:a="http://schemas.openxmlformats.org/drawingml/2006/main" xmlns:p="http://schemas.openxmlformats.org/presentationml/2006/main" xmlns:r="http://schemas.openxmlformats.org/officeDocument/2006/relationships">
+  <p:cSld>
+    <p:spTree>
+      <p:nvGrpSpPr>
+        <p:cNvPr id="1" name=""/>
+        <p:cNvGrpSpPr/>
+        <p:nvPr/>
+      </p:nvGrpSpPr>
+      <p:grpSpPr/>
+      <p:sp>
+        <p:nvSpPr>
+          <p:cNvPr id="2" name="Title 1"/>
+          <p:cNvSpPr>
+            <a:spLocks noGrp="1"/>
+          </p:cNvSpPr>
+          <p:nvPr>
+            <p:ph type="title"/>
+          </p:nvPr>
+        </p:nvSpPr>
+        <p:spPr/>
+        <p:txBody>
+          <a:bodyPr/>
+          <a:lstStyle/>
+          <a:p>
+            <a:r>
+              <a:rPr sz="3800" b="1">
+                <a:solidFill>
+                  <a:srgbClr val="1F2A37"/>
+                </a:solidFill>
+              </a:rPr>
+              <a:t>line.startsWith('data:')  checks if the line...?</a:t>
+            </a:r>
+          </a:p>
+        </p:txBody>
+      </p:sp>
+      <p:sp>
+        <p:nvSpPr>
+          <p:cNvPr id="3" name="TextBox 2"/>
+          <p:cNvSpPr txBox="1"/>
+          <p:nvPr/>
+        </p:nvSpPr>
+        <p:spPr>
+          <a:xfrm>
+            <a:off x="868680" y="502920"/>
+            <a:ext cx="5486400" cy="457200"/>
+          </a:xfrm>
+          <a:prstGeom prst="rect">
+            <a:avLst/>
+          </a:prstGeom>
+          <a:noFill/>
+        </p:spPr>
+        <p:txBody>
+          <a:bodyPr wrap="none">
+            <a:spAutoFit/>
+          </a:bodyPr>
+          <a:lstStyle/>
+          <a:p>
+            <a:r>
+              <a:rPr sz="1500" b="1">
+                <a:solidFill>
+                  <a:srgbClr val="01AEFD"/>
+                </a:solidFill>
+              </a:rPr>
+              <a:t>ANSWER</a:t>
+            </a:r>
+          </a:p>
+        </p:txBody>
+      </p:sp>
+      <p:sp>
+        <p:nvSpPr>
+          <p:cNvPr id="4" name="TextBox 3"/>
+          <p:cNvSpPr txBox="1"/>
+          <p:nvPr/>
+        </p:nvSpPr>
+        <p:spPr>
+          <a:xfrm>
+            <a:off x="822960" y="1828800"/>
+            <a:ext cx="10515600" cy="4206240"/>
+          </a:xfrm>
+          <a:prstGeom prst="rect">
+            <a:avLst/>
+          </a:prstGeom>
+          <a:noFill/>
+        </p:spPr>
+        <p:txBody>
+          <a:bodyPr wrap="square">
+            <a:spAutoFit/>
+          </a:bodyPr>
+          <a:lstStyle/>
+          <a:p>
+            <a:pPr>
+              <a:spcAft>
+                <a:spcPts val="1400"/>
+              </a:spcAft>
+            </a:pPr>
+            <a:r>
+              <a:rPr sz="2400">
+                <a:solidFill>
+                  <a:srgbClr val="1F2A37"/>
+                </a:solidFill>
+              </a:rPr>
+              <a:t>• A. ends with 'data:'</a:t>
+            </a:r>
+          </a:p>
+          <a:p>
+            <a:pPr>
+              <a:spcAft>
+                <a:spcPts val="1400"/>
+              </a:spcAft>
+            </a:pPr>
+            <a:r>
+              <a:rPr sz="2400">
+                <a:solidFill>
+                  <a:srgbClr val="1F2A37"/>
+                </a:solidFill>
+              </a:rPr>
+              <a:t>• B. begins with 'data:' (correct)</a:t>
+            </a:r>
+          </a:p>
+          <a:p>
+            <a:pPr>
+              <a:spcAft>
+                <a:spcPts val="1400"/>
+              </a:spcAft>
+            </a:pPr>
+            <a:r>
+              <a:rPr sz="2400">
+                <a:solidFill>
+                  <a:srgbClr val="1F2A37"/>
+                </a:solidFill>
+              </a:rPr>
+              <a:t>• C. contains a number</a:t>
+            </a:r>
+          </a:p>
+          <a:p>
+            <a:pPr>
+              <a:spcAft>
+                <a:spcPts val="1400"/>
+              </a:spcAft>
+            </a:pPr>
+            <a:r>
+              <a:rPr sz="2400">
+                <a:solidFill>
+                  <a:srgbClr val="1F2A37"/>
+                </a:solidFill>
+              </a:rPr>
+              <a:t>• D. is empty</a:t>
+            </a:r>
+          </a:p>
+          <a:p>
+            <a:pPr>
+              <a:spcAft>
+                <a:spcPts val="1400"/>
+              </a:spcAft>
+            </a:pPr>
+            <a:r>
+              <a:rPr sz="2400">
+                <a:solidFill>
+                  <a:srgbClr val="1F2A37"/>
+                </a:solidFill>
+              </a:rPr>
+              <a:t>• .startsWith is true only when the string begins with that text.</a:t>
+            </a:r>
+          </a:p>
+        </p:txBody>
+      </p:sp>
+    </p:spTree>
+  </p:cSld>
+  <p:clrMapOvr>
+    <a:masterClrMapping/>
+  </p:clrMapOvr>
+</p:sld>
+</file>
+
+<file path=ppt/slides/slide47.xml><?xml version="1.0" encoding="utf-8"?>
+<p:sld xmlns:a="http://schemas.openxmlformats.org/drawingml/2006/main" xmlns:p="http://schemas.openxmlformats.org/presentationml/2006/main" xmlns:r="http://schemas.openxmlformats.org/officeDocument/2006/relationships">
+  <p:cSld>
+    <p:spTree>
+      <p:nvGrpSpPr>
+        <p:cNvPr id="1" name=""/>
+        <p:cNvGrpSpPr/>
+        <p:nvPr/>
+      </p:nvGrpSpPr>
+      <p:grpSpPr/>
+      <p:sp>
+        <p:nvSpPr>
+          <p:cNvPr id="2" name="Title 1"/>
+          <p:cNvSpPr>
+            <a:spLocks noGrp="1"/>
+          </p:cNvSpPr>
+          <p:nvPr>
+            <p:ph type="title"/>
+          </p:nvPr>
+        </p:nvSpPr>
+        <p:spPr/>
+        <p:txBody>
+          <a:bodyPr/>
+          <a:lstStyle/>
+          <a:p>
+            <a:r>
+              <a:rPr sz="3800" b="1">
+                <a:solidFill>
+                  <a:srgbClr val="1F2A37"/>
+                </a:solidFill>
+              </a:rPr>
+              <a:t>&lt;select&gt; builds a...? (from week 9)</a:t>
+            </a:r>
+          </a:p>
+        </p:txBody>
+      </p:sp>
+      <p:sp>
+        <p:nvSpPr>
+          <p:cNvPr id="3" name="TextBox 2"/>
+          <p:cNvSpPr txBox="1"/>
+          <p:nvPr/>
+        </p:nvSpPr>
+        <p:spPr>
+          <a:xfrm>
+            <a:off x="868680" y="502920"/>
+            <a:ext cx="5486400" cy="457200"/>
+          </a:xfrm>
+          <a:prstGeom prst="rect">
+            <a:avLst/>
+          </a:prstGeom>
+          <a:noFill/>
+        </p:spPr>
+        <p:txBody>
+          <a:bodyPr wrap="none">
+            <a:spAutoFit/>
+          </a:bodyPr>
+          <a:lstStyle/>
+          <a:p>
+            <a:r>
+              <a:rPr sz="1500" b="1">
+                <a:solidFill>
+                  <a:srgbClr val="01AEFD"/>
+                </a:solidFill>
+              </a:rPr>
+              <a:t>QUICK CHECK</a:t>
+            </a:r>
+          </a:p>
+        </p:txBody>
+      </p:sp>
+      <p:sp>
+        <p:nvSpPr>
+          <p:cNvPr id="4" name="TextBox 3"/>
+          <p:cNvSpPr txBox="1"/>
+          <p:nvPr/>
+        </p:nvSpPr>
+        <p:spPr>
+          <a:xfrm>
+            <a:off x="822960" y="1828800"/>
+            <a:ext cx="10515600" cy="4206240"/>
+          </a:xfrm>
+          <a:prstGeom prst="rect">
+            <a:avLst/>
+          </a:prstGeom>
+          <a:noFill/>
+        </p:spPr>
+        <p:txBody>
+          <a:bodyPr wrap="square">
+            <a:spAutoFit/>
+          </a:bodyPr>
+          <a:lstStyle/>
+          <a:p>
+            <a:pPr>
+              <a:spcAft>
+                <a:spcPts val="1400"/>
+              </a:spcAft>
+            </a:pPr>
+            <a:r>
+              <a:rPr sz="2400">
+                <a:solidFill>
+                  <a:srgbClr val="1F2A37"/>
+                </a:solidFill>
+              </a:rPr>
+              <a:t>• A. dropdown menu</a:t>
+            </a:r>
+          </a:p>
+          <a:p>
+            <a:pPr>
+              <a:spcAft>
+                <a:spcPts val="1400"/>
+              </a:spcAft>
+            </a:pPr>
+            <a:r>
+              <a:rPr sz="2400">
+                <a:solidFill>
+                  <a:srgbClr val="1F2A37"/>
+                </a:solidFill>
+              </a:rPr>
+              <a:t>• B. text area</a:t>
+            </a:r>
+          </a:p>
+          <a:p>
+            <a:pPr>
+              <a:spcAft>
+                <a:spcPts val="1400"/>
+              </a:spcAft>
+            </a:pPr>
+            <a:r>
+              <a:rPr sz="2400">
+                <a:solidFill>
+                  <a:srgbClr val="1F2A37"/>
+                </a:solidFill>
+              </a:rPr>
+              <a:t>• C. button</a:t>
+            </a:r>
+          </a:p>
+          <a:p>
+            <a:pPr>
+              <a:spcAft>
+                <a:spcPts val="1400"/>
+              </a:spcAft>
+            </a:pPr>
+            <a:r>
+              <a:rPr sz="2400">
+                <a:solidFill>
+                  <a:srgbClr val="1F2A37"/>
+                </a:solidFill>
+              </a:rPr>
+              <a:t>• D. label</a:t>
+            </a:r>
+          </a:p>
+          <a:p>
+            <a:pPr>
+              <a:spcAft>
+                <a:spcPts val="1400"/>
+              </a:spcAft>
+            </a:pPr>
+            <a:r>
+              <a:rPr sz="2400">
+                <a:solidFill>
+                  <a:srgbClr val="1F2A37"/>
+                </a:solidFill>
+              </a:rPr>
+              <a:t>• Pick one - the answer is on the next slide.</a:t>
+            </a:r>
+          </a:p>
+        </p:txBody>
+      </p:sp>
+    </p:spTree>
+  </p:cSld>
+  <p:clrMapOvr>
+    <a:masterClrMapping/>
+  </p:clrMapOvr>
+</p:sld>
+</file>
+
+<file path=ppt/slides/slide48.xml><?xml version="1.0" encoding="utf-8"?>
+<p:sld xmlns:a="http://schemas.openxmlformats.org/drawingml/2006/main" xmlns:p="http://schemas.openxmlformats.org/presentationml/2006/main" xmlns:r="http://schemas.openxmlformats.org/officeDocument/2006/relationships">
+  <p:cSld>
+    <p:spTree>
+      <p:nvGrpSpPr>
+        <p:cNvPr id="1" name=""/>
+        <p:cNvGrpSpPr/>
+        <p:nvPr/>
+      </p:nvGrpSpPr>
+      <p:grpSpPr/>
+      <p:sp>
+        <p:nvSpPr>
+          <p:cNvPr id="2" name="Title 1"/>
+          <p:cNvSpPr>
+            <a:spLocks noGrp="1"/>
+          </p:cNvSpPr>
+          <p:nvPr>
+            <p:ph type="title"/>
+          </p:nvPr>
+        </p:nvSpPr>
+        <p:spPr/>
+        <p:txBody>
+          <a:bodyPr/>
+          <a:lstStyle/>
+          <a:p>
+            <a:r>
+              <a:rPr sz="3800" b="1">
+                <a:solidFill>
+                  <a:srgbClr val="1F2A37"/>
+                </a:solidFill>
+              </a:rPr>
+              <a:t>&lt;select&gt; builds a...? (from week 9)</a:t>
+            </a:r>
+          </a:p>
+        </p:txBody>
+      </p:sp>
+      <p:sp>
+        <p:nvSpPr>
+          <p:cNvPr id="3" name="TextBox 2"/>
+          <p:cNvSpPr txBox="1"/>
+          <p:nvPr/>
+        </p:nvSpPr>
+        <p:spPr>
+          <a:xfrm>
+            <a:off x="868680" y="502920"/>
+            <a:ext cx="5486400" cy="457200"/>
+          </a:xfrm>
+          <a:prstGeom prst="rect">
+            <a:avLst/>
+          </a:prstGeom>
+          <a:noFill/>
+        </p:spPr>
+        <p:txBody>
+          <a:bodyPr wrap="none">
+            <a:spAutoFit/>
+          </a:bodyPr>
+          <a:lstStyle/>
+          <a:p>
+            <a:r>
+              <a:rPr sz="1500" b="1">
+                <a:solidFill>
+                  <a:srgbClr val="01AEFD"/>
+                </a:solidFill>
+              </a:rPr>
+              <a:t>ANSWER</a:t>
+            </a:r>
+          </a:p>
+        </p:txBody>
+      </p:sp>
+      <p:sp>
+        <p:nvSpPr>
+          <p:cNvPr id="4" name="TextBox 3"/>
+          <p:cNvSpPr txBox="1"/>
+          <p:nvPr/>
+        </p:nvSpPr>
+        <p:spPr>
+          <a:xfrm>
+            <a:off x="822960" y="1828800"/>
+            <a:ext cx="10515600" cy="4206240"/>
+          </a:xfrm>
+          <a:prstGeom prst="rect">
+            <a:avLst/>
+          </a:prstGeom>
+          <a:noFill/>
+        </p:spPr>
+        <p:txBody>
+          <a:bodyPr wrap="square">
+            <a:spAutoFit/>
+          </a:bodyPr>
+          <a:lstStyle/>
+          <a:p>
+            <a:pPr>
+              <a:spcAft>
+                <a:spcPts val="1400"/>
+              </a:spcAft>
+            </a:pPr>
+            <a:r>
+              <a:rPr sz="2400">
+                <a:solidFill>
+                  <a:srgbClr val="1F2A37"/>
+                </a:solidFill>
+              </a:rPr>
+              <a:t>• A. dropdown menu (correct)</a:t>
+            </a:r>
+          </a:p>
+          <a:p>
+            <a:pPr>
+              <a:spcAft>
+                <a:spcPts val="1400"/>
+              </a:spcAft>
+            </a:pPr>
+            <a:r>
+              <a:rPr sz="2400">
+                <a:solidFill>
+                  <a:srgbClr val="1F2A37"/>
+                </a:solidFill>
+              </a:rPr>
+              <a:t>• B. text area</a:t>
+            </a:r>
+          </a:p>
+          <a:p>
+            <a:pPr>
+              <a:spcAft>
+                <a:spcPts val="1400"/>
+              </a:spcAft>
+            </a:pPr>
+            <a:r>
+              <a:rPr sz="2400">
+                <a:solidFill>
+                  <a:srgbClr val="1F2A37"/>
+                </a:solidFill>
+              </a:rPr>
+              <a:t>• C. button</a:t>
+            </a:r>
+          </a:p>
+          <a:p>
+            <a:pPr>
+              <a:spcAft>
+                <a:spcPts val="1400"/>
+              </a:spcAft>
+            </a:pPr>
+            <a:r>
+              <a:rPr sz="2400">
+                <a:solidFill>
+                  <a:srgbClr val="1F2A37"/>
+                </a:solidFill>
+              </a:rPr>
+              <a:t>• D. label</a:t>
+            </a:r>
+          </a:p>
+          <a:p>
+            <a:pPr>
+              <a:spcAft>
+                <a:spcPts val="1400"/>
+              </a:spcAft>
+            </a:pPr>
+            <a:r>
+              <a:rPr sz="2400">
+                <a:solidFill>
+                  <a:srgbClr val="1F2A37"/>
+                </a:solidFill>
+              </a:rPr>
+              <a:t>• select + option make a dropdown menu.</a:t>
+            </a:r>
+          </a:p>
+        </p:txBody>
+      </p:sp>
+    </p:spTree>
+  </p:cSld>
+  <p:clrMapOvr>
+    <a:masterClrMapping/>
+  </p:clrMapOvr>
+</p:sld>
+</file>
+
+<file path=ppt/slides/slide49.xml><?xml version="1.0" encoding="utf-8"?>
+<p:sld xmlns:a="http://schemas.openxmlformats.org/drawingml/2006/main" xmlns:p="http://schemas.openxmlformats.org/presentationml/2006/main" xmlns:r="http://schemas.openxmlformats.org/officeDocument/2006/relationships">
+  <p:cSld>
+    <p:spTree>
+      <p:nvGrpSpPr>
+        <p:cNvPr id="1" name=""/>
+        <p:cNvGrpSpPr/>
+        <p:nvPr/>
+      </p:nvGrpSpPr>
+      <p:grpSpPr/>
+      <p:sp>
+        <p:nvSpPr>
+          <p:cNvPr id="2" name="Title 1"/>
+          <p:cNvSpPr>
+            <a:spLocks noGrp="1"/>
+          </p:cNvSpPr>
+          <p:nvPr>
+            <p:ph type="title"/>
+          </p:nvPr>
+        </p:nvSpPr>
+        <p:spPr/>
+        <p:txBody>
+          <a:bodyPr/>
+          <a:lstStyle/>
+          <a:p>
+            <a:r>
+              <a:rPr sz="3800" b="1">
+                <a:solidFill>
+                  <a:srgbClr val="1F2A37"/>
+                </a:solidFill>
+              </a:rPr>
+              <a:t>Checkpoint: it streams (quietly)</a:t>
+            </a:r>
+          </a:p>
+        </p:txBody>
+      </p:sp>
+      <p:sp>
+        <p:nvSpPr>
+          <p:cNvPr id="3" name="TextBox 2"/>
+          <p:cNvSpPr txBox="1"/>
+          <p:nvPr/>
+        </p:nvSpPr>
+        <p:spPr>
+          <a:xfrm>
+            <a:off x="868680" y="502920"/>
+            <a:ext cx="5486400" cy="457200"/>
+          </a:xfrm>
+          <a:prstGeom prst="rect">
+            <a:avLst/>
+          </a:prstGeom>
+          <a:noFill/>
+        </p:spPr>
+        <p:txBody>
+          <a:bodyPr wrap="none">
+            <a:spAutoFit/>
+          </a:bodyPr>
+          <a:lstStyle/>
+          <a:p>
+            <a:r>
+              <a:rPr sz="1500" b="1">
+                <a:solidFill>
+                  <a:srgbClr val="01AEFD"/>
+                </a:solidFill>
+              </a:rPr>
+              <a:t>CHECKPOINT - RUN IT</a:t>
+            </a:r>
+          </a:p>
+        </p:txBody>
+      </p:sp>
+      <p:sp>
+        <p:nvSpPr>
+          <p:cNvPr id="4" name="TextBox 3"/>
+          <p:cNvSpPr txBox="1"/>
+          <p:nvPr/>
+        </p:nvSpPr>
+        <p:spPr>
+          <a:xfrm>
+            <a:off x="822960" y="1828800"/>
+            <a:ext cx="10515600" cy="4206240"/>
+          </a:xfrm>
+          <a:prstGeom prst="rect">
+            <a:avLst/>
+          </a:prstGeom>
+          <a:noFill/>
+        </p:spPr>
+        <p:txBody>
+          <a:bodyPr wrap="square">
+            <a:spAutoFit/>
+          </a:bodyPr>
+          <a:lstStyle/>
+          <a:p>
+            <a:pPr>
+              <a:spcAft>
+                <a:spcPts val="1400"/>
+              </a:spcAft>
+            </a:pPr>
+            <a:r>
               <a:rPr sz="2800">
                 <a:solidFill>
                   <a:srgbClr val="01AEFD"/>
                 </a:solidFill>
               </a:rPr>
-              <a:t>It looks identical</a:t>
+              <a:t>Press Run and send a question. It should still reply exactly as before - the change is invisible ON PURPOSE. Open the console: the request now says stream: true and the reply arrives in pieces. Next week you make those pieces show as they land.</a:t>
             </a:r>
           </a:p>
           <a:p>
@@ -21180,7 +22476,22 @@
                   <a:srgbClr val="1F2A37"/>
                 </a:solidFill>
               </a:rPr>
-              <a:t>• Next week it pays off</a:t>
+              <a:t>• Run it in the classroom, or press Show the output in the web deck.</a:t>
+            </a:r>
+          </a:p>
+          <a:p>
+            <a:pPr>
+              <a:spcAft>
+                <a:spcPts val="1400"/>
+              </a:spcAft>
+            </a:pPr>
+            <a:r>
+              <a:rPr sz="2400">
+                <a:solidFill>
+                  <a:srgbClr val="1F2A37"/>
+                </a:solidFill>
+              </a:rPr>
+              <a:t>• Everyone's screen should match this.</a:t>
             </a:r>
           </a:p>
         </p:txBody>
@@ -21671,6 +22982,103 @@
                 </a:solidFill>
               </a:rPr>
               <a:t>Ask the server to STREAM: send the answer in pieces as it is written, not all at the end.</a:t>
+            </a:r>
+          </a:p>
+        </p:txBody>
+      </p:sp>
+    </p:spTree>
+  </p:cSld>
+  <p:clrMapOvr>
+    <a:masterClrMapping/>
+  </p:clrMapOvr>
+</p:sld>
+</file>
+
+<file path=ppt/slides/slide50.xml><?xml version="1.0" encoding="utf-8"?>
+<p:sld xmlns:a="http://schemas.openxmlformats.org/drawingml/2006/main" xmlns:p="http://schemas.openxmlformats.org/presentationml/2006/main" xmlns:r="http://schemas.openxmlformats.org/officeDocument/2006/relationships">
+  <p:cSld>
+    <p:spTree>
+      <p:nvGrpSpPr>
+        <p:cNvPr id="1" name=""/>
+        <p:cNvGrpSpPr/>
+        <p:nvPr/>
+      </p:nvGrpSpPr>
+      <p:grpSpPr/>
+      <p:sp>
+        <p:nvSpPr>
+          <p:cNvPr id="2" name="Title 1"/>
+          <p:cNvSpPr>
+            <a:spLocks noGrp="1"/>
+          </p:cNvSpPr>
+          <p:nvPr>
+            <p:ph type="title"/>
+          </p:nvPr>
+        </p:nvSpPr>
+        <p:spPr/>
+        <p:txBody>
+          <a:bodyPr/>
+          <a:lstStyle/>
+          <a:p>
+            <a:r>
+              <a:rPr sz="3800" b="1">
+                <a:solidFill>
+                  <a:srgbClr val="1F2A37"/>
+                </a:solidFill>
+              </a:rPr>
+              <a:t>Today was plumbing</a:t>
+            </a:r>
+          </a:p>
+        </p:txBody>
+      </p:sp>
+      <p:sp>
+        <p:nvSpPr>
+          <p:cNvPr id="3" name="TextBox 2"/>
+          <p:cNvSpPr txBox="1"/>
+          <p:nvPr/>
+        </p:nvSpPr>
+        <p:spPr>
+          <a:xfrm>
+            <a:off x="822960" y="1828800"/>
+            <a:ext cx="10515600" cy="4206240"/>
+          </a:xfrm>
+          <a:prstGeom prst="rect">
+            <a:avLst/>
+          </a:prstGeom>
+          <a:noFill/>
+        </p:spPr>
+        <p:txBody>
+          <a:bodyPr wrap="square">
+            <a:spAutoFit/>
+          </a:bodyPr>
+          <a:lstStyle/>
+          <a:p>
+            <a:pPr>
+              <a:spcAft>
+                <a:spcPts val="1400"/>
+              </a:spcAft>
+            </a:pPr>
+            <a:r>
+              <a:rPr sz="2800">
+                <a:solidFill>
+                  <a:srgbClr val="01AEFD"/>
+                </a:solidFill>
+              </a:rPr>
+              <a:t>It looks identical</a:t>
+            </a:r>
+          </a:p>
+          <a:p>
+            <a:pPr>
+              <a:spcAft>
+                <a:spcPts val="1400"/>
+              </a:spcAft>
+            </a:pPr>
+            <a:r>
+              <a:rPr sz="2400">
+                <a:solidFill>
+                  <a:srgbClr val="1F2A37"/>
+                </a:solidFill>
+              </a:rPr>
+              <a:t>• Next week it pays off</a:t>
             </a:r>
           </a:p>
         </p:txBody>

--- a/ai101/slides/week-10.pptx
+++ b/ai101/slides/week-10.pptx
@@ -54,7 +54,6 @@
     <p:sldId id="302" r:id="rId53"/>
     <p:sldId id="303" r:id="rId54"/>
     <p:sldId id="304" r:id="rId55"/>
-    <p:sldId id="305" r:id="rId56"/>
   </p:sldIdLst>
   <p:sldSz cx="12191695" cy="6858000" type="screen4x3"/>
   <p:notesSz cx="6858000" cy="9144000"/>
@@ -3240,7 +3239,7 @@
                   <a:srgbClr val="1F2A37"/>
                 </a:solidFill>
               </a:rPr>
-              <a:t>What a stream looks like</a:t>
+              <a:t>Pieces get cut in half</a:t>
             </a:r>
           </a:p>
         </p:txBody>
@@ -3273,12 +3272,27 @@
               </a:spcAft>
             </a:pPr>
             <a:r>
+              <a:rPr sz="2800">
+                <a:solidFill>
+                  <a:srgbClr val="01AEFD"/>
+                </a:solidFill>
+              </a:rPr>
+              <a:t>That is what the buffer is for</a:t>
+            </a:r>
+          </a:p>
+          <a:p>
+            <a:pPr>
+              <a:spcAft>
+                <a:spcPts val="1400"/>
+              </a:spcAft>
+            </a:pPr>
+            <a:r>
               <a:rPr sz="2400">
                 <a:solidFill>
                   <a:srgbClr val="1F2A37"/>
                 </a:solidFill>
               </a:rPr>
-              <a:t>• data: {"choices":[{"delta":{"content":"Hel"}}]}</a:t>
+              <a:t>• Keep the unfinished piece</a:t>
             </a:r>
           </a:p>
           <a:p>
@@ -3293,7 +3307,7 @@
                   <a:srgbClr val="1F2A37"/>
                 </a:solidFill>
               </a:rPr>
-              <a:t>• data: {"choices":[{"delta":{"content":"lo"}}]}</a:t>
+              <a:t>• Wait for the rest</a:t>
             </a:r>
           </a:p>
           <a:p>
@@ -3308,7 +3322,7 @@
                   <a:srgbClr val="1F2A37"/>
                 </a:solidFill>
               </a:rPr>
-              <a:t>• data: [DONE]</a:t>
+              <a:t>• Then read it</a:t>
             </a:r>
           </a:p>
         </p:txBody>
@@ -3324,6 +3338,14 @@
 <file path=ppt/slides/slide11.xml><?xml version="1.0" encoding="utf-8"?>
 <p:sld xmlns:a="http://schemas.openxmlformats.org/drawingml/2006/main" xmlns:p="http://schemas.openxmlformats.org/presentationml/2006/main" xmlns:r="http://schemas.openxmlformats.org/officeDocument/2006/relationships">
   <p:cSld>
+    <p:bg>
+      <p:bgPr>
+        <a:solidFill>
+          <a:srgbClr val="102127"/>
+        </a:solidFill>
+        <a:effectLst/>
+      </p:bgPr>
+    </p:bg>
     <p:spTree>
       <p:nvGrpSpPr>
         <p:cNvPr id="1" name=""/>
@@ -3333,26 +3355,33 @@
       <p:grpSpPr/>
       <p:sp>
         <p:nvSpPr>
-          <p:cNvPr id="2" name="Title 1"/>
-          <p:cNvSpPr>
-            <a:spLocks noGrp="1"/>
-          </p:cNvSpPr>
-          <p:nvPr>
-            <p:ph type="title"/>
-          </p:nvPr>
+          <p:cNvPr id="2" name="TextBox 1"/>
+          <p:cNvSpPr txBox="1"/>
+          <p:nvPr/>
         </p:nvSpPr>
-        <p:spPr/>
+        <p:spPr>
+          <a:xfrm>
+            <a:off x="502920" y="274320"/>
+            <a:ext cx="11155680" cy="548640"/>
+          </a:xfrm>
+          <a:prstGeom prst="rect">
+            <a:avLst/>
+          </a:prstGeom>
+          <a:noFill/>
+        </p:spPr>
         <p:txBody>
-          <a:bodyPr/>
+          <a:bodyPr wrap="none">
+            <a:spAutoFit/>
+          </a:bodyPr>
           <a:lstStyle/>
           <a:p>
             <a:r>
-              <a:rPr sz="3800" b="1">
-                <a:solidFill>
-                  <a:srgbClr val="1F2A37"/>
-                </a:solidFill>
-              </a:rPr>
-              <a:t>Pieces get cut in half</a:t>
+              <a:rPr sz="2200" b="1">
+                <a:solidFill>
+                  <a:srgbClr val="01AEFD"/>
+                </a:solidFill>
+              </a:rPr>
+              <a:t>Type this into script.js   -   line 86</a:t>
             </a:r>
           </a:p>
         </p:txBody>
@@ -3365,8 +3394,231 @@
         </p:nvSpPr>
         <p:spPr>
           <a:xfrm>
-            <a:off x="822960" y="1828800"/>
-            <a:ext cx="10515600" cy="4206240"/>
+            <a:off x="502920" y="960120"/>
+            <a:ext cx="11155680" cy="4297680"/>
+          </a:xfrm>
+          <a:prstGeom prst="rect">
+            <a:avLst/>
+          </a:prstGeom>
+          <a:noFill/>
+        </p:spPr>
+        <p:txBody>
+          <a:bodyPr wrap="none">
+            <a:spAutoFit/>
+          </a:bodyPr>
+          <a:lstStyle/>
+          <a:p>
+            <a:pPr>
+              <a:spcAft>
+                <a:spcPts val="0"/>
+              </a:spcAft>
+            </a:pPr>
+            <a:r>
+              <a:rPr sz="1800">
+                <a:solidFill>
+                  <a:srgbClr val="6D8C97"/>
+                </a:solidFill>
+                <a:latin typeface="Consolas"/>
+              </a:rPr>
+              <a:t>  79  </a:t>
+            </a:r>
+            <a:r>
+              <a:rPr sz="1800">
+                <a:solidFill>
+                  <a:srgbClr val="6D8C97"/>
+                </a:solidFill>
+                <a:latin typeface="Consolas"/>
+              </a:rPr>
+              <a:t> </a:t>
+            </a:r>
+          </a:p>
+          <a:p>
+            <a:pPr>
+              <a:spcAft>
+                <a:spcPts val="0"/>
+              </a:spcAft>
+            </a:pPr>
+            <a:r>
+              <a:rPr sz="1800">
+                <a:solidFill>
+                  <a:srgbClr val="6D8C97"/>
+                </a:solidFill>
+                <a:latin typeface="Consolas"/>
+              </a:rPr>
+              <a:t>  80  </a:t>
+            </a:r>
+            <a:r>
+              <a:rPr sz="1800">
+                <a:solidFill>
+                  <a:srgbClr val="6D8C97"/>
+                </a:solidFill>
+                <a:latin typeface="Consolas"/>
+              </a:rPr>
+              <a:t>// Week 10: with stream:true the answer arrives in pieces while it is still</a:t>
+            </a:r>
+          </a:p>
+          <a:p>
+            <a:pPr>
+              <a:spcAft>
+                <a:spcPts val="0"/>
+              </a:spcAft>
+            </a:pPr>
+            <a:r>
+              <a:rPr sz="1800">
+                <a:solidFill>
+                  <a:srgbClr val="6D8C97"/>
+                </a:solidFill>
+                <a:latin typeface="Consolas"/>
+              </a:rPr>
+              <a:t>  81  </a:t>
+            </a:r>
+            <a:r>
+              <a:rPr sz="1800">
+                <a:solidFill>
+                  <a:srgbClr val="6D8C97"/>
+                </a:solidFill>
+                <a:latin typeface="Consolas"/>
+              </a:rPr>
+              <a:t>// being written. Same words, same total time - they just start sooner.</a:t>
+            </a:r>
+          </a:p>
+          <a:p>
+            <a:pPr>
+              <a:spcAft>
+                <a:spcPts val="0"/>
+              </a:spcAft>
+            </a:pPr>
+            <a:r>
+              <a:rPr sz="1800">
+                <a:solidFill>
+                  <a:srgbClr val="6D8C97"/>
+                </a:solidFill>
+                <a:latin typeface="Consolas"/>
+              </a:rPr>
+              <a:t>  82  </a:t>
+            </a:r>
+            <a:r>
+              <a:rPr sz="1800">
+                <a:solidFill>
+                  <a:srgbClr val="6D8C97"/>
+                </a:solidFill>
+                <a:latin typeface="Consolas"/>
+              </a:rPr>
+              <a:t>//</a:t>
+            </a:r>
+          </a:p>
+          <a:p>
+            <a:pPr>
+              <a:spcAft>
+                <a:spcPts val="0"/>
+              </a:spcAft>
+            </a:pPr>
+            <a:r>
+              <a:rPr sz="1800">
+                <a:solidFill>
+                  <a:srgbClr val="6D8C97"/>
+                </a:solidFill>
+                <a:latin typeface="Consolas"/>
+              </a:rPr>
+              <a:t>  83  </a:t>
+            </a:r>
+            <a:r>
+              <a:rPr sz="1800">
+                <a:solidFill>
+                  <a:srgbClr val="6D8C97"/>
+                </a:solidFill>
+                <a:latin typeface="Consolas"/>
+              </a:rPr>
+              <a:t>// The pieces look like this, one per line:</a:t>
+            </a:r>
+          </a:p>
+          <a:p>
+            <a:pPr>
+              <a:spcAft>
+                <a:spcPts val="0"/>
+              </a:spcAft>
+            </a:pPr>
+            <a:r>
+              <a:rPr sz="1800">
+                <a:solidFill>
+                  <a:srgbClr val="6D8C97"/>
+                </a:solidFill>
+                <a:latin typeface="Consolas"/>
+              </a:rPr>
+              <a:t>  84  </a:t>
+            </a:r>
+            <a:r>
+              <a:rPr sz="1800">
+                <a:solidFill>
+                  <a:srgbClr val="6D8C97"/>
+                </a:solidFill>
+                <a:latin typeface="Consolas"/>
+              </a:rPr>
+              <a:t>//   data: {"choices":[{"delta":{"content":"Hel"}}]}</a:t>
+            </a:r>
+          </a:p>
+          <a:p>
+            <a:pPr>
+              <a:spcAft>
+                <a:spcPts val="0"/>
+              </a:spcAft>
+            </a:pPr>
+            <a:r>
+              <a:rPr sz="1800">
+                <a:solidFill>
+                  <a:srgbClr val="6D8C97"/>
+                </a:solidFill>
+                <a:latin typeface="Consolas"/>
+              </a:rPr>
+              <a:t>  85  </a:t>
+            </a:r>
+            <a:r>
+              <a:rPr sz="1800">
+                <a:solidFill>
+                  <a:srgbClr val="6D8C97"/>
+                </a:solidFill>
+                <a:latin typeface="Consolas"/>
+              </a:rPr>
+              <a:t>//   data: [DONE]</a:t>
+            </a:r>
+          </a:p>
+          <a:p>
+            <a:pPr>
+              <a:spcAft>
+                <a:spcPts val="0"/>
+              </a:spcAft>
+            </a:pPr>
+            <a:r>
+              <a:rPr sz="1800">
+                <a:solidFill>
+                  <a:srgbClr val="6D8C97"/>
+                </a:solidFill>
+                <a:latin typeface="Consolas"/>
+              </a:rPr>
+              <a:t>  86  </a:t>
+            </a:r>
+            <a:r>
+              <a:rPr sz="1800">
+                <a:solidFill>
+                  <a:srgbClr val="7FE0A0"/>
+                </a:solidFill>
+                <a:latin typeface="Consolas"/>
+              </a:rPr>
+              <a:t>async function readStream(res) {</a:t>
+            </a:r>
+          </a:p>
+        </p:txBody>
+      </p:sp>
+      <p:sp>
+        <p:nvSpPr>
+          <p:cNvPr id="4" name="TextBox 3"/>
+          <p:cNvSpPr txBox="1"/>
+          <p:nvPr/>
+        </p:nvSpPr>
+        <p:spPr>
+          <a:xfrm>
+            <a:off x="548640" y="5623560"/>
+            <a:ext cx="11064240" cy="1051560"/>
           </a:xfrm>
           <a:prstGeom prst="rect">
             <a:avLst/>
@@ -3379,63 +3631,13 @@
           </a:bodyPr>
           <a:lstStyle/>
           <a:p>
-            <a:pPr>
-              <a:spcAft>
-                <a:spcPts val="1400"/>
-              </a:spcAft>
-            </a:pPr>
-            <a:r>
-              <a:rPr sz="2800">
-                <a:solidFill>
-                  <a:srgbClr val="01AEFD"/>
-                </a:solidFill>
-              </a:rPr>
-              <a:t>That is what the buffer is for</a:t>
-            </a:r>
-          </a:p>
-          <a:p>
-            <a:pPr>
-              <a:spcAft>
-                <a:spcPts val="1400"/>
-              </a:spcAft>
-            </a:pPr>
-            <a:r>
-              <a:rPr sz="2400">
-                <a:solidFill>
-                  <a:srgbClr val="1F2A37"/>
-                </a:solidFill>
-              </a:rPr>
-              <a:t>• Keep the unfinished piece</a:t>
-            </a:r>
-          </a:p>
-          <a:p>
-            <a:pPr>
-              <a:spcAft>
-                <a:spcPts val="1400"/>
-              </a:spcAft>
-            </a:pPr>
-            <a:r>
-              <a:rPr sz="2400">
-                <a:solidFill>
-                  <a:srgbClr val="1F2A37"/>
-                </a:solidFill>
-              </a:rPr>
-              <a:t>• Wait for the rest</a:t>
-            </a:r>
-          </a:p>
-          <a:p>
-            <a:pPr>
-              <a:spcAft>
-                <a:spcPts val="1400"/>
-              </a:spcAft>
-            </a:pPr>
-            <a:r>
-              <a:rPr sz="2400">
-                <a:solidFill>
-                  <a:srgbClr val="1F2A37"/>
-                </a:solidFill>
-              </a:rPr>
-              <a:t>• Then read it</a:t>
+            <a:r>
+              <a:rPr sz="2000">
+                <a:solidFill>
+                  <a:srgbClr val="DCECEF"/>
+                </a:solidFill>
+              </a:rPr>
+              <a:t>A new function that reads the streaming reply piece by piece.</a:t>
             </a:r>
           </a:p>
         </p:txBody>
@@ -3494,7 +3696,7 @@
                   <a:srgbClr val="01AEFD"/>
                 </a:solidFill>
               </a:rPr>
-              <a:t>Type this into script.js   -   line 86</a:t>
+              <a:t>Type this into script.js   -   line 87</a:t>
             </a:r>
           </a:p>
         </p:txBody>
@@ -3713,11 +3915,36 @@
             <a:r>
               <a:rPr sz="1800">
                 <a:solidFill>
+                  <a:srgbClr val="6D8C97"/>
+                </a:solidFill>
+                <a:latin typeface="Consolas"/>
+              </a:rPr>
+              <a:t>async function readStream(res) {</a:t>
+            </a:r>
+          </a:p>
+          <a:p>
+            <a:pPr>
+              <a:spcAft>
+                <a:spcPts val="0"/>
+              </a:spcAft>
+            </a:pPr>
+            <a:r>
+              <a:rPr sz="1800">
+                <a:solidFill>
+                  <a:srgbClr val="6D8C97"/>
+                </a:solidFill>
+                <a:latin typeface="Consolas"/>
+              </a:rPr>
+              <a:t>  87  </a:t>
+            </a:r>
+            <a:r>
+              <a:rPr sz="1800">
+                <a:solidFill>
                   <a:srgbClr val="7FE0A0"/>
                 </a:solidFill>
                 <a:latin typeface="Consolas"/>
               </a:rPr>
-              <a:t>async function readStream(res) {</a:t>
+              <a:t>  const reader = res.body.getReader();</a:t>
             </a:r>
           </a:p>
         </p:txBody>
@@ -3750,7 +3977,7 @@
                   <a:srgbClr val="DCECEF"/>
                 </a:solidFill>
               </a:rPr>
-              <a:t>A new function that reads the streaming reply piece by piece.</a:t>
+              <a:t>getReader() gives us a reader that hands over the body one chunk at a time.</a:t>
             </a:r>
           </a:p>
         </p:txBody>
@@ -3809,7 +4036,7 @@
                   <a:srgbClr val="01AEFD"/>
                 </a:solidFill>
               </a:rPr>
-              <a:t>Type this into script.js   -   line 87</a:t>
+              <a:t>Type this into script.js   -   line 88</a:t>
             </a:r>
           </a:p>
         </p:txBody>
@@ -4053,11 +4280,36 @@
             <a:r>
               <a:rPr sz="1800">
                 <a:solidFill>
+                  <a:srgbClr val="6D8C97"/>
+                </a:solidFill>
+                <a:latin typeface="Consolas"/>
+              </a:rPr>
+              <a:t>  const reader = res.body.getReader();</a:t>
+            </a:r>
+          </a:p>
+          <a:p>
+            <a:pPr>
+              <a:spcAft>
+                <a:spcPts val="0"/>
+              </a:spcAft>
+            </a:pPr>
+            <a:r>
+              <a:rPr sz="1800">
+                <a:solidFill>
+                  <a:srgbClr val="6D8C97"/>
+                </a:solidFill>
+                <a:latin typeface="Consolas"/>
+              </a:rPr>
+              <a:t>  88  </a:t>
+            </a:r>
+            <a:r>
+              <a:rPr sz="1800">
+                <a:solidFill>
                   <a:srgbClr val="7FE0A0"/>
                 </a:solidFill>
                 <a:latin typeface="Consolas"/>
               </a:rPr>
-              <a:t>  const reader = res.body.getReader();</a:t>
+              <a:t>  const decoder = new TextDecoder();</a:t>
             </a:r>
           </a:p>
         </p:txBody>
@@ -4090,7 +4342,7 @@
                   <a:srgbClr val="DCECEF"/>
                 </a:solidFill>
               </a:rPr>
-              <a:t>getReader() gives us a reader that hands over the body one chunk at a time.</a:t>
+              <a:t>A TextDecoder turns the raw bytes of each chunk into text.</a:t>
             </a:r>
           </a:p>
         </p:txBody>
@@ -4149,7 +4401,7 @@
                   <a:srgbClr val="01AEFD"/>
                 </a:solidFill>
               </a:rPr>
-              <a:t>Type this into script.js   -   line 88</a:t>
+              <a:t>Type this into script.js   -   line 89</a:t>
             </a:r>
           </a:p>
         </p:txBody>
@@ -4182,7 +4434,7 @@
               </a:spcAft>
             </a:pPr>
             <a:r>
-              <a:rPr sz="1800">
+              <a:rPr sz="1300">
                 <a:solidFill>
                   <a:srgbClr val="6D8C97"/>
                 </a:solidFill>
@@ -4191,7 +4443,7 @@
               <a:t>  79  </a:t>
             </a:r>
             <a:r>
-              <a:rPr sz="1800">
+              <a:rPr sz="1300">
                 <a:solidFill>
                   <a:srgbClr val="6D8C97"/>
                 </a:solidFill>
@@ -4207,7 +4459,7 @@
               </a:spcAft>
             </a:pPr>
             <a:r>
-              <a:rPr sz="1800">
+              <a:rPr sz="1300">
                 <a:solidFill>
                   <a:srgbClr val="6D8C97"/>
                 </a:solidFill>
@@ -4216,7 +4468,7 @@
               <a:t>  80  </a:t>
             </a:r>
             <a:r>
-              <a:rPr sz="1800">
+              <a:rPr sz="1300">
                 <a:solidFill>
                   <a:srgbClr val="6D8C97"/>
                 </a:solidFill>
@@ -4232,7 +4484,7 @@
               </a:spcAft>
             </a:pPr>
             <a:r>
-              <a:rPr sz="1800">
+              <a:rPr sz="1300">
                 <a:solidFill>
                   <a:srgbClr val="6D8C97"/>
                 </a:solidFill>
@@ -4241,7 +4493,7 @@
               <a:t>  81  </a:t>
             </a:r>
             <a:r>
-              <a:rPr sz="1800">
+              <a:rPr sz="1300">
                 <a:solidFill>
                   <a:srgbClr val="6D8C97"/>
                 </a:solidFill>
@@ -4257,7 +4509,7 @@
               </a:spcAft>
             </a:pPr>
             <a:r>
-              <a:rPr sz="1800">
+              <a:rPr sz="1300">
                 <a:solidFill>
                   <a:srgbClr val="6D8C97"/>
                 </a:solidFill>
@@ -4266,7 +4518,7 @@
               <a:t>  82  </a:t>
             </a:r>
             <a:r>
-              <a:rPr sz="1800">
+              <a:rPr sz="1300">
                 <a:solidFill>
                   <a:srgbClr val="6D8C97"/>
                 </a:solidFill>
@@ -4282,7 +4534,7 @@
               </a:spcAft>
             </a:pPr>
             <a:r>
-              <a:rPr sz="1800">
+              <a:rPr sz="1300">
                 <a:solidFill>
                   <a:srgbClr val="6D8C97"/>
                 </a:solidFill>
@@ -4291,7 +4543,7 @@
               <a:t>  83  </a:t>
             </a:r>
             <a:r>
-              <a:rPr sz="1800">
+              <a:rPr sz="1300">
                 <a:solidFill>
                   <a:srgbClr val="6D8C97"/>
                 </a:solidFill>
@@ -4307,7 +4559,7 @@
               </a:spcAft>
             </a:pPr>
             <a:r>
-              <a:rPr sz="1800">
+              <a:rPr sz="1300">
                 <a:solidFill>
                   <a:srgbClr val="6D8C97"/>
                 </a:solidFill>
@@ -4316,7 +4568,7 @@
               <a:t>  84  </a:t>
             </a:r>
             <a:r>
-              <a:rPr sz="1800">
+              <a:rPr sz="1300">
                 <a:solidFill>
                   <a:srgbClr val="6D8C97"/>
                 </a:solidFill>
@@ -4332,7 +4584,7 @@
               </a:spcAft>
             </a:pPr>
             <a:r>
-              <a:rPr sz="1800">
+              <a:rPr sz="1300">
                 <a:solidFill>
                   <a:srgbClr val="6D8C97"/>
                 </a:solidFill>
@@ -4341,7 +4593,7 @@
               <a:t>  85  </a:t>
             </a:r>
             <a:r>
-              <a:rPr sz="1800">
+              <a:rPr sz="1300">
                 <a:solidFill>
                   <a:srgbClr val="6D8C97"/>
                 </a:solidFill>
@@ -4357,7 +4609,7 @@
               </a:spcAft>
             </a:pPr>
             <a:r>
-              <a:rPr sz="1800">
+              <a:rPr sz="1300">
                 <a:solidFill>
                   <a:srgbClr val="6D8C97"/>
                 </a:solidFill>
@@ -4366,7 +4618,7 @@
               <a:t>  86  </a:t>
             </a:r>
             <a:r>
-              <a:rPr sz="1800">
+              <a:rPr sz="1300">
                 <a:solidFill>
                   <a:srgbClr val="6D8C97"/>
                 </a:solidFill>
@@ -4382,7 +4634,7 @@
               </a:spcAft>
             </a:pPr>
             <a:r>
-              <a:rPr sz="1800">
+              <a:rPr sz="1300">
                 <a:solidFill>
                   <a:srgbClr val="6D8C97"/>
                 </a:solidFill>
@@ -4391,7 +4643,7 @@
               <a:t>  87  </a:t>
             </a:r>
             <a:r>
-              <a:rPr sz="1800">
+              <a:rPr sz="1300">
                 <a:solidFill>
                   <a:srgbClr val="6D8C97"/>
                 </a:solidFill>
@@ -4407,7 +4659,7 @@
               </a:spcAft>
             </a:pPr>
             <a:r>
-              <a:rPr sz="1800">
+              <a:rPr sz="1300">
                 <a:solidFill>
                   <a:srgbClr val="6D8C97"/>
                 </a:solidFill>
@@ -4416,13 +4668,38 @@
               <a:t>  88  </a:t>
             </a:r>
             <a:r>
-              <a:rPr sz="1800">
+              <a:rPr sz="1300">
+                <a:solidFill>
+                  <a:srgbClr val="6D8C97"/>
+                </a:solidFill>
+                <a:latin typeface="Consolas"/>
+              </a:rPr>
+              <a:t>  const decoder = new TextDecoder();</a:t>
+            </a:r>
+          </a:p>
+          <a:p>
+            <a:pPr>
+              <a:spcAft>
+                <a:spcPts val="0"/>
+              </a:spcAft>
+            </a:pPr>
+            <a:r>
+              <a:rPr sz="1300">
+                <a:solidFill>
+                  <a:srgbClr val="6D8C97"/>
+                </a:solidFill>
+                <a:latin typeface="Consolas"/>
+              </a:rPr>
+              <a:t>  89  </a:t>
+            </a:r>
+            <a:r>
+              <a:rPr sz="1300">
                 <a:solidFill>
                   <a:srgbClr val="7FE0A0"/>
                 </a:solidFill>
                 <a:latin typeface="Consolas"/>
               </a:rPr>
-              <a:t>  const decoder = new TextDecoder();</a:t>
+              <a:t>  let buffer = '';       // a piece can be cut in half mid-arrival</a:t>
             </a:r>
           </a:p>
         </p:txBody>
@@ -4455,7 +4732,7 @@
                   <a:srgbClr val="DCECEF"/>
                 </a:solidFill>
               </a:rPr>
-              <a:t>A TextDecoder turns the raw bytes of each chunk into text.</a:t>
+              <a:t>A holding string: a piece can be cut in half between chunks. let, so it can change.</a:t>
             </a:r>
           </a:p>
         </p:txBody>
@@ -4514,7 +4791,7 @@
                   <a:srgbClr val="01AEFD"/>
                 </a:solidFill>
               </a:rPr>
-              <a:t>Type this into script.js   -   line 89</a:t>
+              <a:t>Type this into script.js   -   line 90</a:t>
             </a:r>
           </a:p>
         </p:txBody>
@@ -4808,11 +5085,36 @@
             <a:r>
               <a:rPr sz="1300">
                 <a:solidFill>
+                  <a:srgbClr val="6D8C97"/>
+                </a:solidFill>
+                <a:latin typeface="Consolas"/>
+              </a:rPr>
+              <a:t>  let buffer = '';       // a piece can be cut in half mid-arrival</a:t>
+            </a:r>
+          </a:p>
+          <a:p>
+            <a:pPr>
+              <a:spcAft>
+                <a:spcPts val="0"/>
+              </a:spcAft>
+            </a:pPr>
+            <a:r>
+              <a:rPr sz="1300">
+                <a:solidFill>
+                  <a:srgbClr val="6D8C97"/>
+                </a:solidFill>
+                <a:latin typeface="Consolas"/>
+              </a:rPr>
+              <a:t>  90  </a:t>
+            </a:r>
+            <a:r>
+              <a:rPr sz="1300">
+                <a:solidFill>
                   <a:srgbClr val="7FE0A0"/>
                 </a:solidFill>
                 <a:latin typeface="Consolas"/>
               </a:rPr>
-              <a:t>  let buffer = '';       // a piece can be cut in half mid-arrival</a:t>
+              <a:t>  let answer = '';</a:t>
             </a:r>
           </a:p>
         </p:txBody>
@@ -4845,7 +5147,7 @@
                   <a:srgbClr val="DCECEF"/>
                 </a:solidFill>
               </a:rPr>
-              <a:t>A holding string: a piece can be cut in half between chunks. let, so it can change.</a:t>
+              <a:t>The full answer, built up bit by bit.</a:t>
             </a:r>
           </a:p>
         </p:txBody>
@@ -4904,7 +5206,7 @@
                   <a:srgbClr val="01AEFD"/>
                 </a:solidFill>
               </a:rPr>
-              <a:t>Type this into script.js   -   line 90</a:t>
+              <a:t>Type this into script.js   -   line 92</a:t>
             </a:r>
           </a:p>
         </p:txBody>
@@ -5223,11 +5525,61 @@
             <a:r>
               <a:rPr sz="1300">
                 <a:solidFill>
+                  <a:srgbClr val="6D8C97"/>
+                </a:solidFill>
+                <a:latin typeface="Consolas"/>
+              </a:rPr>
+              <a:t>  let answer = '';</a:t>
+            </a:r>
+          </a:p>
+          <a:p>
+            <a:pPr>
+              <a:spcAft>
+                <a:spcPts val="0"/>
+              </a:spcAft>
+            </a:pPr>
+            <a:r>
+              <a:rPr sz="1300">
+                <a:solidFill>
+                  <a:srgbClr val="6D8C97"/>
+                </a:solidFill>
+                <a:latin typeface="Consolas"/>
+              </a:rPr>
+              <a:t>  91  </a:t>
+            </a:r>
+            <a:r>
+              <a:rPr sz="1300">
+                <a:solidFill>
+                  <a:srgbClr val="6D8C97"/>
+                </a:solidFill>
+                <a:latin typeface="Consolas"/>
+              </a:rPr>
+              <a:t> </a:t>
+            </a:r>
+          </a:p>
+          <a:p>
+            <a:pPr>
+              <a:spcAft>
+                <a:spcPts val="0"/>
+              </a:spcAft>
+            </a:pPr>
+            <a:r>
+              <a:rPr sz="1300">
+                <a:solidFill>
+                  <a:srgbClr val="6D8C97"/>
+                </a:solidFill>
+                <a:latin typeface="Consolas"/>
+              </a:rPr>
+              <a:t>  92  </a:t>
+            </a:r>
+            <a:r>
+              <a:rPr sz="1300">
+                <a:solidFill>
                   <a:srgbClr val="7FE0A0"/>
                 </a:solidFill>
                 <a:latin typeface="Consolas"/>
               </a:rPr>
-              <a:t>  let answer = '';</a:t>
+              <a:t>  while (true) {</a:t>
             </a:r>
           </a:p>
         </p:txBody>
@@ -5260,7 +5612,7 @@
                   <a:srgbClr val="DCECEF"/>
                 </a:solidFill>
               </a:rPr>
-              <a:t>The full answer, built up bit by bit.</a:t>
+              <a:t>Loop forever - we break out ourselves when the stream ends.</a:t>
             </a:r>
           </a:p>
         </p:txBody>
@@ -5319,7 +5671,7 @@
                   <a:srgbClr val="01AEFD"/>
                 </a:solidFill>
               </a:rPr>
-              <a:t>Type this into script.js   -   line 92</a:t>
+              <a:t>Type this into script.js   -   line 93</a:t>
             </a:r>
           </a:p>
         </p:txBody>
@@ -5688,11 +6040,36 @@
             <a:r>
               <a:rPr sz="1300">
                 <a:solidFill>
+                  <a:srgbClr val="6D8C97"/>
+                </a:solidFill>
+                <a:latin typeface="Consolas"/>
+              </a:rPr>
+              <a:t>  while (true) {</a:t>
+            </a:r>
+          </a:p>
+          <a:p>
+            <a:pPr>
+              <a:spcAft>
+                <a:spcPts val="0"/>
+              </a:spcAft>
+            </a:pPr>
+            <a:r>
+              <a:rPr sz="1300">
+                <a:solidFill>
+                  <a:srgbClr val="6D8C97"/>
+                </a:solidFill>
+                <a:latin typeface="Consolas"/>
+              </a:rPr>
+              <a:t>  93  </a:t>
+            </a:r>
+            <a:r>
+              <a:rPr sz="1300">
+                <a:solidFill>
                   <a:srgbClr val="7FE0A0"/>
                 </a:solidFill>
                 <a:latin typeface="Consolas"/>
               </a:rPr>
-              <a:t>  while (true) {</a:t>
+              <a:t>    const chunk = await reader.read();</a:t>
             </a:r>
           </a:p>
         </p:txBody>
@@ -5725,7 +6102,7 @@
                   <a:srgbClr val="DCECEF"/>
                 </a:solidFill>
               </a:rPr>
-              <a:t>Loop forever - we break out ourselves when the stream ends.</a:t>
+              <a:t>Read the next chunk, waiting for it to arrive.</a:t>
             </a:r>
           </a:p>
         </p:txBody>
@@ -5784,7 +6161,7 @@
                   <a:srgbClr val="01AEFD"/>
                 </a:solidFill>
               </a:rPr>
-              <a:t>Type this into script.js   -   line 93</a:t>
+              <a:t>Type this into script.js   -   line 94</a:t>
             </a:r>
           </a:p>
         </p:txBody>
@@ -6178,11 +6555,36 @@
             <a:r>
               <a:rPr sz="1300">
                 <a:solidFill>
+                  <a:srgbClr val="6D8C97"/>
+                </a:solidFill>
+                <a:latin typeface="Consolas"/>
+              </a:rPr>
+              <a:t>    const chunk = await reader.read();</a:t>
+            </a:r>
+          </a:p>
+          <a:p>
+            <a:pPr>
+              <a:spcAft>
+                <a:spcPts val="0"/>
+              </a:spcAft>
+            </a:pPr>
+            <a:r>
+              <a:rPr sz="1300">
+                <a:solidFill>
+                  <a:srgbClr val="6D8C97"/>
+                </a:solidFill>
+                <a:latin typeface="Consolas"/>
+              </a:rPr>
+              <a:t>  94  </a:t>
+            </a:r>
+            <a:r>
+              <a:rPr sz="1300">
+                <a:solidFill>
                   <a:srgbClr val="7FE0A0"/>
                 </a:solidFill>
                 <a:latin typeface="Consolas"/>
               </a:rPr>
-              <a:t>    const chunk = await reader.read();</a:t>
+              <a:t>    if (chunk.done) { break; }</a:t>
             </a:r>
           </a:p>
         </p:txBody>
@@ -6215,7 +6617,7 @@
                   <a:srgbClr val="DCECEF"/>
                 </a:solidFill>
               </a:rPr>
-              <a:t>Read the next chunk, waiting for it to arrive.</a:t>
+              <a:t>When the reader says done, leave the loop.</a:t>
             </a:r>
           </a:p>
         </p:txBody>
@@ -6274,7 +6676,7 @@
                   <a:srgbClr val="01AEFD"/>
                 </a:solidFill>
               </a:rPr>
-              <a:t>Type this into script.js   -   line 94</a:t>
+              <a:t>Type this into script.js   -   line 95</a:t>
             </a:r>
           </a:p>
         </p:txBody>
@@ -6693,11 +7095,36 @@
             <a:r>
               <a:rPr sz="1300">
                 <a:solidFill>
+                  <a:srgbClr val="6D8C97"/>
+                </a:solidFill>
+                <a:latin typeface="Consolas"/>
+              </a:rPr>
+              <a:t>    if (chunk.done) { break; }</a:t>
+            </a:r>
+          </a:p>
+          <a:p>
+            <a:pPr>
+              <a:spcAft>
+                <a:spcPts val="0"/>
+              </a:spcAft>
+            </a:pPr>
+            <a:r>
+              <a:rPr sz="1300">
+                <a:solidFill>
+                  <a:srgbClr val="6D8C97"/>
+                </a:solidFill>
+                <a:latin typeface="Consolas"/>
+              </a:rPr>
+              <a:t>  95  </a:t>
+            </a:r>
+            <a:r>
+              <a:rPr sz="1300">
+                <a:solidFill>
                   <a:srgbClr val="7FE0A0"/>
                 </a:solidFill>
                 <a:latin typeface="Consolas"/>
               </a:rPr>
-              <a:t>    if (chunk.done) { break; }</a:t>
+              <a:t>    buffer += decoder.decode(chunk.value, { stream: true });</a:t>
             </a:r>
           </a:p>
         </p:txBody>
@@ -6730,7 +7157,7 @@
                   <a:srgbClr val="DCECEF"/>
                 </a:solidFill>
               </a:rPr>
-              <a:t>When the reader says done, leave the loop.</a:t>
+              <a:t>Decode this chunk's bytes to text and add it to the buffer.</a:t>
             </a:r>
           </a:p>
         </p:txBody>
@@ -6856,6 +7283,166 @@
 </file>
 
 <file path=ppt/slides/slide20.xml><?xml version="1.0" encoding="utf-8"?>
+<p:sld xmlns:a="http://schemas.openxmlformats.org/drawingml/2006/main" xmlns:p="http://schemas.openxmlformats.org/presentationml/2006/main" xmlns:r="http://schemas.openxmlformats.org/officeDocument/2006/relationships">
+  <p:cSld>
+    <p:spTree>
+      <p:nvGrpSpPr>
+        <p:cNvPr id="1" name=""/>
+        <p:cNvGrpSpPr/>
+        <p:nvPr/>
+      </p:nvGrpSpPr>
+      <p:grpSpPr/>
+      <p:sp>
+        <p:nvSpPr>
+          <p:cNvPr id="2" name="Title 1"/>
+          <p:cNvSpPr>
+            <a:spLocks noGrp="1"/>
+          </p:cNvSpPr>
+          <p:nvPr>
+            <p:ph type="title"/>
+          </p:nvPr>
+        </p:nvSpPr>
+        <p:spPr/>
+        <p:txBody>
+          <a:bodyPr/>
+          <a:lstStyle/>
+          <a:p>
+            <a:r>
+              <a:rPr sz="3800" b="1">
+                <a:solidFill>
+                  <a:srgbClr val="1F2A37"/>
+                </a:solidFill>
+              </a:rPr>
+              <a:t>.split()</a:t>
+            </a:r>
+          </a:p>
+        </p:txBody>
+      </p:sp>
+      <p:sp>
+        <p:nvSpPr>
+          <p:cNvPr id="3" name="TextBox 2"/>
+          <p:cNvSpPr txBox="1"/>
+          <p:nvPr/>
+        </p:nvSpPr>
+        <p:spPr>
+          <a:xfrm>
+            <a:off x="868680" y="502920"/>
+            <a:ext cx="5486400" cy="457200"/>
+          </a:xfrm>
+          <a:prstGeom prst="rect">
+            <a:avLst/>
+          </a:prstGeom>
+          <a:noFill/>
+        </p:spPr>
+        <p:txBody>
+          <a:bodyPr wrap="none">
+            <a:spAutoFit/>
+          </a:bodyPr>
+          <a:lstStyle/>
+          <a:p>
+            <a:r>
+              <a:rPr sz="1500" b="1">
+                <a:solidFill>
+                  <a:srgbClr val="01AEFD"/>
+                </a:solidFill>
+              </a:rPr>
+              <a:t>JAVASCRIPT</a:t>
+            </a:r>
+          </a:p>
+        </p:txBody>
+      </p:sp>
+      <p:sp>
+        <p:nvSpPr>
+          <p:cNvPr id="4" name="TextBox 3"/>
+          <p:cNvSpPr txBox="1"/>
+          <p:nvPr/>
+        </p:nvSpPr>
+        <p:spPr>
+          <a:xfrm>
+            <a:off x="822960" y="1828800"/>
+            <a:ext cx="10515600" cy="4206240"/>
+          </a:xfrm>
+          <a:prstGeom prst="rect">
+            <a:avLst/>
+          </a:prstGeom>
+          <a:noFill/>
+        </p:spPr>
+        <p:txBody>
+          <a:bodyPr wrap="square">
+            <a:spAutoFit/>
+          </a:bodyPr>
+          <a:lstStyle/>
+          <a:p>
+            <a:pPr>
+              <a:spcAft>
+                <a:spcPts val="1400"/>
+              </a:spcAft>
+            </a:pPr>
+            <a:r>
+              <a:rPr sz="2800">
+                <a:solidFill>
+                  <a:srgbClr val="01AEFD"/>
+                </a:solidFill>
+              </a:rPr>
+              <a:t>buffer.split('\n\n')</a:t>
+            </a:r>
+          </a:p>
+          <a:p>
+            <a:pPr>
+              <a:spcAft>
+                <a:spcPts val="1400"/>
+              </a:spcAft>
+            </a:pPr>
+            <a:r>
+              <a:rPr sz="2400">
+                <a:solidFill>
+                  <a:srgbClr val="1F2A37"/>
+                </a:solidFill>
+              </a:rPr>
+              <a:t>• Cuts a string (week 1) into a LIST (week 4), breaking at each separator.</a:t>
+            </a:r>
+          </a:p>
+          <a:p>
+            <a:pPr>
+              <a:spcAft>
+                <a:spcPts val="1400"/>
+              </a:spcAft>
+            </a:pPr>
+            <a:r>
+              <a:rPr sz="2400">
+                <a:solidFill>
+                  <a:srgbClr val="1F2A37"/>
+                </a:solidFill>
+              </a:rPr>
+              <a:t>• The reverse of joining text with + (week 2).</a:t>
+            </a:r>
+          </a:p>
+          <a:p>
+            <a:pPr>
+              <a:spcAft>
+                <a:spcPts val="1400"/>
+              </a:spcAft>
+            </a:pPr>
+            <a:r>
+              <a:rPr sz="2400">
+                <a:solidFill>
+                  <a:srgbClr val="1F2A37"/>
+                </a:solidFill>
+              </a:rPr>
+              <a:t>• split('\n\n') gives one piece per blank line.</a:t>
+            </a:r>
+          </a:p>
+        </p:txBody>
+      </p:sp>
+    </p:spTree>
+  </p:cSld>
+  <p:clrMapOvr>
+    <a:masterClrMapping/>
+  </p:clrMapOvr>
+</p:sld>
+</file>
+
+<file path=ppt/slides/slide21.xml><?xml version="1.0" encoding="utf-8"?>
 <p:sld xmlns:a="http://schemas.openxmlformats.org/drawingml/2006/main" xmlns:p="http://schemas.openxmlformats.org/presentationml/2006/main" xmlns:r="http://schemas.openxmlformats.org/officeDocument/2006/relationships">
   <p:cSld>
     <p:bg>
@@ -6901,7 +7488,7 @@
                   <a:srgbClr val="01AEFD"/>
                 </a:solidFill>
               </a:rPr>
-              <a:t>Type this into script.js   -   line 95</a:t>
+              <a:t>Type this into script.js   -   line 99</a:t>
             </a:r>
           </a:p>
         </p:txBody>
@@ -7345,11 +7932,111 @@
             <a:r>
               <a:rPr sz="1300">
                 <a:solidFill>
+                  <a:srgbClr val="6D8C97"/>
+                </a:solidFill>
+                <a:latin typeface="Consolas"/>
+              </a:rPr>
+              <a:t>    buffer += decoder.decode(chunk.value, { stream: true });</a:t>
+            </a:r>
+          </a:p>
+          <a:p>
+            <a:pPr>
+              <a:spcAft>
+                <a:spcPts val="0"/>
+              </a:spcAft>
+            </a:pPr>
+            <a:r>
+              <a:rPr sz="1300">
+                <a:solidFill>
+                  <a:srgbClr val="6D8C97"/>
+                </a:solidFill>
+                <a:latin typeface="Consolas"/>
+              </a:rPr>
+              <a:t>  96  </a:t>
+            </a:r>
+            <a:r>
+              <a:rPr sz="1300">
+                <a:solidFill>
+                  <a:srgbClr val="6D8C97"/>
+                </a:solidFill>
+                <a:latin typeface="Consolas"/>
+              </a:rPr>
+              <a:t> </a:t>
+            </a:r>
+          </a:p>
+          <a:p>
+            <a:pPr>
+              <a:spcAft>
+                <a:spcPts val="0"/>
+              </a:spcAft>
+            </a:pPr>
+            <a:r>
+              <a:rPr sz="1300">
+                <a:solidFill>
+                  <a:srgbClr val="6D8C97"/>
+                </a:solidFill>
+                <a:latin typeface="Consolas"/>
+              </a:rPr>
+              <a:t>  97  </a:t>
+            </a:r>
+            <a:r>
+              <a:rPr sz="1300">
+                <a:solidFill>
+                  <a:srgbClr val="6D8C97"/>
+                </a:solidFill>
+                <a:latin typeface="Consolas"/>
+              </a:rPr>
+              <a:t>    // Complete pieces are separated by a blank line. Keep the last,</a:t>
+            </a:r>
+          </a:p>
+          <a:p>
+            <a:pPr>
+              <a:spcAft>
+                <a:spcPts val="0"/>
+              </a:spcAft>
+            </a:pPr>
+            <a:r>
+              <a:rPr sz="1300">
+                <a:solidFill>
+                  <a:srgbClr val="6D8C97"/>
+                </a:solidFill>
+                <a:latin typeface="Consolas"/>
+              </a:rPr>
+              <a:t>  98  </a:t>
+            </a:r>
+            <a:r>
+              <a:rPr sz="1300">
+                <a:solidFill>
+                  <a:srgbClr val="6D8C97"/>
+                </a:solidFill>
+                <a:latin typeface="Consolas"/>
+              </a:rPr>
+              <a:t>    // possibly unfinished, piece in the buffer for the next round.</a:t>
+            </a:r>
+          </a:p>
+          <a:p>
+            <a:pPr>
+              <a:spcAft>
+                <a:spcPts val="0"/>
+              </a:spcAft>
+            </a:pPr>
+            <a:r>
+              <a:rPr sz="1300">
+                <a:solidFill>
+                  <a:srgbClr val="6D8C97"/>
+                </a:solidFill>
+                <a:latin typeface="Consolas"/>
+              </a:rPr>
+              <a:t>  99  </a:t>
+            </a:r>
+            <a:r>
+              <a:rPr sz="1300">
+                <a:solidFill>
                   <a:srgbClr val="7FE0A0"/>
                 </a:solidFill>
                 <a:latin typeface="Consolas"/>
               </a:rPr>
-              <a:t>    buffer += decoder.decode(chunk.value, { stream: true });</a:t>
+              <a:t>    const parts = buffer.split('\n\n');</a:t>
             </a:r>
           </a:p>
         </p:txBody>
@@ -7382,7 +8069,7 @@
                   <a:srgbClr val="DCECEF"/>
                 </a:solidFill>
               </a:rPr>
-              <a:t>Decode this chunk's bytes to text and add it to the buffer.</a:t>
+              <a:t>split the buffer into pieces wherever there is a blank line.</a:t>
             </a:r>
           </a:p>
         </p:txBody>
@@ -7395,7 +8082,7 @@
 </p:sld>
 </file>
 
-<file path=ppt/slides/slide21.xml><?xml version="1.0" encoding="utf-8"?>
+<file path=ppt/slides/slide22.xml><?xml version="1.0" encoding="utf-8"?>
 <p:sld xmlns:a="http://schemas.openxmlformats.org/drawingml/2006/main" xmlns:p="http://schemas.openxmlformats.org/presentationml/2006/main" xmlns:r="http://schemas.openxmlformats.org/officeDocument/2006/relationships">
   <p:cSld>
     <p:spTree>
@@ -7426,7 +8113,7 @@
                   <a:srgbClr val="1F2A37"/>
                 </a:solidFill>
               </a:rPr>
-              <a:t>.split()</a:t>
+              <a:t>.pop()</a:t>
             </a:r>
           </a:p>
         </p:txBody>
@@ -7497,7 +8184,7 @@
                   <a:srgbClr val="01AEFD"/>
                 </a:solidFill>
               </a:rPr>
-              <a:t>buffer.split('\n\n')</a:t>
+              <a:t>buffer = parts.pop();</a:t>
             </a:r>
           </a:p>
           <a:p>
@@ -7512,7 +8199,7 @@
                   <a:srgbClr val="1F2A37"/>
                 </a:solidFill>
               </a:rPr>
-              <a:t>• Cuts a string (week 1) into a LIST (week 4), breaking at each separator.</a:t>
+              <a:t>• Removes the LAST item of a list and hands it back.</a:t>
             </a:r>
           </a:p>
           <a:p>
@@ -7527,7 +8214,7 @@
                   <a:srgbClr val="1F2A37"/>
                 </a:solidFill>
               </a:rPr>
-              <a:t>• The reverse of joining text with + (week 2).</a:t>
+              <a:t>• The other end from .shift (week 8), which takes the FIRST.</a:t>
             </a:r>
           </a:p>
           <a:p>
@@ -7542,7 +8229,7 @@
                   <a:srgbClr val="1F2A37"/>
                 </a:solidFill>
               </a:rPr>
-              <a:t>• split('\n\n') gives one piece per blank line.</a:t>
+              <a:t>• We pop the last, maybe-unfinished piece and keep it for next round.</a:t>
             </a:r>
           </a:p>
         </p:txBody>
@@ -7555,7 +8242,7 @@
 </p:sld>
 </file>
 
-<file path=ppt/slides/slide22.xml><?xml version="1.0" encoding="utf-8"?>
+<file path=ppt/slides/slide23.xml><?xml version="1.0" encoding="utf-8"?>
 <p:sld xmlns:a="http://schemas.openxmlformats.org/drawingml/2006/main" xmlns:p="http://schemas.openxmlformats.org/presentationml/2006/main" xmlns:r="http://schemas.openxmlformats.org/officeDocument/2006/relationships">
   <p:cSld>
     <p:bg>
@@ -7601,7 +8288,7 @@
                   <a:srgbClr val="01AEFD"/>
                 </a:solidFill>
               </a:rPr>
-              <a:t>Type this into script.js   -   line 99</a:t>
+              <a:t>Type this into script.js   -   line 100</a:t>
             </a:r>
           </a:p>
         </p:txBody>
@@ -8145,11 +8832,36 @@
             <a:r>
               <a:rPr sz="1300">
                 <a:solidFill>
+                  <a:srgbClr val="6D8C97"/>
+                </a:solidFill>
+                <a:latin typeface="Consolas"/>
+              </a:rPr>
+              <a:t>    const parts = buffer.split('\n\n');</a:t>
+            </a:r>
+          </a:p>
+          <a:p>
+            <a:pPr>
+              <a:spcAft>
+                <a:spcPts val="0"/>
+              </a:spcAft>
+            </a:pPr>
+            <a:r>
+              <a:rPr sz="1300">
+                <a:solidFill>
+                  <a:srgbClr val="6D8C97"/>
+                </a:solidFill>
+                <a:latin typeface="Consolas"/>
+              </a:rPr>
+              <a:t> 100  </a:t>
+            </a:r>
+            <a:r>
+              <a:rPr sz="1300">
+                <a:solidFill>
                   <a:srgbClr val="7FE0A0"/>
                 </a:solidFill>
                 <a:latin typeface="Consolas"/>
               </a:rPr>
-              <a:t>    const parts = buffer.split('\n\n');</a:t>
+              <a:t>    buffer = parts.pop();</a:t>
             </a:r>
           </a:p>
         </p:txBody>
@@ -8182,167 +8894,7 @@
                   <a:srgbClr val="DCECEF"/>
                 </a:solidFill>
               </a:rPr>
-              <a:t>split the buffer into pieces wherever there is a blank line.</a:t>
-            </a:r>
-          </a:p>
-        </p:txBody>
-      </p:sp>
-    </p:spTree>
-  </p:cSld>
-  <p:clrMapOvr>
-    <a:masterClrMapping/>
-  </p:clrMapOvr>
-</p:sld>
-</file>
-
-<file path=ppt/slides/slide23.xml><?xml version="1.0" encoding="utf-8"?>
-<p:sld xmlns:a="http://schemas.openxmlformats.org/drawingml/2006/main" xmlns:p="http://schemas.openxmlformats.org/presentationml/2006/main" xmlns:r="http://schemas.openxmlformats.org/officeDocument/2006/relationships">
-  <p:cSld>
-    <p:spTree>
-      <p:nvGrpSpPr>
-        <p:cNvPr id="1" name=""/>
-        <p:cNvGrpSpPr/>
-        <p:nvPr/>
-      </p:nvGrpSpPr>
-      <p:grpSpPr/>
-      <p:sp>
-        <p:nvSpPr>
-          <p:cNvPr id="2" name="Title 1"/>
-          <p:cNvSpPr>
-            <a:spLocks noGrp="1"/>
-          </p:cNvSpPr>
-          <p:nvPr>
-            <p:ph type="title"/>
-          </p:nvPr>
-        </p:nvSpPr>
-        <p:spPr/>
-        <p:txBody>
-          <a:bodyPr/>
-          <a:lstStyle/>
-          <a:p>
-            <a:r>
-              <a:rPr sz="3800" b="1">
-                <a:solidFill>
-                  <a:srgbClr val="1F2A37"/>
-                </a:solidFill>
-              </a:rPr>
-              <a:t>.pop()</a:t>
-            </a:r>
-          </a:p>
-        </p:txBody>
-      </p:sp>
-      <p:sp>
-        <p:nvSpPr>
-          <p:cNvPr id="3" name="TextBox 2"/>
-          <p:cNvSpPr txBox="1"/>
-          <p:nvPr/>
-        </p:nvSpPr>
-        <p:spPr>
-          <a:xfrm>
-            <a:off x="868680" y="502920"/>
-            <a:ext cx="5486400" cy="457200"/>
-          </a:xfrm>
-          <a:prstGeom prst="rect">
-            <a:avLst/>
-          </a:prstGeom>
-          <a:noFill/>
-        </p:spPr>
-        <p:txBody>
-          <a:bodyPr wrap="none">
-            <a:spAutoFit/>
-          </a:bodyPr>
-          <a:lstStyle/>
-          <a:p>
-            <a:r>
-              <a:rPr sz="1500" b="1">
-                <a:solidFill>
-                  <a:srgbClr val="01AEFD"/>
-                </a:solidFill>
-              </a:rPr>
-              <a:t>JAVASCRIPT</a:t>
-            </a:r>
-          </a:p>
-        </p:txBody>
-      </p:sp>
-      <p:sp>
-        <p:nvSpPr>
-          <p:cNvPr id="4" name="TextBox 3"/>
-          <p:cNvSpPr txBox="1"/>
-          <p:nvPr/>
-        </p:nvSpPr>
-        <p:spPr>
-          <a:xfrm>
-            <a:off x="822960" y="1828800"/>
-            <a:ext cx="10515600" cy="4206240"/>
-          </a:xfrm>
-          <a:prstGeom prst="rect">
-            <a:avLst/>
-          </a:prstGeom>
-          <a:noFill/>
-        </p:spPr>
-        <p:txBody>
-          <a:bodyPr wrap="square">
-            <a:spAutoFit/>
-          </a:bodyPr>
-          <a:lstStyle/>
-          <a:p>
-            <a:pPr>
-              <a:spcAft>
-                <a:spcPts val="1400"/>
-              </a:spcAft>
-            </a:pPr>
-            <a:r>
-              <a:rPr sz="2800">
-                <a:solidFill>
-                  <a:srgbClr val="01AEFD"/>
-                </a:solidFill>
-              </a:rPr>
-              <a:t>buffer = parts.pop();</a:t>
-            </a:r>
-          </a:p>
-          <a:p>
-            <a:pPr>
-              <a:spcAft>
-                <a:spcPts val="1400"/>
-              </a:spcAft>
-            </a:pPr>
-            <a:r>
-              <a:rPr sz="2400">
-                <a:solidFill>
-                  <a:srgbClr val="1F2A37"/>
-                </a:solidFill>
-              </a:rPr>
-              <a:t>• Removes the LAST item of a list and hands it back.</a:t>
-            </a:r>
-          </a:p>
-          <a:p>
-            <a:pPr>
-              <a:spcAft>
-                <a:spcPts val="1400"/>
-              </a:spcAft>
-            </a:pPr>
-            <a:r>
-              <a:rPr sz="2400">
-                <a:solidFill>
-                  <a:srgbClr val="1F2A37"/>
-                </a:solidFill>
-              </a:rPr>
-              <a:t>• The other end from .shift (week 8), which takes the FIRST.</a:t>
-            </a:r>
-          </a:p>
-          <a:p>
-            <a:pPr>
-              <a:spcAft>
-                <a:spcPts val="1400"/>
-              </a:spcAft>
-            </a:pPr>
-            <a:r>
-              <a:rPr sz="2400">
-                <a:solidFill>
-                  <a:srgbClr val="1F2A37"/>
-                </a:solidFill>
-              </a:rPr>
-              <a:t>• We pop the last, maybe-unfinished piece and keep it for next round.</a:t>
+              <a:t>pop() takes the LAST piece off - it may be half-finished, so we keep it for next round.</a:t>
             </a:r>
           </a:p>
         </p:txBody>
@@ -8401,7 +8953,7 @@
                   <a:srgbClr val="01AEFD"/>
                 </a:solidFill>
               </a:rPr>
-              <a:t>Type this into script.js   -   line 100</a:t>
+              <a:t>Type this into script.js   -   line 102</a:t>
             </a:r>
           </a:p>
         </p:txBody>
@@ -8970,11 +9522,61 @@
             <a:r>
               <a:rPr sz="1300">
                 <a:solidFill>
+                  <a:srgbClr val="6D8C97"/>
+                </a:solidFill>
+                <a:latin typeface="Consolas"/>
+              </a:rPr>
+              <a:t>    buffer = parts.pop();</a:t>
+            </a:r>
+          </a:p>
+          <a:p>
+            <a:pPr>
+              <a:spcAft>
+                <a:spcPts val="0"/>
+              </a:spcAft>
+            </a:pPr>
+            <a:r>
+              <a:rPr sz="1300">
+                <a:solidFill>
+                  <a:srgbClr val="6D8C97"/>
+                </a:solidFill>
+                <a:latin typeface="Consolas"/>
+              </a:rPr>
+              <a:t> 101  </a:t>
+            </a:r>
+            <a:r>
+              <a:rPr sz="1300">
+                <a:solidFill>
+                  <a:srgbClr val="6D8C97"/>
+                </a:solidFill>
+                <a:latin typeface="Consolas"/>
+              </a:rPr>
+              <a:t> </a:t>
+            </a:r>
+          </a:p>
+          <a:p>
+            <a:pPr>
+              <a:spcAft>
+                <a:spcPts val="0"/>
+              </a:spcAft>
+            </a:pPr>
+            <a:r>
+              <a:rPr sz="1300">
+                <a:solidFill>
+                  <a:srgbClr val="6D8C97"/>
+                </a:solidFill>
+                <a:latin typeface="Consolas"/>
+              </a:rPr>
+              <a:t> 102  </a:t>
+            </a:r>
+            <a:r>
+              <a:rPr sz="1300">
+                <a:solidFill>
                   <a:srgbClr val="7FE0A0"/>
                 </a:solidFill>
                 <a:latin typeface="Consolas"/>
               </a:rPr>
-              <a:t>    buffer = parts.pop();</a:t>
+              <a:t>    for (const part of parts) {</a:t>
             </a:r>
           </a:p>
         </p:txBody>
@@ -9007,7 +9609,7 @@
                   <a:srgbClr val="DCECEF"/>
                 </a:solidFill>
               </a:rPr>
-              <a:t>pop() takes the LAST piece off - it may be half-finished, so we keep it for next round.</a:t>
+              <a:t>Go through each complete piece.</a:t>
             </a:r>
           </a:p>
         </p:txBody>
@@ -9066,7 +9668,7 @@
                   <a:srgbClr val="01AEFD"/>
                 </a:solidFill>
               </a:rPr>
-              <a:t>Type this into script.js   -   line 102</a:t>
+              <a:t>Type this into script.js   -   line 103</a:t>
             </a:r>
           </a:p>
         </p:txBody>
@@ -9685,11 +10287,36 @@
             <a:r>
               <a:rPr sz="1300">
                 <a:solidFill>
+                  <a:srgbClr val="6D8C97"/>
+                </a:solidFill>
+                <a:latin typeface="Consolas"/>
+              </a:rPr>
+              <a:t>    for (const part of parts) {</a:t>
+            </a:r>
+          </a:p>
+          <a:p>
+            <a:pPr>
+              <a:spcAft>
+                <a:spcPts val="0"/>
+              </a:spcAft>
+            </a:pPr>
+            <a:r>
+              <a:rPr sz="1300">
+                <a:solidFill>
+                  <a:srgbClr val="6D8C97"/>
+                </a:solidFill>
+                <a:latin typeface="Consolas"/>
+              </a:rPr>
+              <a:t> 103  </a:t>
+            </a:r>
+            <a:r>
+              <a:rPr sz="1300">
+                <a:solidFill>
                   <a:srgbClr val="7FE0A0"/>
                 </a:solidFill>
                 <a:latin typeface="Consolas"/>
               </a:rPr>
-              <a:t>    for (const part of parts) {</a:t>
+              <a:t>      const line = part.trim();</a:t>
             </a:r>
           </a:p>
         </p:txBody>
@@ -9722,7 +10349,7 @@
                   <a:srgbClr val="DCECEF"/>
                 </a:solidFill>
               </a:rPr>
-              <a:t>Go through each complete piece.</a:t>
+              <a:t>Trim the blank space off it.</a:t>
             </a:r>
           </a:p>
         </p:txBody>
@@ -9736,6 +10363,166 @@
 </file>
 
 <file path=ppt/slides/slide26.xml><?xml version="1.0" encoding="utf-8"?>
+<p:sld xmlns:a="http://schemas.openxmlformats.org/drawingml/2006/main" xmlns:p="http://schemas.openxmlformats.org/presentationml/2006/main" xmlns:r="http://schemas.openxmlformats.org/officeDocument/2006/relationships">
+  <p:cSld>
+    <p:spTree>
+      <p:nvGrpSpPr>
+        <p:cNvPr id="1" name=""/>
+        <p:cNvGrpSpPr/>
+        <p:nvPr/>
+      </p:nvGrpSpPr>
+      <p:grpSpPr/>
+      <p:sp>
+        <p:nvSpPr>
+          <p:cNvPr id="2" name="Title 1"/>
+          <p:cNvSpPr>
+            <a:spLocks noGrp="1"/>
+          </p:cNvSpPr>
+          <p:nvPr>
+            <p:ph type="title"/>
+          </p:nvPr>
+        </p:nvSpPr>
+        <p:spPr/>
+        <p:txBody>
+          <a:bodyPr/>
+          <a:lstStyle/>
+          <a:p>
+            <a:r>
+              <a:rPr sz="3800" b="1">
+                <a:solidFill>
+                  <a:srgbClr val="1F2A37"/>
+                </a:solidFill>
+              </a:rPr>
+              <a:t>.startsWith()</a:t>
+            </a:r>
+          </a:p>
+        </p:txBody>
+      </p:sp>
+      <p:sp>
+        <p:nvSpPr>
+          <p:cNvPr id="3" name="TextBox 2"/>
+          <p:cNvSpPr txBox="1"/>
+          <p:nvPr/>
+        </p:nvSpPr>
+        <p:spPr>
+          <a:xfrm>
+            <a:off x="868680" y="502920"/>
+            <a:ext cx="5486400" cy="457200"/>
+          </a:xfrm>
+          <a:prstGeom prst="rect">
+            <a:avLst/>
+          </a:prstGeom>
+          <a:noFill/>
+        </p:spPr>
+        <p:txBody>
+          <a:bodyPr wrap="none">
+            <a:spAutoFit/>
+          </a:bodyPr>
+          <a:lstStyle/>
+          <a:p>
+            <a:r>
+              <a:rPr sz="1500" b="1">
+                <a:solidFill>
+                  <a:srgbClr val="01AEFD"/>
+                </a:solidFill>
+              </a:rPr>
+              <a:t>JAVASCRIPT</a:t>
+            </a:r>
+          </a:p>
+        </p:txBody>
+      </p:sp>
+      <p:sp>
+        <p:nvSpPr>
+          <p:cNvPr id="4" name="TextBox 3"/>
+          <p:cNvSpPr txBox="1"/>
+          <p:nvPr/>
+        </p:nvSpPr>
+        <p:spPr>
+          <a:xfrm>
+            <a:off x="822960" y="1828800"/>
+            <a:ext cx="10515600" cy="4206240"/>
+          </a:xfrm>
+          <a:prstGeom prst="rect">
+            <a:avLst/>
+          </a:prstGeom>
+          <a:noFill/>
+        </p:spPr>
+        <p:txBody>
+          <a:bodyPr wrap="square">
+            <a:spAutoFit/>
+          </a:bodyPr>
+          <a:lstStyle/>
+          <a:p>
+            <a:pPr>
+              <a:spcAft>
+                <a:spcPts val="1400"/>
+              </a:spcAft>
+            </a:pPr>
+            <a:r>
+              <a:rPr sz="2800">
+                <a:solidFill>
+                  <a:srgbClr val="01AEFD"/>
+                </a:solidFill>
+              </a:rPr>
+              <a:t>line.startsWith('data: ')</a:t>
+            </a:r>
+          </a:p>
+          <a:p>
+            <a:pPr>
+              <a:spcAft>
+                <a:spcPts val="1400"/>
+              </a:spcAft>
+            </a:pPr>
+            <a:r>
+              <a:rPr sz="2400">
+                <a:solidFill>
+                  <a:srgbClr val="1F2A37"/>
+                </a:solidFill>
+              </a:rPr>
+              <a:t>• True if a string begins with the text you give it.</a:t>
+            </a:r>
+          </a:p>
+          <a:p>
+            <a:pPr>
+              <a:spcAft>
+                <a:spcPts val="1400"/>
+              </a:spcAft>
+            </a:pPr>
+            <a:r>
+              <a:rPr sz="2400">
+                <a:solidFill>
+                  <a:srgbClr val="1F2A37"/>
+                </a:solidFill>
+              </a:rPr>
+              <a:t>• A yes/no answer, so it drops straight into an if (week 2).</a:t>
+            </a:r>
+          </a:p>
+          <a:p>
+            <a:pPr>
+              <a:spcAft>
+                <a:spcPts val="1400"/>
+              </a:spcAft>
+            </a:pPr>
+            <a:r>
+              <a:rPr sz="2400">
+                <a:solidFill>
+                  <a:srgbClr val="1F2A37"/>
+                </a:solidFill>
+              </a:rPr>
+              <a:t>• It skips any line that is not a 'data: ' line.</a:t>
+            </a:r>
+          </a:p>
+        </p:txBody>
+      </p:sp>
+    </p:spTree>
+  </p:cSld>
+  <p:clrMapOvr>
+    <a:masterClrMapping/>
+  </p:clrMapOvr>
+</p:sld>
+</file>
+
+<file path=ppt/slides/slide27.xml><?xml version="1.0" encoding="utf-8"?>
 <p:sld xmlns:a="http://schemas.openxmlformats.org/drawingml/2006/main" xmlns:p="http://schemas.openxmlformats.org/presentationml/2006/main" xmlns:r="http://schemas.openxmlformats.org/officeDocument/2006/relationships">
   <p:cSld>
     <p:bg>
@@ -9781,7 +10568,7 @@
                   <a:srgbClr val="01AEFD"/>
                 </a:solidFill>
               </a:rPr>
-              <a:t>Type this into script.js   -   line 103</a:t>
+              <a:t>Type this into script.js   -   line 104</a:t>
             </a:r>
           </a:p>
         </p:txBody>
@@ -10425,11 +11212,36 @@
             <a:r>
               <a:rPr sz="1300">
                 <a:solidFill>
+                  <a:srgbClr val="6D8C97"/>
+                </a:solidFill>
+                <a:latin typeface="Consolas"/>
+              </a:rPr>
+              <a:t>      const line = part.trim();</a:t>
+            </a:r>
+          </a:p>
+          <a:p>
+            <a:pPr>
+              <a:spcAft>
+                <a:spcPts val="0"/>
+              </a:spcAft>
+            </a:pPr>
+            <a:r>
+              <a:rPr sz="1300">
+                <a:solidFill>
+                  <a:srgbClr val="6D8C97"/>
+                </a:solidFill>
+                <a:latin typeface="Consolas"/>
+              </a:rPr>
+              <a:t> 104  </a:t>
+            </a:r>
+            <a:r>
+              <a:rPr sz="1300">
+                <a:solidFill>
                   <a:srgbClr val="7FE0A0"/>
                 </a:solidFill>
                 <a:latin typeface="Consolas"/>
               </a:rPr>
-              <a:t>      const line = part.trim();</a:t>
+              <a:t>      if (!line.startsWith('data: ')) { continue; }</a:t>
             </a:r>
           </a:p>
         </p:txBody>
@@ -10462,7 +11274,7 @@
                   <a:srgbClr val="DCECEF"/>
                 </a:solidFill>
               </a:rPr>
-              <a:t>Trim the blank space off it.</a:t>
+              <a:t>Skip anything that does not start with 'data: '.</a:t>
             </a:r>
           </a:p>
         </p:txBody>
@@ -10475,7 +11287,7 @@
 </p:sld>
 </file>
 
-<file path=ppt/slides/slide27.xml><?xml version="1.0" encoding="utf-8"?>
+<file path=ppt/slides/slide28.xml><?xml version="1.0" encoding="utf-8"?>
 <p:sld xmlns:a="http://schemas.openxmlformats.org/drawingml/2006/main" xmlns:p="http://schemas.openxmlformats.org/presentationml/2006/main" xmlns:r="http://schemas.openxmlformats.org/officeDocument/2006/relationships">
   <p:cSld>
     <p:spTree>
@@ -10506,7 +11318,7 @@
                   <a:srgbClr val="1F2A37"/>
                 </a:solidFill>
               </a:rPr>
-              <a:t>.startsWith()</a:t>
+              <a:t>.slice()</a:t>
             </a:r>
           </a:p>
         </p:txBody>
@@ -10577,7 +11389,7 @@
                   <a:srgbClr val="01AEFD"/>
                 </a:solidFill>
               </a:rPr>
-              <a:t>line.startsWith('data: ')</a:t>
+              <a:t>line.slice(6)</a:t>
             </a:r>
           </a:p>
           <a:p>
@@ -10592,7 +11404,7 @@
                   <a:srgbClr val="1F2A37"/>
                 </a:solidFill>
               </a:rPr>
-              <a:t>• True if a string begins with the text you give it.</a:t>
+              <a:t>• Takes a SECTION of a string, from one position onward.</a:t>
             </a:r>
           </a:p>
           <a:p>
@@ -10607,7 +11419,7 @@
                   <a:srgbClr val="1F2A37"/>
                 </a:solidFill>
               </a:rPr>
-              <a:t>• A yes/no answer, so it drops straight into an if (week 2).</a:t>
+              <a:t>• Counting starts at 0, like picking from a list with [0] (week 4).</a:t>
             </a:r>
           </a:p>
           <a:p>
@@ -10622,7 +11434,7 @@
                   <a:srgbClr val="1F2A37"/>
                 </a:solidFill>
               </a:rPr>
-              <a:t>• It skips any line that is not a 'data: ' line.</a:t>
+              <a:t>• slice(6) drops the first six characters ('data: ').</a:t>
             </a:r>
           </a:p>
         </p:txBody>
@@ -10635,7 +11447,7 @@
 </p:sld>
 </file>
 
-<file path=ppt/slides/slide28.xml><?xml version="1.0" encoding="utf-8"?>
+<file path=ppt/slides/slide29.xml><?xml version="1.0" encoding="utf-8"?>
 <p:sld xmlns:a="http://schemas.openxmlformats.org/drawingml/2006/main" xmlns:p="http://schemas.openxmlformats.org/presentationml/2006/main" xmlns:r="http://schemas.openxmlformats.org/officeDocument/2006/relationships">
   <p:cSld>
     <p:bg>
@@ -10681,7 +11493,7 @@
                   <a:srgbClr val="01AEFD"/>
                 </a:solidFill>
               </a:rPr>
-              <a:t>Type this into script.js   -   line 104</a:t>
+              <a:t>Type this into script.js   -   line 105</a:t>
             </a:r>
           </a:p>
         </p:txBody>
@@ -11350,11 +12162,36 @@
             <a:r>
               <a:rPr sz="1300">
                 <a:solidFill>
+                  <a:srgbClr val="6D8C97"/>
+                </a:solidFill>
+                <a:latin typeface="Consolas"/>
+              </a:rPr>
+              <a:t>      if (!line.startsWith('data: ')) { continue; }</a:t>
+            </a:r>
+          </a:p>
+          <a:p>
+            <a:pPr>
+              <a:spcAft>
+                <a:spcPts val="0"/>
+              </a:spcAft>
+            </a:pPr>
+            <a:r>
+              <a:rPr sz="1300">
+                <a:solidFill>
+                  <a:srgbClr val="6D8C97"/>
+                </a:solidFill>
+                <a:latin typeface="Consolas"/>
+              </a:rPr>
+              <a:t> 105  </a:t>
+            </a:r>
+            <a:r>
+              <a:rPr sz="1300">
+                <a:solidFill>
                   <a:srgbClr val="7FE0A0"/>
                 </a:solidFill>
                 <a:latin typeface="Consolas"/>
               </a:rPr>
-              <a:t>      if (!line.startsWith('data: ')) { continue; }</a:t>
+              <a:t>      const payload = line.slice(6);</a:t>
             </a:r>
           </a:p>
         </p:txBody>
@@ -11387,167 +12224,7 @@
                   <a:srgbClr val="DCECEF"/>
                 </a:solidFill>
               </a:rPr>
-              <a:t>Skip anything that does not start with 'data: '.</a:t>
-            </a:r>
-          </a:p>
-        </p:txBody>
-      </p:sp>
-    </p:spTree>
-  </p:cSld>
-  <p:clrMapOvr>
-    <a:masterClrMapping/>
-  </p:clrMapOvr>
-</p:sld>
-</file>
-
-<file path=ppt/slides/slide29.xml><?xml version="1.0" encoding="utf-8"?>
-<p:sld xmlns:a="http://schemas.openxmlformats.org/drawingml/2006/main" xmlns:p="http://schemas.openxmlformats.org/presentationml/2006/main" xmlns:r="http://schemas.openxmlformats.org/officeDocument/2006/relationships">
-  <p:cSld>
-    <p:spTree>
-      <p:nvGrpSpPr>
-        <p:cNvPr id="1" name=""/>
-        <p:cNvGrpSpPr/>
-        <p:nvPr/>
-      </p:nvGrpSpPr>
-      <p:grpSpPr/>
-      <p:sp>
-        <p:nvSpPr>
-          <p:cNvPr id="2" name="Title 1"/>
-          <p:cNvSpPr>
-            <a:spLocks noGrp="1"/>
-          </p:cNvSpPr>
-          <p:nvPr>
-            <p:ph type="title"/>
-          </p:nvPr>
-        </p:nvSpPr>
-        <p:spPr/>
-        <p:txBody>
-          <a:bodyPr/>
-          <a:lstStyle/>
-          <a:p>
-            <a:r>
-              <a:rPr sz="3800" b="1">
-                <a:solidFill>
-                  <a:srgbClr val="1F2A37"/>
-                </a:solidFill>
-              </a:rPr>
-              <a:t>.slice()</a:t>
-            </a:r>
-          </a:p>
-        </p:txBody>
-      </p:sp>
-      <p:sp>
-        <p:nvSpPr>
-          <p:cNvPr id="3" name="TextBox 2"/>
-          <p:cNvSpPr txBox="1"/>
-          <p:nvPr/>
-        </p:nvSpPr>
-        <p:spPr>
-          <a:xfrm>
-            <a:off x="868680" y="502920"/>
-            <a:ext cx="5486400" cy="457200"/>
-          </a:xfrm>
-          <a:prstGeom prst="rect">
-            <a:avLst/>
-          </a:prstGeom>
-          <a:noFill/>
-        </p:spPr>
-        <p:txBody>
-          <a:bodyPr wrap="none">
-            <a:spAutoFit/>
-          </a:bodyPr>
-          <a:lstStyle/>
-          <a:p>
-            <a:r>
-              <a:rPr sz="1500" b="1">
-                <a:solidFill>
-                  <a:srgbClr val="01AEFD"/>
-                </a:solidFill>
-              </a:rPr>
-              <a:t>JAVASCRIPT</a:t>
-            </a:r>
-          </a:p>
-        </p:txBody>
-      </p:sp>
-      <p:sp>
-        <p:nvSpPr>
-          <p:cNvPr id="4" name="TextBox 3"/>
-          <p:cNvSpPr txBox="1"/>
-          <p:nvPr/>
-        </p:nvSpPr>
-        <p:spPr>
-          <a:xfrm>
-            <a:off x="822960" y="1828800"/>
-            <a:ext cx="10515600" cy="4206240"/>
-          </a:xfrm>
-          <a:prstGeom prst="rect">
-            <a:avLst/>
-          </a:prstGeom>
-          <a:noFill/>
-        </p:spPr>
-        <p:txBody>
-          <a:bodyPr wrap="square">
-            <a:spAutoFit/>
-          </a:bodyPr>
-          <a:lstStyle/>
-          <a:p>
-            <a:pPr>
-              <a:spcAft>
-                <a:spcPts val="1400"/>
-              </a:spcAft>
-            </a:pPr>
-            <a:r>
-              <a:rPr sz="2800">
-                <a:solidFill>
-                  <a:srgbClr val="01AEFD"/>
-                </a:solidFill>
-              </a:rPr>
-              <a:t>line.slice(6)</a:t>
-            </a:r>
-          </a:p>
-          <a:p>
-            <a:pPr>
-              <a:spcAft>
-                <a:spcPts val="1400"/>
-              </a:spcAft>
-            </a:pPr>
-            <a:r>
-              <a:rPr sz="2400">
-                <a:solidFill>
-                  <a:srgbClr val="1F2A37"/>
-                </a:solidFill>
-              </a:rPr>
-              <a:t>• Takes a SECTION of a string, from one position onward.</a:t>
-            </a:r>
-          </a:p>
-          <a:p>
-            <a:pPr>
-              <a:spcAft>
-                <a:spcPts val="1400"/>
-              </a:spcAft>
-            </a:pPr>
-            <a:r>
-              <a:rPr sz="2400">
-                <a:solidFill>
-                  <a:srgbClr val="1F2A37"/>
-                </a:solidFill>
-              </a:rPr>
-              <a:t>• Counting starts at 0, like picking from a list with [0] (week 4).</a:t>
-            </a:r>
-          </a:p>
-          <a:p>
-            <a:pPr>
-              <a:spcAft>
-                <a:spcPts val="1400"/>
-              </a:spcAft>
-            </a:pPr>
-            <a:r>
-              <a:rPr sz="2400">
-                <a:solidFill>
-                  <a:srgbClr val="1F2A37"/>
-                </a:solidFill>
-              </a:rPr>
-              <a:t>• slice(6) drops the first six characters ('data: ').</a:t>
+              <a:t>slice(6) drops the first six characters ('data: '), leaving the JSON.</a:t>
             </a:r>
           </a:p>
         </p:txBody>
@@ -11718,7 +12395,7 @@
                   <a:srgbClr val="01AEFD"/>
                 </a:solidFill>
               </a:rPr>
-              <a:t>Type this into script.js   -   line 105</a:t>
+              <a:t>Type this into script.js   -   line 106</a:t>
             </a:r>
           </a:p>
         </p:txBody>
@@ -12412,11 +13089,36 @@
             <a:r>
               <a:rPr sz="1300">
                 <a:solidFill>
+                  <a:srgbClr val="6D8C97"/>
+                </a:solidFill>
+                <a:latin typeface="Consolas"/>
+              </a:rPr>
+              <a:t>      const payload = line.slice(6);</a:t>
+            </a:r>
+          </a:p>
+          <a:p>
+            <a:pPr>
+              <a:spcAft>
+                <a:spcPts val="0"/>
+              </a:spcAft>
+            </a:pPr>
+            <a:r>
+              <a:rPr sz="1300">
+                <a:solidFill>
+                  <a:srgbClr val="6D8C97"/>
+                </a:solidFill>
+                <a:latin typeface="Consolas"/>
+              </a:rPr>
+              <a:t> 106  </a:t>
+            </a:r>
+            <a:r>
+              <a:rPr sz="1300">
+                <a:solidFill>
                   <a:srgbClr val="7FE0A0"/>
                 </a:solidFill>
                 <a:latin typeface="Consolas"/>
               </a:rPr>
-              <a:t>      const payload = line.slice(6);</a:t>
+              <a:t>      if (payload === '[DONE]') { continue; }</a:t>
             </a:r>
           </a:p>
         </p:txBody>
@@ -12449,7 +13151,7 @@
                   <a:srgbClr val="DCECEF"/>
                 </a:solidFill>
               </a:rPr>
-              <a:t>slice(6) drops the first six characters ('data: '), leaving the JSON.</a:t>
+              <a:t>The server sends [DONE] at the very end - nothing to add, skip it.</a:t>
             </a:r>
           </a:p>
         </p:txBody>
@@ -12463,6 +13165,166 @@
 </file>
 
 <file path=ppt/slides/slide31.xml><?xml version="1.0" encoding="utf-8"?>
+<p:sld xmlns:a="http://schemas.openxmlformats.org/drawingml/2006/main" xmlns:p="http://schemas.openxmlformats.org/presentationml/2006/main" xmlns:r="http://schemas.openxmlformats.org/officeDocument/2006/relationships">
+  <p:cSld>
+    <p:spTree>
+      <p:nvGrpSpPr>
+        <p:cNvPr id="1" name=""/>
+        <p:cNvGrpSpPr/>
+        <p:nvPr/>
+      </p:nvGrpSpPr>
+      <p:grpSpPr/>
+      <p:sp>
+        <p:nvSpPr>
+          <p:cNvPr id="2" name="Title 1"/>
+          <p:cNvSpPr>
+            <a:spLocks noGrp="1"/>
+          </p:cNvSpPr>
+          <p:nvPr>
+            <p:ph type="title"/>
+          </p:nvPr>
+        </p:nvSpPr>
+        <p:spPr/>
+        <p:txBody>
+          <a:bodyPr/>
+          <a:lstStyle/>
+          <a:p>
+            <a:r>
+              <a:rPr sz="3800" b="1">
+                <a:solidFill>
+                  <a:srgbClr val="1F2A37"/>
+                </a:solidFill>
+              </a:rPr>
+              <a:t>JSON.parse()</a:t>
+            </a:r>
+          </a:p>
+        </p:txBody>
+      </p:sp>
+      <p:sp>
+        <p:nvSpPr>
+          <p:cNvPr id="3" name="TextBox 2"/>
+          <p:cNvSpPr txBox="1"/>
+          <p:nvPr/>
+        </p:nvSpPr>
+        <p:spPr>
+          <a:xfrm>
+            <a:off x="868680" y="502920"/>
+            <a:ext cx="5486400" cy="457200"/>
+          </a:xfrm>
+          <a:prstGeom prst="rect">
+            <a:avLst/>
+          </a:prstGeom>
+          <a:noFill/>
+        </p:spPr>
+        <p:txBody>
+          <a:bodyPr wrap="none">
+            <a:spAutoFit/>
+          </a:bodyPr>
+          <a:lstStyle/>
+          <a:p>
+            <a:r>
+              <a:rPr sz="1500" b="1">
+                <a:solidFill>
+                  <a:srgbClr val="01AEFD"/>
+                </a:solidFill>
+              </a:rPr>
+              <a:t>JAVASCRIPT</a:t>
+            </a:r>
+          </a:p>
+        </p:txBody>
+      </p:sp>
+      <p:sp>
+        <p:nvSpPr>
+          <p:cNvPr id="4" name="TextBox 3"/>
+          <p:cNvSpPr txBox="1"/>
+          <p:nvPr/>
+        </p:nvSpPr>
+        <p:spPr>
+          <a:xfrm>
+            <a:off x="822960" y="1828800"/>
+            <a:ext cx="10515600" cy="4206240"/>
+          </a:xfrm>
+          <a:prstGeom prst="rect">
+            <a:avLst/>
+          </a:prstGeom>
+          <a:noFill/>
+        </p:spPr>
+        <p:txBody>
+          <a:bodyPr wrap="square">
+            <a:spAutoFit/>
+          </a:bodyPr>
+          <a:lstStyle/>
+          <a:p>
+            <a:pPr>
+              <a:spcAft>
+                <a:spcPts val="1400"/>
+              </a:spcAft>
+            </a:pPr>
+            <a:r>
+              <a:rPr sz="2800">
+                <a:solidFill>
+                  <a:srgbClr val="01AEFD"/>
+                </a:solidFill>
+              </a:rPr>
+              <a:t>const piece = JSON.parse(payload);</a:t>
+            </a:r>
+          </a:p>
+          <a:p>
+            <a:pPr>
+              <a:spcAft>
+                <a:spcPts val="1400"/>
+              </a:spcAft>
+            </a:pPr>
+            <a:r>
+              <a:rPr sz="2400">
+                <a:solidFill>
+                  <a:srgbClr val="1F2A37"/>
+                </a:solidFill>
+              </a:rPr>
+              <a:t>• Turns JSON TEXT back into a JavaScript object (week 3) or list.</a:t>
+            </a:r>
+          </a:p>
+          <a:p>
+            <a:pPr>
+              <a:spcAft>
+                <a:spcPts val="1400"/>
+              </a:spcAft>
+            </a:pPr>
+            <a:r>
+              <a:rPr sz="2400">
+                <a:solidFill>
+                  <a:srgbClr val="1F2A37"/>
+                </a:solidFill>
+              </a:rPr>
+              <a:t>• The exact opposite of JSON.stringify (week 4), which made text FROM data.</a:t>
+            </a:r>
+          </a:p>
+          <a:p>
+            <a:pPr>
+              <a:spcAft>
+                <a:spcPts val="1400"/>
+              </a:spcAft>
+            </a:pPr>
+            <a:r>
+              <a:rPr sz="2400">
+                <a:solidFill>
+                  <a:srgbClr val="1F2A37"/>
+                </a:solidFill>
+              </a:rPr>
+              <a:t>• Each streamed piece arrives as text; parse it to read the .content.</a:t>
+            </a:r>
+          </a:p>
+        </p:txBody>
+      </p:sp>
+    </p:spTree>
+  </p:cSld>
+  <p:clrMapOvr>
+    <a:masterClrMapping/>
+  </p:clrMapOvr>
+</p:sld>
+</file>
+
+<file path=ppt/slides/slide32.xml><?xml version="1.0" encoding="utf-8"?>
 <p:sld xmlns:a="http://schemas.openxmlformats.org/drawingml/2006/main" xmlns:p="http://schemas.openxmlformats.org/presentationml/2006/main" xmlns:r="http://schemas.openxmlformats.org/officeDocument/2006/relationships">
   <p:cSld>
     <p:bg>
@@ -12508,7 +13370,7 @@
                   <a:srgbClr val="01AEFD"/>
                 </a:solidFill>
               </a:rPr>
-              <a:t>Type this into script.js   -   line 106</a:t>
+              <a:t>Type this into script.js   -   line 107</a:t>
             </a:r>
           </a:p>
         </p:txBody>
@@ -13227,11 +14089,36 @@
             <a:r>
               <a:rPr sz="1300">
                 <a:solidFill>
+                  <a:srgbClr val="6D8C97"/>
+                </a:solidFill>
+                <a:latin typeface="Consolas"/>
+              </a:rPr>
+              <a:t>      if (payload === '[DONE]') { continue; }</a:t>
+            </a:r>
+          </a:p>
+          <a:p>
+            <a:pPr>
+              <a:spcAft>
+                <a:spcPts val="0"/>
+              </a:spcAft>
+            </a:pPr>
+            <a:r>
+              <a:rPr sz="1300">
+                <a:solidFill>
+                  <a:srgbClr val="6D8C97"/>
+                </a:solidFill>
+                <a:latin typeface="Consolas"/>
+              </a:rPr>
+              <a:t> 107  </a:t>
+            </a:r>
+            <a:r>
+              <a:rPr sz="1300">
+                <a:solidFill>
                   <a:srgbClr val="7FE0A0"/>
                 </a:solidFill>
                 <a:latin typeface="Consolas"/>
               </a:rPr>
-              <a:t>      if (payload === '[DONE]') { continue; }</a:t>
+              <a:t>      const piece = JSON.parse(payload);</a:t>
             </a:r>
           </a:p>
         </p:txBody>
@@ -13264,167 +14151,7 @@
                   <a:srgbClr val="DCECEF"/>
                 </a:solidFill>
               </a:rPr>
-              <a:t>The server sends [DONE] at the very end - nothing to add, skip it.</a:t>
-            </a:r>
-          </a:p>
-        </p:txBody>
-      </p:sp>
-    </p:spTree>
-  </p:cSld>
-  <p:clrMapOvr>
-    <a:masterClrMapping/>
-  </p:clrMapOvr>
-</p:sld>
-</file>
-
-<file path=ppt/slides/slide32.xml><?xml version="1.0" encoding="utf-8"?>
-<p:sld xmlns:a="http://schemas.openxmlformats.org/drawingml/2006/main" xmlns:p="http://schemas.openxmlformats.org/presentationml/2006/main" xmlns:r="http://schemas.openxmlformats.org/officeDocument/2006/relationships">
-  <p:cSld>
-    <p:spTree>
-      <p:nvGrpSpPr>
-        <p:cNvPr id="1" name=""/>
-        <p:cNvGrpSpPr/>
-        <p:nvPr/>
-      </p:nvGrpSpPr>
-      <p:grpSpPr/>
-      <p:sp>
-        <p:nvSpPr>
-          <p:cNvPr id="2" name="Title 1"/>
-          <p:cNvSpPr>
-            <a:spLocks noGrp="1"/>
-          </p:cNvSpPr>
-          <p:nvPr>
-            <p:ph type="title"/>
-          </p:nvPr>
-        </p:nvSpPr>
-        <p:spPr/>
-        <p:txBody>
-          <a:bodyPr/>
-          <a:lstStyle/>
-          <a:p>
-            <a:r>
-              <a:rPr sz="3800" b="1">
-                <a:solidFill>
-                  <a:srgbClr val="1F2A37"/>
-                </a:solidFill>
-              </a:rPr>
-              <a:t>JSON.parse()</a:t>
-            </a:r>
-          </a:p>
-        </p:txBody>
-      </p:sp>
-      <p:sp>
-        <p:nvSpPr>
-          <p:cNvPr id="3" name="TextBox 2"/>
-          <p:cNvSpPr txBox="1"/>
-          <p:nvPr/>
-        </p:nvSpPr>
-        <p:spPr>
-          <a:xfrm>
-            <a:off x="868680" y="502920"/>
-            <a:ext cx="5486400" cy="457200"/>
-          </a:xfrm>
-          <a:prstGeom prst="rect">
-            <a:avLst/>
-          </a:prstGeom>
-          <a:noFill/>
-        </p:spPr>
-        <p:txBody>
-          <a:bodyPr wrap="none">
-            <a:spAutoFit/>
-          </a:bodyPr>
-          <a:lstStyle/>
-          <a:p>
-            <a:r>
-              <a:rPr sz="1500" b="1">
-                <a:solidFill>
-                  <a:srgbClr val="01AEFD"/>
-                </a:solidFill>
-              </a:rPr>
-              <a:t>JAVASCRIPT</a:t>
-            </a:r>
-          </a:p>
-        </p:txBody>
-      </p:sp>
-      <p:sp>
-        <p:nvSpPr>
-          <p:cNvPr id="4" name="TextBox 3"/>
-          <p:cNvSpPr txBox="1"/>
-          <p:nvPr/>
-        </p:nvSpPr>
-        <p:spPr>
-          <a:xfrm>
-            <a:off x="822960" y="1828800"/>
-            <a:ext cx="10515600" cy="4206240"/>
-          </a:xfrm>
-          <a:prstGeom prst="rect">
-            <a:avLst/>
-          </a:prstGeom>
-          <a:noFill/>
-        </p:spPr>
-        <p:txBody>
-          <a:bodyPr wrap="square">
-            <a:spAutoFit/>
-          </a:bodyPr>
-          <a:lstStyle/>
-          <a:p>
-            <a:pPr>
-              <a:spcAft>
-                <a:spcPts val="1400"/>
-              </a:spcAft>
-            </a:pPr>
-            <a:r>
-              <a:rPr sz="2800">
-                <a:solidFill>
-                  <a:srgbClr val="01AEFD"/>
-                </a:solidFill>
-              </a:rPr>
-              <a:t>const piece = JSON.parse(payload);</a:t>
-            </a:r>
-          </a:p>
-          <a:p>
-            <a:pPr>
-              <a:spcAft>
-                <a:spcPts val="1400"/>
-              </a:spcAft>
-            </a:pPr>
-            <a:r>
-              <a:rPr sz="2400">
-                <a:solidFill>
-                  <a:srgbClr val="1F2A37"/>
-                </a:solidFill>
-              </a:rPr>
-              <a:t>• Turns JSON TEXT back into a JavaScript object (week 3) or list.</a:t>
-            </a:r>
-          </a:p>
-          <a:p>
-            <a:pPr>
-              <a:spcAft>
-                <a:spcPts val="1400"/>
-              </a:spcAft>
-            </a:pPr>
-            <a:r>
-              <a:rPr sz="2400">
-                <a:solidFill>
-                  <a:srgbClr val="1F2A37"/>
-                </a:solidFill>
-              </a:rPr>
-              <a:t>• The exact opposite of JSON.stringify (week 4), which made text FROM data.</a:t>
-            </a:r>
-          </a:p>
-          <a:p>
-            <a:pPr>
-              <a:spcAft>
-                <a:spcPts val="1400"/>
-              </a:spcAft>
-            </a:pPr>
-            <a:r>
-              <a:rPr sz="2400">
-                <a:solidFill>
-                  <a:srgbClr val="1F2A37"/>
-                </a:solidFill>
-              </a:rPr>
-              <a:t>• Each streamed piece arrives as text; parse it to read the .content.</a:t>
+              <a:t>JSON.parse turns that JSON text into an object we can read.</a:t>
             </a:r>
           </a:p>
         </p:txBody>
@@ -13483,7 +14210,7 @@
                   <a:srgbClr val="01AEFD"/>
                 </a:solidFill>
               </a:rPr>
-              <a:t>Type this into script.js   -   line 107</a:t>
+              <a:t>Type this into script.js   -   line 108</a:t>
             </a:r>
           </a:p>
         </p:txBody>
@@ -14227,11 +14954,36 @@
             <a:r>
               <a:rPr sz="1300">
                 <a:solidFill>
+                  <a:srgbClr val="6D8C97"/>
+                </a:solidFill>
+                <a:latin typeface="Consolas"/>
+              </a:rPr>
+              <a:t>      const piece = JSON.parse(payload);</a:t>
+            </a:r>
+          </a:p>
+          <a:p>
+            <a:pPr>
+              <a:spcAft>
+                <a:spcPts val="0"/>
+              </a:spcAft>
+            </a:pPr>
+            <a:r>
+              <a:rPr sz="1300">
+                <a:solidFill>
+                  <a:srgbClr val="6D8C97"/>
+                </a:solidFill>
+                <a:latin typeface="Consolas"/>
+              </a:rPr>
+              <a:t> 108  </a:t>
+            </a:r>
+            <a:r>
+              <a:rPr sz="1300">
+                <a:solidFill>
                   <a:srgbClr val="7FE0A0"/>
                 </a:solidFill>
                 <a:latin typeface="Consolas"/>
               </a:rPr>
-              <a:t>      const piece = JSON.parse(payload);</a:t>
+              <a:t>      const bit = piece.choices[0].delta.content;</a:t>
             </a:r>
           </a:p>
         </p:txBody>
@@ -14264,7 +15016,7 @@
                   <a:srgbClr val="DCECEF"/>
                 </a:solidFill>
               </a:rPr>
-              <a:t>JSON.parse turns that JSON text into an object we can read.</a:t>
+              <a:t>Dig out this piece's new text: choices[0].delta.content.</a:t>
             </a:r>
           </a:p>
         </p:txBody>
@@ -14323,7 +15075,7 @@
                   <a:srgbClr val="01AEFD"/>
                 </a:solidFill>
               </a:rPr>
-              <a:t>Type this into script.js   -   line 108</a:t>
+              <a:t>Type this into script.js   -   line 109</a:t>
             </a:r>
           </a:p>
         </p:txBody>
@@ -15092,11 +15844,36 @@
             <a:r>
               <a:rPr sz="1300">
                 <a:solidFill>
+                  <a:srgbClr val="6D8C97"/>
+                </a:solidFill>
+                <a:latin typeface="Consolas"/>
+              </a:rPr>
+              <a:t>      const bit = piece.choices[0].delta.content;</a:t>
+            </a:r>
+          </a:p>
+          <a:p>
+            <a:pPr>
+              <a:spcAft>
+                <a:spcPts val="0"/>
+              </a:spcAft>
+            </a:pPr>
+            <a:r>
+              <a:rPr sz="1300">
+                <a:solidFill>
+                  <a:srgbClr val="6D8C97"/>
+                </a:solidFill>
+                <a:latin typeface="Consolas"/>
+              </a:rPr>
+              <a:t> 109  </a:t>
+            </a:r>
+            <a:r>
+              <a:rPr sz="1300">
+                <a:solidFill>
                   <a:srgbClr val="7FE0A0"/>
                 </a:solidFill>
                 <a:latin typeface="Consolas"/>
               </a:rPr>
-              <a:t>      const bit = piece.choices[0].delta.content;</a:t>
+              <a:t>      if (bit) { answer += bit; }</a:t>
             </a:r>
           </a:p>
         </p:txBody>
@@ -15129,7 +15906,7 @@
                   <a:srgbClr val="DCECEF"/>
                 </a:solidFill>
               </a:rPr>
-              <a:t>Dig out this piece's new text: choices[0].delta.content.</a:t>
+              <a:t>If there is text, add it to the growing answer.</a:t>
             </a:r>
           </a:p>
         </p:txBody>
@@ -15188,7 +15965,7 @@
                   <a:srgbClr val="01AEFD"/>
                 </a:solidFill>
               </a:rPr>
-              <a:t>Type this into script.js   -   line 109</a:t>
+              <a:t>Type this into script.js   -   line 110</a:t>
             </a:r>
           </a:p>
         </p:txBody>
@@ -15982,11 +16759,36 @@
             <a:r>
               <a:rPr sz="1300">
                 <a:solidFill>
+                  <a:srgbClr val="6D8C97"/>
+                </a:solidFill>
+                <a:latin typeface="Consolas"/>
+              </a:rPr>
+              <a:t>      if (bit) { answer += bit; }</a:t>
+            </a:r>
+          </a:p>
+          <a:p>
+            <a:pPr>
+              <a:spcAft>
+                <a:spcPts val="0"/>
+              </a:spcAft>
+            </a:pPr>
+            <a:r>
+              <a:rPr sz="1300">
+                <a:solidFill>
+                  <a:srgbClr val="6D8C97"/>
+                </a:solidFill>
+                <a:latin typeface="Consolas"/>
+              </a:rPr>
+              <a:t> 110  </a:t>
+            </a:r>
+            <a:r>
+              <a:rPr sz="1300">
+                <a:solidFill>
                   <a:srgbClr val="7FE0A0"/>
                 </a:solidFill>
                 <a:latin typeface="Consolas"/>
               </a:rPr>
-              <a:t>      if (bit) { answer += bit; }</a:t>
+              <a:t>    }</a:t>
             </a:r>
           </a:p>
         </p:txBody>
@@ -16019,7 +16821,7 @@
                   <a:srgbClr val="DCECEF"/>
                 </a:solidFill>
               </a:rPr>
-              <a:t>If there is text, add it to the growing answer.</a:t>
+              <a:t>Close the for loop.</a:t>
             </a:r>
           </a:p>
         </p:txBody>
@@ -16078,7 +16880,7 @@
                   <a:srgbClr val="01AEFD"/>
                 </a:solidFill>
               </a:rPr>
-              <a:t>Type this into script.js   -   line 110</a:t>
+              <a:t>Type this into script.js   -   line 111</a:t>
             </a:r>
           </a:p>
         </p:txBody>
@@ -16897,11 +17699,36 @@
             <a:r>
               <a:rPr sz="1300">
                 <a:solidFill>
+                  <a:srgbClr val="6D8C97"/>
+                </a:solidFill>
+                <a:latin typeface="Consolas"/>
+              </a:rPr>
+              <a:t>    }</a:t>
+            </a:r>
+          </a:p>
+          <a:p>
+            <a:pPr>
+              <a:spcAft>
+                <a:spcPts val="0"/>
+              </a:spcAft>
+            </a:pPr>
+            <a:r>
+              <a:rPr sz="1300">
+                <a:solidFill>
+                  <a:srgbClr val="6D8C97"/>
+                </a:solidFill>
+                <a:latin typeface="Consolas"/>
+              </a:rPr>
+              <a:t> 111  </a:t>
+            </a:r>
+            <a:r>
+              <a:rPr sz="1300">
+                <a:solidFill>
                   <a:srgbClr val="7FE0A0"/>
                 </a:solidFill>
                 <a:latin typeface="Consolas"/>
               </a:rPr>
-              <a:t>    }</a:t>
+              <a:t>  }</a:t>
             </a:r>
           </a:p>
         </p:txBody>
@@ -16934,7 +17761,7 @@
                   <a:srgbClr val="DCECEF"/>
                 </a:solidFill>
               </a:rPr>
-              <a:t>Close the for loop.</a:t>
+              <a:t>Close the while loop.</a:t>
             </a:r>
           </a:p>
         </p:txBody>
@@ -16993,7 +17820,7 @@
                   <a:srgbClr val="01AEFD"/>
                 </a:solidFill>
               </a:rPr>
-              <a:t>Type this into script.js   -   line 111</a:t>
+              <a:t>Type this into script.js   -   line 112</a:t>
             </a:r>
           </a:p>
         </p:txBody>
@@ -17837,11 +18664,36 @@
             <a:r>
               <a:rPr sz="1300">
                 <a:solidFill>
+                  <a:srgbClr val="6D8C97"/>
+                </a:solidFill>
+                <a:latin typeface="Consolas"/>
+              </a:rPr>
+              <a:t>  }</a:t>
+            </a:r>
+          </a:p>
+          <a:p>
+            <a:pPr>
+              <a:spcAft>
+                <a:spcPts val="0"/>
+              </a:spcAft>
+            </a:pPr>
+            <a:r>
+              <a:rPr sz="1300">
+                <a:solidFill>
+                  <a:srgbClr val="6D8C97"/>
+                </a:solidFill>
+                <a:latin typeface="Consolas"/>
+              </a:rPr>
+              <a:t> 112  </a:t>
+            </a:r>
+            <a:r>
+              <a:rPr sz="1300">
+                <a:solidFill>
                   <a:srgbClr val="7FE0A0"/>
                 </a:solidFill>
                 <a:latin typeface="Consolas"/>
               </a:rPr>
-              <a:t>  }</a:t>
+              <a:t>  return answer;</a:t>
             </a:r>
           </a:p>
         </p:txBody>
@@ -17874,7 +18726,7 @@
                   <a:srgbClr val="DCECEF"/>
                 </a:solidFill>
               </a:rPr>
-              <a:t>Close the while loop.</a:t>
+              <a:t>Hand back the whole answer once the stream ends.</a:t>
             </a:r>
           </a:p>
         </p:txBody>
@@ -17933,7 +18785,7 @@
                   <a:srgbClr val="01AEFD"/>
                 </a:solidFill>
               </a:rPr>
-              <a:t>Type this into script.js   -   line 112</a:t>
+              <a:t>Type this into script.js   -   line 113</a:t>
             </a:r>
           </a:p>
         </p:txBody>
@@ -18802,11 +19654,36 @@
             <a:r>
               <a:rPr sz="1300">
                 <a:solidFill>
+                  <a:srgbClr val="6D8C97"/>
+                </a:solidFill>
+                <a:latin typeface="Consolas"/>
+              </a:rPr>
+              <a:t>  return answer;</a:t>
+            </a:r>
+          </a:p>
+          <a:p>
+            <a:pPr>
+              <a:spcAft>
+                <a:spcPts val="0"/>
+              </a:spcAft>
+            </a:pPr>
+            <a:r>
+              <a:rPr sz="1300">
+                <a:solidFill>
+                  <a:srgbClr val="6D8C97"/>
+                </a:solidFill>
+                <a:latin typeface="Consolas"/>
+              </a:rPr>
+              <a:t> 113  </a:t>
+            </a:r>
+            <a:r>
+              <a:rPr sz="1300">
+                <a:solidFill>
                   <a:srgbClr val="7FE0A0"/>
                 </a:solidFill>
                 <a:latin typeface="Consolas"/>
               </a:rPr>
-              <a:t>  return answer;</a:t>
+              <a:t>}</a:t>
             </a:r>
           </a:p>
         </p:txBody>
@@ -18839,7 +19716,7 @@
                   <a:srgbClr val="DCECEF"/>
                 </a:solidFill>
               </a:rPr>
-              <a:t>Hand back the whole answer once the stream ends.</a:t>
+              <a:t>Close readStream.</a:t>
             </a:r>
           </a:p>
         </p:txBody>
@@ -18898,7 +19775,7 @@
                   <a:srgbClr val="01AEFD"/>
                 </a:solidFill>
               </a:rPr>
-              <a:t>Type this into script.js   -   line 113</a:t>
+              <a:t>All together in script.js</a:t>
             </a:r>
           </a:p>
         </p:txBody>
@@ -18942,7 +19819,7 @@
             <a:r>
               <a:rPr sz="1300">
                 <a:solidFill>
-                  <a:srgbClr val="6D8C97"/>
+                  <a:srgbClr val="7FE0A0"/>
                 </a:solidFill>
                 <a:latin typeface="Consolas"/>
               </a:rPr>
@@ -18967,7 +19844,7 @@
             <a:r>
               <a:rPr sz="1300">
                 <a:solidFill>
-                  <a:srgbClr val="6D8C97"/>
+                  <a:srgbClr val="7FE0A0"/>
                 </a:solidFill>
                 <a:latin typeface="Consolas"/>
               </a:rPr>
@@ -18992,7 +19869,7 @@
             <a:r>
               <a:rPr sz="1300">
                 <a:solidFill>
-                  <a:srgbClr val="6D8C97"/>
+                  <a:srgbClr val="7FE0A0"/>
                 </a:solidFill>
                 <a:latin typeface="Consolas"/>
               </a:rPr>
@@ -19017,7 +19894,7 @@
             <a:r>
               <a:rPr sz="1300">
                 <a:solidFill>
-                  <a:srgbClr val="6D8C97"/>
+                  <a:srgbClr val="7FE0A0"/>
                 </a:solidFill>
                 <a:latin typeface="Consolas"/>
               </a:rPr>
@@ -19042,7 +19919,7 @@
             <a:r>
               <a:rPr sz="1300">
                 <a:solidFill>
-                  <a:srgbClr val="6D8C97"/>
+                  <a:srgbClr val="7FE0A0"/>
                 </a:solidFill>
                 <a:latin typeface="Consolas"/>
               </a:rPr>
@@ -19067,7 +19944,7 @@
             <a:r>
               <a:rPr sz="1300">
                 <a:solidFill>
-                  <a:srgbClr val="6D8C97"/>
+                  <a:srgbClr val="7FE0A0"/>
                 </a:solidFill>
                 <a:latin typeface="Consolas"/>
               </a:rPr>
@@ -19092,7 +19969,7 @@
             <a:r>
               <a:rPr sz="1300">
                 <a:solidFill>
-                  <a:srgbClr val="6D8C97"/>
+                  <a:srgbClr val="7FE0A0"/>
                 </a:solidFill>
                 <a:latin typeface="Consolas"/>
               </a:rPr>
@@ -19117,7 +19994,7 @@
             <a:r>
               <a:rPr sz="1300">
                 <a:solidFill>
-                  <a:srgbClr val="6D8C97"/>
+                  <a:srgbClr val="7FE0A0"/>
                 </a:solidFill>
                 <a:latin typeface="Consolas"/>
               </a:rPr>
@@ -19142,7 +20019,7 @@
             <a:r>
               <a:rPr sz="1300">
                 <a:solidFill>
-                  <a:srgbClr val="6D8C97"/>
+                  <a:srgbClr val="7FE0A0"/>
                 </a:solidFill>
                 <a:latin typeface="Consolas"/>
               </a:rPr>
@@ -19167,7 +20044,7 @@
             <a:r>
               <a:rPr sz="1300">
                 <a:solidFill>
-                  <a:srgbClr val="6D8C97"/>
+                  <a:srgbClr val="7FE0A0"/>
                 </a:solidFill>
                 <a:latin typeface="Consolas"/>
               </a:rPr>
@@ -19192,7 +20069,7 @@
             <a:r>
               <a:rPr sz="1300">
                 <a:solidFill>
-                  <a:srgbClr val="6D8C97"/>
+                  <a:srgbClr val="7FE0A0"/>
                 </a:solidFill>
                 <a:latin typeface="Consolas"/>
               </a:rPr>
@@ -19217,7 +20094,7 @@
             <a:r>
               <a:rPr sz="1300">
                 <a:solidFill>
-                  <a:srgbClr val="6D8C97"/>
+                  <a:srgbClr val="7FE0A0"/>
                 </a:solidFill>
                 <a:latin typeface="Consolas"/>
               </a:rPr>
@@ -19242,7 +20119,7 @@
             <a:r>
               <a:rPr sz="1300">
                 <a:solidFill>
-                  <a:srgbClr val="6D8C97"/>
+                  <a:srgbClr val="7FE0A0"/>
                 </a:solidFill>
                 <a:latin typeface="Consolas"/>
               </a:rPr>
@@ -19267,7 +20144,7 @@
             <a:r>
               <a:rPr sz="1300">
                 <a:solidFill>
-                  <a:srgbClr val="6D8C97"/>
+                  <a:srgbClr val="7FE0A0"/>
                 </a:solidFill>
                 <a:latin typeface="Consolas"/>
               </a:rPr>
@@ -19292,7 +20169,7 @@
             <a:r>
               <a:rPr sz="1300">
                 <a:solidFill>
-                  <a:srgbClr val="6D8C97"/>
+                  <a:srgbClr val="7FE0A0"/>
                 </a:solidFill>
                 <a:latin typeface="Consolas"/>
               </a:rPr>
@@ -19317,7 +20194,7 @@
             <a:r>
               <a:rPr sz="1300">
                 <a:solidFill>
-                  <a:srgbClr val="6D8C97"/>
+                  <a:srgbClr val="7FE0A0"/>
                 </a:solidFill>
                 <a:latin typeface="Consolas"/>
               </a:rPr>
@@ -19342,7 +20219,7 @@
             <a:r>
               <a:rPr sz="1300">
                 <a:solidFill>
-                  <a:srgbClr val="6D8C97"/>
+                  <a:srgbClr val="7FE0A0"/>
                 </a:solidFill>
                 <a:latin typeface="Consolas"/>
               </a:rPr>
@@ -19367,7 +20244,7 @@
             <a:r>
               <a:rPr sz="1300">
                 <a:solidFill>
-                  <a:srgbClr val="6D8C97"/>
+                  <a:srgbClr val="7FE0A0"/>
                 </a:solidFill>
                 <a:latin typeface="Consolas"/>
               </a:rPr>
@@ -19392,7 +20269,7 @@
             <a:r>
               <a:rPr sz="1300">
                 <a:solidFill>
-                  <a:srgbClr val="6D8C97"/>
+                  <a:srgbClr val="7FE0A0"/>
                 </a:solidFill>
                 <a:latin typeface="Consolas"/>
               </a:rPr>
@@ -19417,7 +20294,7 @@
             <a:r>
               <a:rPr sz="1300">
                 <a:solidFill>
-                  <a:srgbClr val="6D8C97"/>
+                  <a:srgbClr val="7FE0A0"/>
                 </a:solidFill>
                 <a:latin typeface="Consolas"/>
               </a:rPr>
@@ -19442,7 +20319,7 @@
             <a:r>
               <a:rPr sz="1300">
                 <a:solidFill>
-                  <a:srgbClr val="6D8C97"/>
+                  <a:srgbClr val="7FE0A0"/>
                 </a:solidFill>
                 <a:latin typeface="Consolas"/>
               </a:rPr>
@@ -19467,7 +20344,7 @@
             <a:r>
               <a:rPr sz="1300">
                 <a:solidFill>
-                  <a:srgbClr val="6D8C97"/>
+                  <a:srgbClr val="7FE0A0"/>
                 </a:solidFill>
                 <a:latin typeface="Consolas"/>
               </a:rPr>
@@ -19492,7 +20369,7 @@
             <a:r>
               <a:rPr sz="1300">
                 <a:solidFill>
-                  <a:srgbClr val="6D8C97"/>
+                  <a:srgbClr val="7FE0A0"/>
                 </a:solidFill>
                 <a:latin typeface="Consolas"/>
               </a:rPr>
@@ -19517,7 +20394,7 @@
             <a:r>
               <a:rPr sz="1300">
                 <a:solidFill>
-                  <a:srgbClr val="6D8C97"/>
+                  <a:srgbClr val="7FE0A0"/>
                 </a:solidFill>
                 <a:latin typeface="Consolas"/>
               </a:rPr>
@@ -19542,7 +20419,7 @@
             <a:r>
               <a:rPr sz="1300">
                 <a:solidFill>
-                  <a:srgbClr val="6D8C97"/>
+                  <a:srgbClr val="7FE0A0"/>
                 </a:solidFill>
                 <a:latin typeface="Consolas"/>
               </a:rPr>
@@ -19567,7 +20444,7 @@
             <a:r>
               <a:rPr sz="1300">
                 <a:solidFill>
-                  <a:srgbClr val="6D8C97"/>
+                  <a:srgbClr val="7FE0A0"/>
                 </a:solidFill>
                 <a:latin typeface="Consolas"/>
               </a:rPr>
@@ -19592,7 +20469,7 @@
             <a:r>
               <a:rPr sz="1300">
                 <a:solidFill>
-                  <a:srgbClr val="6D8C97"/>
+                  <a:srgbClr val="7FE0A0"/>
                 </a:solidFill>
                 <a:latin typeface="Consolas"/>
               </a:rPr>
@@ -19617,7 +20494,7 @@
             <a:r>
               <a:rPr sz="1300">
                 <a:solidFill>
-                  <a:srgbClr val="6D8C97"/>
+                  <a:srgbClr val="7FE0A0"/>
                 </a:solidFill>
                 <a:latin typeface="Consolas"/>
               </a:rPr>
@@ -19642,7 +20519,7 @@
             <a:r>
               <a:rPr sz="1300">
                 <a:solidFill>
-                  <a:srgbClr val="6D8C97"/>
+                  <a:srgbClr val="7FE0A0"/>
                 </a:solidFill>
                 <a:latin typeface="Consolas"/>
               </a:rPr>
@@ -19667,7 +20544,7 @@
             <a:r>
               <a:rPr sz="1300">
                 <a:solidFill>
-                  <a:srgbClr val="6D8C97"/>
+                  <a:srgbClr val="7FE0A0"/>
                 </a:solidFill>
                 <a:latin typeface="Consolas"/>
               </a:rPr>
@@ -19692,7 +20569,7 @@
             <a:r>
               <a:rPr sz="1300">
                 <a:solidFill>
-                  <a:srgbClr val="6D8C97"/>
+                  <a:srgbClr val="7FE0A0"/>
                 </a:solidFill>
                 <a:latin typeface="Consolas"/>
               </a:rPr>
@@ -19717,7 +20594,7 @@
             <a:r>
               <a:rPr sz="1300">
                 <a:solidFill>
-                  <a:srgbClr val="6D8C97"/>
+                  <a:srgbClr val="7FE0A0"/>
                 </a:solidFill>
                 <a:latin typeface="Consolas"/>
               </a:rPr>
@@ -19742,7 +20619,7 @@
             <a:r>
               <a:rPr sz="1300">
                 <a:solidFill>
-                  <a:srgbClr val="6D8C97"/>
+                  <a:srgbClr val="7FE0A0"/>
                 </a:solidFill>
                 <a:latin typeface="Consolas"/>
               </a:rPr>
@@ -19767,7 +20644,7 @@
             <a:r>
               <a:rPr sz="1300">
                 <a:solidFill>
-                  <a:srgbClr val="6D8C97"/>
+                  <a:srgbClr val="7FE0A0"/>
                 </a:solidFill>
                 <a:latin typeface="Consolas"/>
               </a:rPr>
@@ -19829,7 +20706,7 @@
                   <a:srgbClr val="DCECEF"/>
                 </a:solidFill>
               </a:rPr>
-              <a:t>Close readStream.</a:t>
+              <a:t>That is the whole piece. Check yours looks the same before moving on.</a:t>
             </a:r>
           </a:p>
         </p:txBody>
@@ -19972,14 +20849,6 @@
 <file path=ppt/slides/slide40.xml><?xml version="1.0" encoding="utf-8"?>
 <p:sld xmlns:a="http://schemas.openxmlformats.org/drawingml/2006/main" xmlns:p="http://schemas.openxmlformats.org/presentationml/2006/main" xmlns:r="http://schemas.openxmlformats.org/officeDocument/2006/relationships">
   <p:cSld>
-    <p:bg>
-      <p:bgPr>
-        <a:solidFill>
-          <a:srgbClr val="102127"/>
-        </a:solidFill>
-        <a:effectLst/>
-      </p:bgPr>
-    </p:bg>
     <p:spTree>
       <p:nvGrpSpPr>
         <p:cNvPr id="1" name=""/>
@@ -19989,14 +20858,40 @@
       <p:grpSpPr/>
       <p:sp>
         <p:nvSpPr>
-          <p:cNvPr id="2" name="TextBox 1"/>
+          <p:cNvPr id="2" name="Title 1"/>
+          <p:cNvSpPr>
+            <a:spLocks noGrp="1"/>
+          </p:cNvSpPr>
+          <p:nvPr>
+            <p:ph type="title"/>
+          </p:nvPr>
+        </p:nvSpPr>
+        <p:spPr/>
+        <p:txBody>
+          <a:bodyPr/>
+          <a:lstStyle/>
+          <a:p>
+            <a:r>
+              <a:rPr sz="3800" b="1">
+                <a:solidFill>
+                  <a:srgbClr val="1F2A37"/>
+                </a:solidFill>
+              </a:rPr>
+              <a:t>JSON.parse(text)  turns text into...?</a:t>
+            </a:r>
+          </a:p>
+        </p:txBody>
+      </p:sp>
+      <p:sp>
+        <p:nvSpPr>
+          <p:cNvPr id="3" name="TextBox 2"/>
           <p:cNvSpPr txBox="1"/>
           <p:nvPr/>
         </p:nvSpPr>
         <p:spPr>
           <a:xfrm>
-            <a:off x="502920" y="274320"/>
-            <a:ext cx="11155680" cy="548640"/>
+            <a:off x="868680" y="502920"/>
+            <a:ext cx="5486400" cy="457200"/>
           </a:xfrm>
           <a:prstGeom prst="rect">
             <a:avLst/>
@@ -20010,910 +20905,12 @@
           <a:lstStyle/>
           <a:p>
             <a:r>
-              <a:rPr sz="2200" b="1">
+              <a:rPr sz="1500" b="1">
                 <a:solidFill>
                   <a:srgbClr val="01AEFD"/>
                 </a:solidFill>
               </a:rPr>
-              <a:t>All together in script.js</a:t>
-            </a:r>
-          </a:p>
-        </p:txBody>
-      </p:sp>
-      <p:sp>
-        <p:nvSpPr>
-          <p:cNvPr id="3" name="TextBox 2"/>
-          <p:cNvSpPr txBox="1"/>
-          <p:nvPr/>
-        </p:nvSpPr>
-        <p:spPr>
-          <a:xfrm>
-            <a:off x="502920" y="960120"/>
-            <a:ext cx="11155680" cy="4297680"/>
-          </a:xfrm>
-          <a:prstGeom prst="rect">
-            <a:avLst/>
-          </a:prstGeom>
-          <a:noFill/>
-        </p:spPr>
-        <p:txBody>
-          <a:bodyPr wrap="none">
-            <a:spAutoFit/>
-          </a:bodyPr>
-          <a:lstStyle/>
-          <a:p>
-            <a:pPr>
-              <a:spcAft>
-                <a:spcPts val="0"/>
-              </a:spcAft>
-            </a:pPr>
-            <a:r>
-              <a:rPr sz="1300">
-                <a:solidFill>
-                  <a:srgbClr val="6D8C97"/>
-                </a:solidFill>
-                <a:latin typeface="Consolas"/>
-              </a:rPr>
-              <a:t>  79  </a:t>
-            </a:r>
-            <a:r>
-              <a:rPr sz="1300">
-                <a:solidFill>
-                  <a:srgbClr val="7FE0A0"/>
-                </a:solidFill>
-                <a:latin typeface="Consolas"/>
-              </a:rPr>
-              <a:t> </a:t>
-            </a:r>
-          </a:p>
-          <a:p>
-            <a:pPr>
-              <a:spcAft>
-                <a:spcPts val="0"/>
-              </a:spcAft>
-            </a:pPr>
-            <a:r>
-              <a:rPr sz="1300">
-                <a:solidFill>
-                  <a:srgbClr val="6D8C97"/>
-                </a:solidFill>
-                <a:latin typeface="Consolas"/>
-              </a:rPr>
-              <a:t>  80  </a:t>
-            </a:r>
-            <a:r>
-              <a:rPr sz="1300">
-                <a:solidFill>
-                  <a:srgbClr val="7FE0A0"/>
-                </a:solidFill>
-                <a:latin typeface="Consolas"/>
-              </a:rPr>
-              <a:t>// Week 10: with stream:true the answer arrives in pieces while it is still</a:t>
-            </a:r>
-          </a:p>
-          <a:p>
-            <a:pPr>
-              <a:spcAft>
-                <a:spcPts val="0"/>
-              </a:spcAft>
-            </a:pPr>
-            <a:r>
-              <a:rPr sz="1300">
-                <a:solidFill>
-                  <a:srgbClr val="6D8C97"/>
-                </a:solidFill>
-                <a:latin typeface="Consolas"/>
-              </a:rPr>
-              <a:t>  81  </a:t>
-            </a:r>
-            <a:r>
-              <a:rPr sz="1300">
-                <a:solidFill>
-                  <a:srgbClr val="7FE0A0"/>
-                </a:solidFill>
-                <a:latin typeface="Consolas"/>
-              </a:rPr>
-              <a:t>// being written. Same words, same total time - they just start sooner.</a:t>
-            </a:r>
-          </a:p>
-          <a:p>
-            <a:pPr>
-              <a:spcAft>
-                <a:spcPts val="0"/>
-              </a:spcAft>
-            </a:pPr>
-            <a:r>
-              <a:rPr sz="1300">
-                <a:solidFill>
-                  <a:srgbClr val="6D8C97"/>
-                </a:solidFill>
-                <a:latin typeface="Consolas"/>
-              </a:rPr>
-              <a:t>  82  </a:t>
-            </a:r>
-            <a:r>
-              <a:rPr sz="1300">
-                <a:solidFill>
-                  <a:srgbClr val="7FE0A0"/>
-                </a:solidFill>
-                <a:latin typeface="Consolas"/>
-              </a:rPr>
-              <a:t>//</a:t>
-            </a:r>
-          </a:p>
-          <a:p>
-            <a:pPr>
-              <a:spcAft>
-                <a:spcPts val="0"/>
-              </a:spcAft>
-            </a:pPr>
-            <a:r>
-              <a:rPr sz="1300">
-                <a:solidFill>
-                  <a:srgbClr val="6D8C97"/>
-                </a:solidFill>
-                <a:latin typeface="Consolas"/>
-              </a:rPr>
-              <a:t>  83  </a:t>
-            </a:r>
-            <a:r>
-              <a:rPr sz="1300">
-                <a:solidFill>
-                  <a:srgbClr val="7FE0A0"/>
-                </a:solidFill>
-                <a:latin typeface="Consolas"/>
-              </a:rPr>
-              <a:t>// The pieces look like this, one per line:</a:t>
-            </a:r>
-          </a:p>
-          <a:p>
-            <a:pPr>
-              <a:spcAft>
-                <a:spcPts val="0"/>
-              </a:spcAft>
-            </a:pPr>
-            <a:r>
-              <a:rPr sz="1300">
-                <a:solidFill>
-                  <a:srgbClr val="6D8C97"/>
-                </a:solidFill>
-                <a:latin typeface="Consolas"/>
-              </a:rPr>
-              <a:t>  84  </a:t>
-            </a:r>
-            <a:r>
-              <a:rPr sz="1300">
-                <a:solidFill>
-                  <a:srgbClr val="7FE0A0"/>
-                </a:solidFill>
-                <a:latin typeface="Consolas"/>
-              </a:rPr>
-              <a:t>//   data: {"choices":[{"delta":{"content":"Hel"}}]}</a:t>
-            </a:r>
-          </a:p>
-          <a:p>
-            <a:pPr>
-              <a:spcAft>
-                <a:spcPts val="0"/>
-              </a:spcAft>
-            </a:pPr>
-            <a:r>
-              <a:rPr sz="1300">
-                <a:solidFill>
-                  <a:srgbClr val="6D8C97"/>
-                </a:solidFill>
-                <a:latin typeface="Consolas"/>
-              </a:rPr>
-              <a:t>  85  </a:t>
-            </a:r>
-            <a:r>
-              <a:rPr sz="1300">
-                <a:solidFill>
-                  <a:srgbClr val="7FE0A0"/>
-                </a:solidFill>
-                <a:latin typeface="Consolas"/>
-              </a:rPr>
-              <a:t>//   data: [DONE]</a:t>
-            </a:r>
-          </a:p>
-          <a:p>
-            <a:pPr>
-              <a:spcAft>
-                <a:spcPts val="0"/>
-              </a:spcAft>
-            </a:pPr>
-            <a:r>
-              <a:rPr sz="1300">
-                <a:solidFill>
-                  <a:srgbClr val="6D8C97"/>
-                </a:solidFill>
-                <a:latin typeface="Consolas"/>
-              </a:rPr>
-              <a:t>  86  </a:t>
-            </a:r>
-            <a:r>
-              <a:rPr sz="1300">
-                <a:solidFill>
-                  <a:srgbClr val="7FE0A0"/>
-                </a:solidFill>
-                <a:latin typeface="Consolas"/>
-              </a:rPr>
-              <a:t>async function readStream(res) {</a:t>
-            </a:r>
-          </a:p>
-          <a:p>
-            <a:pPr>
-              <a:spcAft>
-                <a:spcPts val="0"/>
-              </a:spcAft>
-            </a:pPr>
-            <a:r>
-              <a:rPr sz="1300">
-                <a:solidFill>
-                  <a:srgbClr val="6D8C97"/>
-                </a:solidFill>
-                <a:latin typeface="Consolas"/>
-              </a:rPr>
-              <a:t>  87  </a:t>
-            </a:r>
-            <a:r>
-              <a:rPr sz="1300">
-                <a:solidFill>
-                  <a:srgbClr val="7FE0A0"/>
-                </a:solidFill>
-                <a:latin typeface="Consolas"/>
-              </a:rPr>
-              <a:t>  const reader = res.body.getReader();</a:t>
-            </a:r>
-          </a:p>
-          <a:p>
-            <a:pPr>
-              <a:spcAft>
-                <a:spcPts val="0"/>
-              </a:spcAft>
-            </a:pPr>
-            <a:r>
-              <a:rPr sz="1300">
-                <a:solidFill>
-                  <a:srgbClr val="6D8C97"/>
-                </a:solidFill>
-                <a:latin typeface="Consolas"/>
-              </a:rPr>
-              <a:t>  88  </a:t>
-            </a:r>
-            <a:r>
-              <a:rPr sz="1300">
-                <a:solidFill>
-                  <a:srgbClr val="7FE0A0"/>
-                </a:solidFill>
-                <a:latin typeface="Consolas"/>
-              </a:rPr>
-              <a:t>  const decoder = new TextDecoder();</a:t>
-            </a:r>
-          </a:p>
-          <a:p>
-            <a:pPr>
-              <a:spcAft>
-                <a:spcPts val="0"/>
-              </a:spcAft>
-            </a:pPr>
-            <a:r>
-              <a:rPr sz="1300">
-                <a:solidFill>
-                  <a:srgbClr val="6D8C97"/>
-                </a:solidFill>
-                <a:latin typeface="Consolas"/>
-              </a:rPr>
-              <a:t>  89  </a:t>
-            </a:r>
-            <a:r>
-              <a:rPr sz="1300">
-                <a:solidFill>
-                  <a:srgbClr val="7FE0A0"/>
-                </a:solidFill>
-                <a:latin typeface="Consolas"/>
-              </a:rPr>
-              <a:t>  let buffer = '';       // a piece can be cut in half mid-arrival</a:t>
-            </a:r>
-          </a:p>
-          <a:p>
-            <a:pPr>
-              <a:spcAft>
-                <a:spcPts val="0"/>
-              </a:spcAft>
-            </a:pPr>
-            <a:r>
-              <a:rPr sz="1300">
-                <a:solidFill>
-                  <a:srgbClr val="6D8C97"/>
-                </a:solidFill>
-                <a:latin typeface="Consolas"/>
-              </a:rPr>
-              <a:t>  90  </a:t>
-            </a:r>
-            <a:r>
-              <a:rPr sz="1300">
-                <a:solidFill>
-                  <a:srgbClr val="7FE0A0"/>
-                </a:solidFill>
-                <a:latin typeface="Consolas"/>
-              </a:rPr>
-              <a:t>  let answer = '';</a:t>
-            </a:r>
-          </a:p>
-          <a:p>
-            <a:pPr>
-              <a:spcAft>
-                <a:spcPts val="0"/>
-              </a:spcAft>
-            </a:pPr>
-            <a:r>
-              <a:rPr sz="1300">
-                <a:solidFill>
-                  <a:srgbClr val="6D8C97"/>
-                </a:solidFill>
-                <a:latin typeface="Consolas"/>
-              </a:rPr>
-              <a:t>  91  </a:t>
-            </a:r>
-            <a:r>
-              <a:rPr sz="1300">
-                <a:solidFill>
-                  <a:srgbClr val="7FE0A0"/>
-                </a:solidFill>
-                <a:latin typeface="Consolas"/>
-              </a:rPr>
-              <a:t> </a:t>
-            </a:r>
-          </a:p>
-          <a:p>
-            <a:pPr>
-              <a:spcAft>
-                <a:spcPts val="0"/>
-              </a:spcAft>
-            </a:pPr>
-            <a:r>
-              <a:rPr sz="1300">
-                <a:solidFill>
-                  <a:srgbClr val="6D8C97"/>
-                </a:solidFill>
-                <a:latin typeface="Consolas"/>
-              </a:rPr>
-              <a:t>  92  </a:t>
-            </a:r>
-            <a:r>
-              <a:rPr sz="1300">
-                <a:solidFill>
-                  <a:srgbClr val="7FE0A0"/>
-                </a:solidFill>
-                <a:latin typeface="Consolas"/>
-              </a:rPr>
-              <a:t>  while (true) {</a:t>
-            </a:r>
-          </a:p>
-          <a:p>
-            <a:pPr>
-              <a:spcAft>
-                <a:spcPts val="0"/>
-              </a:spcAft>
-            </a:pPr>
-            <a:r>
-              <a:rPr sz="1300">
-                <a:solidFill>
-                  <a:srgbClr val="6D8C97"/>
-                </a:solidFill>
-                <a:latin typeface="Consolas"/>
-              </a:rPr>
-              <a:t>  93  </a:t>
-            </a:r>
-            <a:r>
-              <a:rPr sz="1300">
-                <a:solidFill>
-                  <a:srgbClr val="7FE0A0"/>
-                </a:solidFill>
-                <a:latin typeface="Consolas"/>
-              </a:rPr>
-              <a:t>    const chunk = await reader.read();</a:t>
-            </a:r>
-          </a:p>
-          <a:p>
-            <a:pPr>
-              <a:spcAft>
-                <a:spcPts val="0"/>
-              </a:spcAft>
-            </a:pPr>
-            <a:r>
-              <a:rPr sz="1300">
-                <a:solidFill>
-                  <a:srgbClr val="6D8C97"/>
-                </a:solidFill>
-                <a:latin typeface="Consolas"/>
-              </a:rPr>
-              <a:t>  94  </a:t>
-            </a:r>
-            <a:r>
-              <a:rPr sz="1300">
-                <a:solidFill>
-                  <a:srgbClr val="7FE0A0"/>
-                </a:solidFill>
-                <a:latin typeface="Consolas"/>
-              </a:rPr>
-              <a:t>    if (chunk.done) { break; }</a:t>
-            </a:r>
-          </a:p>
-          <a:p>
-            <a:pPr>
-              <a:spcAft>
-                <a:spcPts val="0"/>
-              </a:spcAft>
-            </a:pPr>
-            <a:r>
-              <a:rPr sz="1300">
-                <a:solidFill>
-                  <a:srgbClr val="6D8C97"/>
-                </a:solidFill>
-                <a:latin typeface="Consolas"/>
-              </a:rPr>
-              <a:t>  95  </a:t>
-            </a:r>
-            <a:r>
-              <a:rPr sz="1300">
-                <a:solidFill>
-                  <a:srgbClr val="7FE0A0"/>
-                </a:solidFill>
-                <a:latin typeface="Consolas"/>
-              </a:rPr>
-              <a:t>    buffer += decoder.decode(chunk.value, { stream: true });</a:t>
-            </a:r>
-          </a:p>
-          <a:p>
-            <a:pPr>
-              <a:spcAft>
-                <a:spcPts val="0"/>
-              </a:spcAft>
-            </a:pPr>
-            <a:r>
-              <a:rPr sz="1300">
-                <a:solidFill>
-                  <a:srgbClr val="6D8C97"/>
-                </a:solidFill>
-                <a:latin typeface="Consolas"/>
-              </a:rPr>
-              <a:t>  96  </a:t>
-            </a:r>
-            <a:r>
-              <a:rPr sz="1300">
-                <a:solidFill>
-                  <a:srgbClr val="7FE0A0"/>
-                </a:solidFill>
-                <a:latin typeface="Consolas"/>
-              </a:rPr>
-              <a:t> </a:t>
-            </a:r>
-          </a:p>
-          <a:p>
-            <a:pPr>
-              <a:spcAft>
-                <a:spcPts val="0"/>
-              </a:spcAft>
-            </a:pPr>
-            <a:r>
-              <a:rPr sz="1300">
-                <a:solidFill>
-                  <a:srgbClr val="6D8C97"/>
-                </a:solidFill>
-                <a:latin typeface="Consolas"/>
-              </a:rPr>
-              <a:t>  97  </a:t>
-            </a:r>
-            <a:r>
-              <a:rPr sz="1300">
-                <a:solidFill>
-                  <a:srgbClr val="7FE0A0"/>
-                </a:solidFill>
-                <a:latin typeface="Consolas"/>
-              </a:rPr>
-              <a:t>    // Complete pieces are separated by a blank line. Keep the last,</a:t>
-            </a:r>
-          </a:p>
-          <a:p>
-            <a:pPr>
-              <a:spcAft>
-                <a:spcPts val="0"/>
-              </a:spcAft>
-            </a:pPr>
-            <a:r>
-              <a:rPr sz="1300">
-                <a:solidFill>
-                  <a:srgbClr val="6D8C97"/>
-                </a:solidFill>
-                <a:latin typeface="Consolas"/>
-              </a:rPr>
-              <a:t>  98  </a:t>
-            </a:r>
-            <a:r>
-              <a:rPr sz="1300">
-                <a:solidFill>
-                  <a:srgbClr val="7FE0A0"/>
-                </a:solidFill>
-                <a:latin typeface="Consolas"/>
-              </a:rPr>
-              <a:t>    // possibly unfinished, piece in the buffer for the next round.</a:t>
-            </a:r>
-          </a:p>
-          <a:p>
-            <a:pPr>
-              <a:spcAft>
-                <a:spcPts val="0"/>
-              </a:spcAft>
-            </a:pPr>
-            <a:r>
-              <a:rPr sz="1300">
-                <a:solidFill>
-                  <a:srgbClr val="6D8C97"/>
-                </a:solidFill>
-                <a:latin typeface="Consolas"/>
-              </a:rPr>
-              <a:t>  99  </a:t>
-            </a:r>
-            <a:r>
-              <a:rPr sz="1300">
-                <a:solidFill>
-                  <a:srgbClr val="7FE0A0"/>
-                </a:solidFill>
-                <a:latin typeface="Consolas"/>
-              </a:rPr>
-              <a:t>    const parts = buffer.split('\n\n');</a:t>
-            </a:r>
-          </a:p>
-          <a:p>
-            <a:pPr>
-              <a:spcAft>
-                <a:spcPts val="0"/>
-              </a:spcAft>
-            </a:pPr>
-            <a:r>
-              <a:rPr sz="1300">
-                <a:solidFill>
-                  <a:srgbClr val="6D8C97"/>
-                </a:solidFill>
-                <a:latin typeface="Consolas"/>
-              </a:rPr>
-              <a:t> 100  </a:t>
-            </a:r>
-            <a:r>
-              <a:rPr sz="1300">
-                <a:solidFill>
-                  <a:srgbClr val="7FE0A0"/>
-                </a:solidFill>
-                <a:latin typeface="Consolas"/>
-              </a:rPr>
-              <a:t>    buffer = parts.pop();</a:t>
-            </a:r>
-          </a:p>
-          <a:p>
-            <a:pPr>
-              <a:spcAft>
-                <a:spcPts val="0"/>
-              </a:spcAft>
-            </a:pPr>
-            <a:r>
-              <a:rPr sz="1300">
-                <a:solidFill>
-                  <a:srgbClr val="6D8C97"/>
-                </a:solidFill>
-                <a:latin typeface="Consolas"/>
-              </a:rPr>
-              <a:t> 101  </a:t>
-            </a:r>
-            <a:r>
-              <a:rPr sz="1300">
-                <a:solidFill>
-                  <a:srgbClr val="7FE0A0"/>
-                </a:solidFill>
-                <a:latin typeface="Consolas"/>
-              </a:rPr>
-              <a:t> </a:t>
-            </a:r>
-          </a:p>
-          <a:p>
-            <a:pPr>
-              <a:spcAft>
-                <a:spcPts val="0"/>
-              </a:spcAft>
-            </a:pPr>
-            <a:r>
-              <a:rPr sz="1300">
-                <a:solidFill>
-                  <a:srgbClr val="6D8C97"/>
-                </a:solidFill>
-                <a:latin typeface="Consolas"/>
-              </a:rPr>
-              <a:t> 102  </a:t>
-            </a:r>
-            <a:r>
-              <a:rPr sz="1300">
-                <a:solidFill>
-                  <a:srgbClr val="7FE0A0"/>
-                </a:solidFill>
-                <a:latin typeface="Consolas"/>
-              </a:rPr>
-              <a:t>    for (const part of parts) {</a:t>
-            </a:r>
-          </a:p>
-          <a:p>
-            <a:pPr>
-              <a:spcAft>
-                <a:spcPts val="0"/>
-              </a:spcAft>
-            </a:pPr>
-            <a:r>
-              <a:rPr sz="1300">
-                <a:solidFill>
-                  <a:srgbClr val="6D8C97"/>
-                </a:solidFill>
-                <a:latin typeface="Consolas"/>
-              </a:rPr>
-              <a:t> 103  </a:t>
-            </a:r>
-            <a:r>
-              <a:rPr sz="1300">
-                <a:solidFill>
-                  <a:srgbClr val="7FE0A0"/>
-                </a:solidFill>
-                <a:latin typeface="Consolas"/>
-              </a:rPr>
-              <a:t>      const line = part.trim();</a:t>
-            </a:r>
-          </a:p>
-          <a:p>
-            <a:pPr>
-              <a:spcAft>
-                <a:spcPts val="0"/>
-              </a:spcAft>
-            </a:pPr>
-            <a:r>
-              <a:rPr sz="1300">
-                <a:solidFill>
-                  <a:srgbClr val="6D8C97"/>
-                </a:solidFill>
-                <a:latin typeface="Consolas"/>
-              </a:rPr>
-              <a:t> 104  </a:t>
-            </a:r>
-            <a:r>
-              <a:rPr sz="1300">
-                <a:solidFill>
-                  <a:srgbClr val="7FE0A0"/>
-                </a:solidFill>
-                <a:latin typeface="Consolas"/>
-              </a:rPr>
-              <a:t>      if (!line.startsWith('data: ')) { continue; }</a:t>
-            </a:r>
-          </a:p>
-          <a:p>
-            <a:pPr>
-              <a:spcAft>
-                <a:spcPts val="0"/>
-              </a:spcAft>
-            </a:pPr>
-            <a:r>
-              <a:rPr sz="1300">
-                <a:solidFill>
-                  <a:srgbClr val="6D8C97"/>
-                </a:solidFill>
-                <a:latin typeface="Consolas"/>
-              </a:rPr>
-              <a:t> 105  </a:t>
-            </a:r>
-            <a:r>
-              <a:rPr sz="1300">
-                <a:solidFill>
-                  <a:srgbClr val="7FE0A0"/>
-                </a:solidFill>
-                <a:latin typeface="Consolas"/>
-              </a:rPr>
-              <a:t>      const payload = line.slice(6);</a:t>
-            </a:r>
-          </a:p>
-          <a:p>
-            <a:pPr>
-              <a:spcAft>
-                <a:spcPts val="0"/>
-              </a:spcAft>
-            </a:pPr>
-            <a:r>
-              <a:rPr sz="1300">
-                <a:solidFill>
-                  <a:srgbClr val="6D8C97"/>
-                </a:solidFill>
-                <a:latin typeface="Consolas"/>
-              </a:rPr>
-              <a:t> 106  </a:t>
-            </a:r>
-            <a:r>
-              <a:rPr sz="1300">
-                <a:solidFill>
-                  <a:srgbClr val="7FE0A0"/>
-                </a:solidFill>
-                <a:latin typeface="Consolas"/>
-              </a:rPr>
-              <a:t>      if (payload === '[DONE]') { continue; }</a:t>
-            </a:r>
-          </a:p>
-          <a:p>
-            <a:pPr>
-              <a:spcAft>
-                <a:spcPts val="0"/>
-              </a:spcAft>
-            </a:pPr>
-            <a:r>
-              <a:rPr sz="1300">
-                <a:solidFill>
-                  <a:srgbClr val="6D8C97"/>
-                </a:solidFill>
-                <a:latin typeface="Consolas"/>
-              </a:rPr>
-              <a:t> 107  </a:t>
-            </a:r>
-            <a:r>
-              <a:rPr sz="1300">
-                <a:solidFill>
-                  <a:srgbClr val="7FE0A0"/>
-                </a:solidFill>
-                <a:latin typeface="Consolas"/>
-              </a:rPr>
-              <a:t>      const piece = JSON.parse(payload);</a:t>
-            </a:r>
-          </a:p>
-          <a:p>
-            <a:pPr>
-              <a:spcAft>
-                <a:spcPts val="0"/>
-              </a:spcAft>
-            </a:pPr>
-            <a:r>
-              <a:rPr sz="1300">
-                <a:solidFill>
-                  <a:srgbClr val="6D8C97"/>
-                </a:solidFill>
-                <a:latin typeface="Consolas"/>
-              </a:rPr>
-              <a:t> 108  </a:t>
-            </a:r>
-            <a:r>
-              <a:rPr sz="1300">
-                <a:solidFill>
-                  <a:srgbClr val="7FE0A0"/>
-                </a:solidFill>
-                <a:latin typeface="Consolas"/>
-              </a:rPr>
-              <a:t>      const bit = piece.choices[0].delta.content;</a:t>
-            </a:r>
-          </a:p>
-          <a:p>
-            <a:pPr>
-              <a:spcAft>
-                <a:spcPts val="0"/>
-              </a:spcAft>
-            </a:pPr>
-            <a:r>
-              <a:rPr sz="1300">
-                <a:solidFill>
-                  <a:srgbClr val="6D8C97"/>
-                </a:solidFill>
-                <a:latin typeface="Consolas"/>
-              </a:rPr>
-              <a:t> 109  </a:t>
-            </a:r>
-            <a:r>
-              <a:rPr sz="1300">
-                <a:solidFill>
-                  <a:srgbClr val="7FE0A0"/>
-                </a:solidFill>
-                <a:latin typeface="Consolas"/>
-              </a:rPr>
-              <a:t>      if (bit) { answer += bit; }</a:t>
-            </a:r>
-          </a:p>
-          <a:p>
-            <a:pPr>
-              <a:spcAft>
-                <a:spcPts val="0"/>
-              </a:spcAft>
-            </a:pPr>
-            <a:r>
-              <a:rPr sz="1300">
-                <a:solidFill>
-                  <a:srgbClr val="6D8C97"/>
-                </a:solidFill>
-                <a:latin typeface="Consolas"/>
-              </a:rPr>
-              <a:t> 110  </a:t>
-            </a:r>
-            <a:r>
-              <a:rPr sz="1300">
-                <a:solidFill>
-                  <a:srgbClr val="7FE0A0"/>
-                </a:solidFill>
-                <a:latin typeface="Consolas"/>
-              </a:rPr>
-              <a:t>    }</a:t>
-            </a:r>
-          </a:p>
-          <a:p>
-            <a:pPr>
-              <a:spcAft>
-                <a:spcPts val="0"/>
-              </a:spcAft>
-            </a:pPr>
-            <a:r>
-              <a:rPr sz="1300">
-                <a:solidFill>
-                  <a:srgbClr val="6D8C97"/>
-                </a:solidFill>
-                <a:latin typeface="Consolas"/>
-              </a:rPr>
-              <a:t> 111  </a:t>
-            </a:r>
-            <a:r>
-              <a:rPr sz="1300">
-                <a:solidFill>
-                  <a:srgbClr val="7FE0A0"/>
-                </a:solidFill>
-                <a:latin typeface="Consolas"/>
-              </a:rPr>
-              <a:t>  }</a:t>
-            </a:r>
-          </a:p>
-          <a:p>
-            <a:pPr>
-              <a:spcAft>
-                <a:spcPts val="0"/>
-              </a:spcAft>
-            </a:pPr>
-            <a:r>
-              <a:rPr sz="1300">
-                <a:solidFill>
-                  <a:srgbClr val="6D8C97"/>
-                </a:solidFill>
-                <a:latin typeface="Consolas"/>
-              </a:rPr>
-              <a:t> 112  </a:t>
-            </a:r>
-            <a:r>
-              <a:rPr sz="1300">
-                <a:solidFill>
-                  <a:srgbClr val="7FE0A0"/>
-                </a:solidFill>
-                <a:latin typeface="Consolas"/>
-              </a:rPr>
-              <a:t>  return answer;</a:t>
-            </a:r>
-          </a:p>
-          <a:p>
-            <a:pPr>
-              <a:spcAft>
-                <a:spcPts val="0"/>
-              </a:spcAft>
-            </a:pPr>
-            <a:r>
-              <a:rPr sz="1300">
-                <a:solidFill>
-                  <a:srgbClr val="6D8C97"/>
-                </a:solidFill>
-                <a:latin typeface="Consolas"/>
-              </a:rPr>
-              <a:t> 113  </a:t>
-            </a:r>
-            <a:r>
-              <a:rPr sz="1300">
-                <a:solidFill>
-                  <a:srgbClr val="7FE0A0"/>
-                </a:solidFill>
-                <a:latin typeface="Consolas"/>
-              </a:rPr>
-              <a:t>}</a:t>
+              <a:t>QUICK CHECK</a:t>
             </a:r>
           </a:p>
         </p:txBody>
@@ -20926,8 +20923,8 @@
         </p:nvSpPr>
         <p:spPr>
           <a:xfrm>
-            <a:off x="548640" y="5623560"/>
-            <a:ext cx="11064240" cy="1051560"/>
+            <a:off x="822960" y="1828800"/>
+            <a:ext cx="10515600" cy="4206240"/>
           </a:xfrm>
           <a:prstGeom prst="rect">
             <a:avLst/>
@@ -20940,13 +20937,78 @@
           </a:bodyPr>
           <a:lstStyle/>
           <a:p>
-            <a:r>
-              <a:rPr sz="2000">
-                <a:solidFill>
-                  <a:srgbClr val="DCECEF"/>
-                </a:solidFill>
-              </a:rPr>
-              <a:t>That is the whole piece. Check yours looks the same before moving on.</a:t>
+            <a:pPr>
+              <a:spcAft>
+                <a:spcPts val="1400"/>
+              </a:spcAft>
+            </a:pPr>
+            <a:r>
+              <a:rPr sz="2400">
+                <a:solidFill>
+                  <a:srgbClr val="1F2A37"/>
+                </a:solidFill>
+              </a:rPr>
+              <a:t>• A. plain text</a:t>
+            </a:r>
+          </a:p>
+          <a:p>
+            <a:pPr>
+              <a:spcAft>
+                <a:spcPts val="1400"/>
+              </a:spcAft>
+            </a:pPr>
+            <a:r>
+              <a:rPr sz="2400">
+                <a:solidFill>
+                  <a:srgbClr val="1F2A37"/>
+                </a:solidFill>
+              </a:rPr>
+              <a:t>• B. a real object</a:t>
+            </a:r>
+          </a:p>
+          <a:p>
+            <a:pPr>
+              <a:spcAft>
+                <a:spcPts val="1400"/>
+              </a:spcAft>
+            </a:pPr>
+            <a:r>
+              <a:rPr sz="2400">
+                <a:solidFill>
+                  <a:srgbClr val="1F2A37"/>
+                </a:solidFill>
+              </a:rPr>
+              <a:t>• C. a number only</a:t>
+            </a:r>
+          </a:p>
+          <a:p>
+            <a:pPr>
+              <a:spcAft>
+                <a:spcPts val="1400"/>
+              </a:spcAft>
+            </a:pPr>
+            <a:r>
+              <a:rPr sz="2400">
+                <a:solidFill>
+                  <a:srgbClr val="1F2A37"/>
+                </a:solidFill>
+              </a:rPr>
+              <a:t>• D. an HTML tag</a:t>
+            </a:r>
+          </a:p>
+          <a:p>
+            <a:pPr>
+              <a:spcAft>
+                <a:spcPts val="1400"/>
+              </a:spcAft>
+            </a:pPr>
+            <a:r>
+              <a:rPr sz="2400">
+                <a:solidFill>
+                  <a:srgbClr val="1F2A37"/>
+                </a:solidFill>
+              </a:rPr>
+              <a:t>• Pick one - the answer is on the next slide.</a:t>
             </a:r>
           </a:p>
         </p:txBody>
@@ -21023,7 +21085,7 @@
                   <a:srgbClr val="01AEFD"/>
                 </a:solidFill>
               </a:rPr>
-              <a:t>QUICK CHECK</a:t>
+              <a:t>ANSWER</a:t>
             </a:r>
           </a:p>
         </p:txBody>
@@ -21076,7 +21138,7 @@
                   <a:srgbClr val="1F2A37"/>
                 </a:solidFill>
               </a:rPr>
-              <a:t>• B. a real object</a:t>
+              <a:t>• B. a real object (correct)</a:t>
             </a:r>
           </a:p>
           <a:p>
@@ -21121,7 +21183,7 @@
                   <a:srgbClr val="1F2A37"/>
                 </a:solidFill>
               </a:rPr>
-              <a:t>• Pick one - the answer is on the next slide.</a:t>
+              <a:t>• JSON.parse is the reverse of stringify - text back into an object.</a:t>
             </a:r>
           </a:p>
         </p:txBody>
@@ -21165,7 +21227,7 @@
                   <a:srgbClr val="1F2A37"/>
                 </a:solidFill>
               </a:rPr>
-              <a:t>JSON.parse(text)  turns text into...?</a:t>
+              <a:t>line.split(',')  returns...?</a:t>
             </a:r>
           </a:p>
         </p:txBody>
@@ -21198,7 +21260,7 @@
                   <a:srgbClr val="01AEFD"/>
                 </a:solidFill>
               </a:rPr>
-              <a:t>ANSWER</a:t>
+              <a:t>QUICK CHECK</a:t>
             </a:r>
           </a:p>
         </p:txBody>
@@ -21236,7 +21298,7 @@
                   <a:srgbClr val="1F2A37"/>
                 </a:solidFill>
               </a:rPr>
-              <a:t>• A. plain text</a:t>
+              <a:t>• A. one big string</a:t>
             </a:r>
           </a:p>
           <a:p>
@@ -21251,7 +21313,7 @@
                   <a:srgbClr val="1F2A37"/>
                 </a:solidFill>
               </a:rPr>
-              <a:t>• B. a real object (correct)</a:t>
+              <a:t>• B. a list of the pieces</a:t>
             </a:r>
           </a:p>
           <a:p>
@@ -21266,7 +21328,7 @@
                   <a:srgbClr val="1F2A37"/>
                 </a:solidFill>
               </a:rPr>
-              <a:t>• C. a number only</a:t>
+              <a:t>• C. the first letter</a:t>
             </a:r>
           </a:p>
           <a:p>
@@ -21281,7 +21343,7 @@
                   <a:srgbClr val="1F2A37"/>
                 </a:solidFill>
               </a:rPr>
-              <a:t>• D. an HTML tag</a:t>
+              <a:t>• D. a number</a:t>
             </a:r>
           </a:p>
           <a:p>
@@ -21296,7 +21358,7 @@
                   <a:srgbClr val="1F2A37"/>
                 </a:solidFill>
               </a:rPr>
-              <a:t>• JSON.parse is the reverse of stringify - text back into an object.</a:t>
+              <a:t>• Pick one - the answer is on the next slide.</a:t>
             </a:r>
           </a:p>
         </p:txBody>
@@ -21373,7 +21435,7 @@
                   <a:srgbClr val="01AEFD"/>
                 </a:solidFill>
               </a:rPr>
-              <a:t>QUICK CHECK</a:t>
+              <a:t>ANSWER</a:t>
             </a:r>
           </a:p>
         </p:txBody>
@@ -21426,7 +21488,7 @@
                   <a:srgbClr val="1F2A37"/>
                 </a:solidFill>
               </a:rPr>
-              <a:t>• B. a list of the pieces</a:t>
+              <a:t>• B. a list of the pieces (correct)</a:t>
             </a:r>
           </a:p>
           <a:p>
@@ -21471,7 +21533,7 @@
                   <a:srgbClr val="1F2A37"/>
                 </a:solidFill>
               </a:rPr>
-              <a:t>• Pick one - the answer is on the next slide.</a:t>
+              <a:t>• .split cuts a string into an array at each comma.</a:t>
             </a:r>
           </a:p>
         </p:txBody>
@@ -21515,7 +21577,7 @@
                   <a:srgbClr val="1F2A37"/>
                 </a:solidFill>
               </a:rPr>
-              <a:t>line.split(',')  returns...?</a:t>
+              <a:t>line.startsWith('data:')  checks if the line...?</a:t>
             </a:r>
           </a:p>
         </p:txBody>
@@ -21548,7 +21610,7 @@
                   <a:srgbClr val="01AEFD"/>
                 </a:solidFill>
               </a:rPr>
-              <a:t>ANSWER</a:t>
+              <a:t>QUICK CHECK</a:t>
             </a:r>
           </a:p>
         </p:txBody>
@@ -21586,7 +21648,7 @@
                   <a:srgbClr val="1F2A37"/>
                 </a:solidFill>
               </a:rPr>
-              <a:t>• A. one big string</a:t>
+              <a:t>• A. ends with 'data:'</a:t>
             </a:r>
           </a:p>
           <a:p>
@@ -21601,7 +21663,7 @@
                   <a:srgbClr val="1F2A37"/>
                 </a:solidFill>
               </a:rPr>
-              <a:t>• B. a list of the pieces (correct)</a:t>
+              <a:t>• B. begins with 'data:'</a:t>
             </a:r>
           </a:p>
           <a:p>
@@ -21616,7 +21678,7 @@
                   <a:srgbClr val="1F2A37"/>
                 </a:solidFill>
               </a:rPr>
-              <a:t>• C. the first letter</a:t>
+              <a:t>• C. contains a number</a:t>
             </a:r>
           </a:p>
           <a:p>
@@ -21631,7 +21693,7 @@
                   <a:srgbClr val="1F2A37"/>
                 </a:solidFill>
               </a:rPr>
-              <a:t>• D. a number</a:t>
+              <a:t>• D. is empty</a:t>
             </a:r>
           </a:p>
           <a:p>
@@ -21646,7 +21708,7 @@
                   <a:srgbClr val="1F2A37"/>
                 </a:solidFill>
               </a:rPr>
-              <a:t>• .split cuts a string into an array at each comma.</a:t>
+              <a:t>• Pick one - the answer is on the next slide.</a:t>
             </a:r>
           </a:p>
         </p:txBody>
@@ -21723,7 +21785,7 @@
                   <a:srgbClr val="01AEFD"/>
                 </a:solidFill>
               </a:rPr>
-              <a:t>QUICK CHECK</a:t>
+              <a:t>ANSWER</a:t>
             </a:r>
           </a:p>
         </p:txBody>
@@ -21776,7 +21838,7 @@
                   <a:srgbClr val="1F2A37"/>
                 </a:solidFill>
               </a:rPr>
-              <a:t>• B. begins with 'data:'</a:t>
+              <a:t>• B. begins with 'data:' (correct)</a:t>
             </a:r>
           </a:p>
           <a:p>
@@ -21821,7 +21883,7 @@
                   <a:srgbClr val="1F2A37"/>
                 </a:solidFill>
               </a:rPr>
-              <a:t>• Pick one - the answer is on the next slide.</a:t>
+              <a:t>• .startsWith is true only when the string begins with that text.</a:t>
             </a:r>
           </a:p>
         </p:txBody>
@@ -21865,7 +21927,7 @@
                   <a:srgbClr val="1F2A37"/>
                 </a:solidFill>
               </a:rPr>
-              <a:t>line.startsWith('data:')  checks if the line...?</a:t>
+              <a:t>&lt;select&gt; builds a...? (from week 9)</a:t>
             </a:r>
           </a:p>
         </p:txBody>
@@ -21898,7 +21960,7 @@
                   <a:srgbClr val="01AEFD"/>
                 </a:solidFill>
               </a:rPr>
-              <a:t>ANSWER</a:t>
+              <a:t>QUICK CHECK</a:t>
             </a:r>
           </a:p>
         </p:txBody>
@@ -21936,7 +21998,7 @@
                   <a:srgbClr val="1F2A37"/>
                 </a:solidFill>
               </a:rPr>
-              <a:t>• A. ends with 'data:'</a:t>
+              <a:t>• A. dropdown menu</a:t>
             </a:r>
           </a:p>
           <a:p>
@@ -21951,7 +22013,7 @@
                   <a:srgbClr val="1F2A37"/>
                 </a:solidFill>
               </a:rPr>
-              <a:t>• B. begins with 'data:' (correct)</a:t>
+              <a:t>• B. text area</a:t>
             </a:r>
           </a:p>
           <a:p>
@@ -21966,7 +22028,7 @@
                   <a:srgbClr val="1F2A37"/>
                 </a:solidFill>
               </a:rPr>
-              <a:t>• C. contains a number</a:t>
+              <a:t>• C. button</a:t>
             </a:r>
           </a:p>
           <a:p>
@@ -21981,7 +22043,7 @@
                   <a:srgbClr val="1F2A37"/>
                 </a:solidFill>
               </a:rPr>
-              <a:t>• D. is empty</a:t>
+              <a:t>• D. label</a:t>
             </a:r>
           </a:p>
           <a:p>
@@ -21996,7 +22058,7 @@
                   <a:srgbClr val="1F2A37"/>
                 </a:solidFill>
               </a:rPr>
-              <a:t>• .startsWith is true only when the string begins with that text.</a:t>
+              <a:t>• Pick one - the answer is on the next slide.</a:t>
             </a:r>
           </a:p>
         </p:txBody>
@@ -22073,7 +22135,7 @@
                   <a:srgbClr val="01AEFD"/>
                 </a:solidFill>
               </a:rPr>
-              <a:t>QUICK CHECK</a:t>
+              <a:t>ANSWER</a:t>
             </a:r>
           </a:p>
         </p:txBody>
@@ -22111,7 +22173,7 @@
                   <a:srgbClr val="1F2A37"/>
                 </a:solidFill>
               </a:rPr>
-              <a:t>• A. dropdown menu</a:t>
+              <a:t>• A. dropdown menu (correct)</a:t>
             </a:r>
           </a:p>
           <a:p>
@@ -22171,7 +22233,7 @@
                   <a:srgbClr val="1F2A37"/>
                 </a:solidFill>
               </a:rPr>
-              <a:t>• Pick one - the answer is on the next slide.</a:t>
+              <a:t>• select + option make a dropdown menu.</a:t>
             </a:r>
           </a:p>
         </p:txBody>
@@ -22215,7 +22277,7 @@
                   <a:srgbClr val="1F2A37"/>
                 </a:solidFill>
               </a:rPr>
-              <a:t>&lt;select&gt; builds a...? (from week 9)</a:t>
+              <a:t>Checkpoint: it streams (quietly)</a:t>
             </a:r>
           </a:p>
         </p:txBody>
@@ -22248,7 +22310,7 @@
                   <a:srgbClr val="01AEFD"/>
                 </a:solidFill>
               </a:rPr>
-              <a:t>ANSWER</a:t>
+              <a:t>CHECKPOINT - RUN IT</a:t>
             </a:r>
           </a:p>
         </p:txBody>
@@ -22281,12 +22343,27 @@
               </a:spcAft>
             </a:pPr>
             <a:r>
+              <a:rPr sz="2800">
+                <a:solidFill>
+                  <a:srgbClr val="01AEFD"/>
+                </a:solidFill>
+              </a:rPr>
+              <a:t>Press Run and send a question. It should still reply exactly as before - the change is invisible ON PURPOSE. Open the console: the request now says stream: true and the reply arrives in pieces. Next week you make those pieces show as they land.</a:t>
+            </a:r>
+          </a:p>
+          <a:p>
+            <a:pPr>
+              <a:spcAft>
+                <a:spcPts val="1400"/>
+              </a:spcAft>
+            </a:pPr>
+            <a:r>
               <a:rPr sz="2400">
                 <a:solidFill>
                   <a:srgbClr val="1F2A37"/>
                 </a:solidFill>
               </a:rPr>
-              <a:t>• A. dropdown menu (correct)</a:t>
+              <a:t>• Run it in the classroom, or press Show the output in the web deck.</a:t>
             </a:r>
           </a:p>
           <a:p>
@@ -22301,52 +22378,7 @@
                   <a:srgbClr val="1F2A37"/>
                 </a:solidFill>
               </a:rPr>
-              <a:t>• B. text area</a:t>
-            </a:r>
-          </a:p>
-          <a:p>
-            <a:pPr>
-              <a:spcAft>
-                <a:spcPts val="1400"/>
-              </a:spcAft>
-            </a:pPr>
-            <a:r>
-              <a:rPr sz="2400">
-                <a:solidFill>
-                  <a:srgbClr val="1F2A37"/>
-                </a:solidFill>
-              </a:rPr>
-              <a:t>• C. button</a:t>
-            </a:r>
-          </a:p>
-          <a:p>
-            <a:pPr>
-              <a:spcAft>
-                <a:spcPts val="1400"/>
-              </a:spcAft>
-            </a:pPr>
-            <a:r>
-              <a:rPr sz="2400">
-                <a:solidFill>
-                  <a:srgbClr val="1F2A37"/>
-                </a:solidFill>
-              </a:rPr>
-              <a:t>• D. label</a:t>
-            </a:r>
-          </a:p>
-          <a:p>
-            <a:pPr>
-              <a:spcAft>
-                <a:spcPts val="1400"/>
-              </a:spcAft>
-            </a:pPr>
-            <a:r>
-              <a:rPr sz="2400">
-                <a:solidFill>
-                  <a:srgbClr val="1F2A37"/>
-                </a:solidFill>
-              </a:rPr>
-              <a:t>• select + option make a dropdown menu.</a:t>
+              <a:t>• Everyone's screen should match this.</a:t>
             </a:r>
           </a:p>
         </p:txBody>
@@ -22390,7 +22422,7 @@
                   <a:srgbClr val="1F2A37"/>
                 </a:solidFill>
               </a:rPr>
-              <a:t>Checkpoint: it streams (quietly)</a:t>
+              <a:t>Today was plumbing</a:t>
             </a:r>
           </a:p>
         </p:txBody>
@@ -22398,39 +22430,6 @@
       <p:sp>
         <p:nvSpPr>
           <p:cNvPr id="3" name="TextBox 2"/>
-          <p:cNvSpPr txBox="1"/>
-          <p:nvPr/>
-        </p:nvSpPr>
-        <p:spPr>
-          <a:xfrm>
-            <a:off x="868680" y="502920"/>
-            <a:ext cx="5486400" cy="457200"/>
-          </a:xfrm>
-          <a:prstGeom prst="rect">
-            <a:avLst/>
-          </a:prstGeom>
-          <a:noFill/>
-        </p:spPr>
-        <p:txBody>
-          <a:bodyPr wrap="none">
-            <a:spAutoFit/>
-          </a:bodyPr>
-          <a:lstStyle/>
-          <a:p>
-            <a:r>
-              <a:rPr sz="1500" b="1">
-                <a:solidFill>
-                  <a:srgbClr val="01AEFD"/>
-                </a:solidFill>
-              </a:rPr>
-              <a:t>CHECKPOINT - RUN IT</a:t>
-            </a:r>
-          </a:p>
-        </p:txBody>
-      </p:sp>
-      <p:sp>
-        <p:nvSpPr>
-          <p:cNvPr id="4" name="TextBox 3"/>
           <p:cNvSpPr txBox="1"/>
           <p:nvPr/>
         </p:nvSpPr>
@@ -22461,7 +22460,7 @@
                   <a:srgbClr val="01AEFD"/>
                 </a:solidFill>
               </a:rPr>
-              <a:t>Press Run and send a question. It should still reply exactly as before - the change is invisible ON PURPOSE. Open the console: the request now says stream: true and the reply arrives in pieces. Next week you make those pieces show as they land.</a:t>
+              <a:t>It looks identical</a:t>
             </a:r>
           </a:p>
           <a:p>
@@ -22476,22 +22475,7 @@
                   <a:srgbClr val="1F2A37"/>
                 </a:solidFill>
               </a:rPr>
-              <a:t>• Run it in the classroom, or press Show the output in the web deck.</a:t>
-            </a:r>
-          </a:p>
-          <a:p>
-            <a:pPr>
-              <a:spcAft>
-                <a:spcPts val="1400"/>
-              </a:spcAft>
-            </a:pPr>
-            <a:r>
-              <a:rPr sz="2400">
-                <a:solidFill>
-                  <a:srgbClr val="1F2A37"/>
-                </a:solidFill>
-              </a:rPr>
-              <a:t>• Everyone's screen should match this.</a:t>
+              <a:t>• Next week it pays off</a:t>
             </a:r>
           </a:p>
         </p:txBody>
@@ -22994,103 +22978,6 @@
 </p:sld>
 </file>
 
-<file path=ppt/slides/slide50.xml><?xml version="1.0" encoding="utf-8"?>
-<p:sld xmlns:a="http://schemas.openxmlformats.org/drawingml/2006/main" xmlns:p="http://schemas.openxmlformats.org/presentationml/2006/main" xmlns:r="http://schemas.openxmlformats.org/officeDocument/2006/relationships">
-  <p:cSld>
-    <p:spTree>
-      <p:nvGrpSpPr>
-        <p:cNvPr id="1" name=""/>
-        <p:cNvGrpSpPr/>
-        <p:nvPr/>
-      </p:nvGrpSpPr>
-      <p:grpSpPr/>
-      <p:sp>
-        <p:nvSpPr>
-          <p:cNvPr id="2" name="Title 1"/>
-          <p:cNvSpPr>
-            <a:spLocks noGrp="1"/>
-          </p:cNvSpPr>
-          <p:nvPr>
-            <p:ph type="title"/>
-          </p:nvPr>
-        </p:nvSpPr>
-        <p:spPr/>
-        <p:txBody>
-          <a:bodyPr/>
-          <a:lstStyle/>
-          <a:p>
-            <a:r>
-              <a:rPr sz="3800" b="1">
-                <a:solidFill>
-                  <a:srgbClr val="1F2A37"/>
-                </a:solidFill>
-              </a:rPr>
-              <a:t>Today was plumbing</a:t>
-            </a:r>
-          </a:p>
-        </p:txBody>
-      </p:sp>
-      <p:sp>
-        <p:nvSpPr>
-          <p:cNvPr id="3" name="TextBox 2"/>
-          <p:cNvSpPr txBox="1"/>
-          <p:nvPr/>
-        </p:nvSpPr>
-        <p:spPr>
-          <a:xfrm>
-            <a:off x="822960" y="1828800"/>
-            <a:ext cx="10515600" cy="4206240"/>
-          </a:xfrm>
-          <a:prstGeom prst="rect">
-            <a:avLst/>
-          </a:prstGeom>
-          <a:noFill/>
-        </p:spPr>
-        <p:txBody>
-          <a:bodyPr wrap="square">
-            <a:spAutoFit/>
-          </a:bodyPr>
-          <a:lstStyle/>
-          <a:p>
-            <a:pPr>
-              <a:spcAft>
-                <a:spcPts val="1400"/>
-              </a:spcAft>
-            </a:pPr>
-            <a:r>
-              <a:rPr sz="2800">
-                <a:solidFill>
-                  <a:srgbClr val="01AEFD"/>
-                </a:solidFill>
-              </a:rPr>
-              <a:t>It looks identical</a:t>
-            </a:r>
-          </a:p>
-          <a:p>
-            <a:pPr>
-              <a:spcAft>
-                <a:spcPts val="1400"/>
-              </a:spcAft>
-            </a:pPr>
-            <a:r>
-              <a:rPr sz="2400">
-                <a:solidFill>
-                  <a:srgbClr val="1F2A37"/>
-                </a:solidFill>
-              </a:rPr>
-              <a:t>• Next week it pays off</a:t>
-            </a:r>
-          </a:p>
-        </p:txBody>
-      </p:sp>
-    </p:spTree>
-  </p:cSld>
-  <p:clrMapOvr>
-    <a:masterClrMapping/>
-  </p:clrMapOvr>
-</p:sld>
-</file>
-
 <file path=ppt/slides/slide6.xml><?xml version="1.0" encoding="utf-8"?>
 <p:sld xmlns:a="http://schemas.openxmlformats.org/drawingml/2006/main" xmlns:p="http://schemas.openxmlformats.org/presentationml/2006/main" xmlns:r="http://schemas.openxmlformats.org/officeDocument/2006/relationships">
   <p:cSld>
@@ -23137,7 +23024,7 @@
                   <a:srgbClr val="01AEFD"/>
                 </a:solidFill>
               </a:rPr>
-              <a:t>In script.js   -   replace a line</a:t>
+              <a:t>In script.js   -   replace 2 lines</a:t>
             </a:r>
           </a:p>
         </p:txBody>
@@ -23963,6 +23850,31 @@
               <a:t>  const data = await res.json();</a:t>
             </a:r>
           </a:p>
+          <a:p>
+            <a:pPr>
+              <a:spcAft>
+                <a:spcPts val="0"/>
+              </a:spcAft>
+            </a:pPr>
+            <a:r>
+              <a:rPr sz="1300">
+                <a:solidFill>
+                  <a:srgbClr val="6D8C97"/>
+                </a:solidFill>
+                <a:latin typeface="Consolas"/>
+              </a:rPr>
+              <a:t> 146  </a:t>
+            </a:r>
+            <a:r>
+              <a:rPr sz="1300" strike="sngStrike">
+                <a:solidFill>
+                  <a:srgbClr val="F3928B"/>
+                </a:solidFill>
+                <a:latin typeface="Consolas"/>
+              </a:rPr>
+              <a:t>  return data.choices[0].message.content;</a:t>
+            </a:r>
+          </a:p>
         </p:txBody>
       </p:sp>
       <p:sp>
@@ -23993,7 +23905,7 @@
                   <a:srgbClr val="DCECEF"/>
                 </a:solidFill>
               </a:rPr>
-              <a:t>This line changes - take the old one out; the new version is next.</a:t>
+              <a:t>These lines change - take the old ones out; the new version is next.</a:t>
             </a:r>
           </a:p>
         </p:txBody>
@@ -24052,7 +23964,7 @@
                   <a:srgbClr val="01AEFD"/>
                 </a:solidFill>
               </a:rPr>
-              <a:t>In script.js   -   replace a line</a:t>
+              <a:t>Type this into script.js   -   line 145</a:t>
             </a:r>
           </a:p>
         </p:txBody>
@@ -24869,13 +24781,13 @@
               <a:t> 145  </a:t>
             </a:r>
             <a:r>
-              <a:rPr sz="1300" strike="sngStrike">
-                <a:solidFill>
-                  <a:srgbClr val="F3928B"/>
-                </a:solidFill>
-                <a:latin typeface="Consolas"/>
-              </a:rPr>
-              <a:t>  return data.choices[0].message.content;</a:t>
+              <a:rPr sz="1300">
+                <a:solidFill>
+                  <a:srgbClr val="7FE0A0"/>
+                </a:solidFill>
+                <a:latin typeface="Consolas"/>
+              </a:rPr>
+              <a:t>  return readStream(res);   // week 10: no more res.json() - it arrives in bits</a:t>
             </a:r>
           </a:p>
         </p:txBody>
@@ -24908,7 +24820,7 @@
                   <a:srgbClr val="DCECEF"/>
                 </a:solidFill>
               </a:rPr>
-              <a:t>This line changes - take the old one out; the new version is next.</a:t>
+              <a:t>Hand the streaming response to readStream (next) instead of res.json() - the body arrives in bits now.</a:t>
             </a:r>
           </a:p>
         </p:txBody>
@@ -24967,7 +24879,7 @@
                   <a:srgbClr val="01AEFD"/>
                 </a:solidFill>
               </a:rPr>
-              <a:t>Type this into script.js   -   line 145</a:t>
+              <a:t>All together in script.js</a:t>
             </a:r>
           </a:p>
         </p:txBody>
@@ -25011,7 +24923,7 @@
             <a:r>
               <a:rPr sz="1300">
                 <a:solidFill>
-                  <a:srgbClr val="6D8C97"/>
+                  <a:srgbClr val="7FE0A0"/>
                 </a:solidFill>
                 <a:latin typeface="Consolas"/>
               </a:rPr>
@@ -25036,7 +24948,7 @@
             <a:r>
               <a:rPr sz="1300">
                 <a:solidFill>
-                  <a:srgbClr val="6D8C97"/>
+                  <a:srgbClr val="7FE0A0"/>
                 </a:solidFill>
                 <a:latin typeface="Consolas"/>
               </a:rPr>
@@ -25061,7 +24973,7 @@
             <a:r>
               <a:rPr sz="1300">
                 <a:solidFill>
-                  <a:srgbClr val="6D8C97"/>
+                  <a:srgbClr val="7FE0A0"/>
                 </a:solidFill>
                 <a:latin typeface="Consolas"/>
               </a:rPr>
@@ -25086,7 +24998,7 @@
             <a:r>
               <a:rPr sz="1300">
                 <a:solidFill>
-                  <a:srgbClr val="6D8C97"/>
+                  <a:srgbClr val="7FE0A0"/>
                 </a:solidFill>
                 <a:latin typeface="Consolas"/>
               </a:rPr>
@@ -25111,7 +25023,7 @@
             <a:r>
               <a:rPr sz="1300">
                 <a:solidFill>
-                  <a:srgbClr val="6D8C97"/>
+                  <a:srgbClr val="7FE0A0"/>
                 </a:solidFill>
                 <a:latin typeface="Consolas"/>
               </a:rPr>
@@ -25136,7 +25048,7 @@
             <a:r>
               <a:rPr sz="1300">
                 <a:solidFill>
-                  <a:srgbClr val="6D8C97"/>
+                  <a:srgbClr val="7FE0A0"/>
                 </a:solidFill>
                 <a:latin typeface="Consolas"/>
               </a:rPr>
@@ -25161,7 +25073,7 @@
             <a:r>
               <a:rPr sz="1300">
                 <a:solidFill>
-                  <a:srgbClr val="6D8C97"/>
+                  <a:srgbClr val="7FE0A0"/>
                 </a:solidFill>
                 <a:latin typeface="Consolas"/>
               </a:rPr>
@@ -25186,7 +25098,7 @@
             <a:r>
               <a:rPr sz="1300">
                 <a:solidFill>
-                  <a:srgbClr val="6D8C97"/>
+                  <a:srgbClr val="7FE0A0"/>
                 </a:solidFill>
                 <a:latin typeface="Consolas"/>
               </a:rPr>
@@ -25211,7 +25123,7 @@
             <a:r>
               <a:rPr sz="1300">
                 <a:solidFill>
-                  <a:srgbClr val="6D8C97"/>
+                  <a:srgbClr val="7FE0A0"/>
                 </a:solidFill>
                 <a:latin typeface="Consolas"/>
               </a:rPr>
@@ -25236,7 +25148,7 @@
             <a:r>
               <a:rPr sz="1300">
                 <a:solidFill>
-                  <a:srgbClr val="6D8C97"/>
+                  <a:srgbClr val="7FE0A0"/>
                 </a:solidFill>
                 <a:latin typeface="Consolas"/>
               </a:rPr>
@@ -25261,7 +25173,7 @@
             <a:r>
               <a:rPr sz="1300">
                 <a:solidFill>
-                  <a:srgbClr val="6D8C97"/>
+                  <a:srgbClr val="7FE0A0"/>
                 </a:solidFill>
                 <a:latin typeface="Consolas"/>
               </a:rPr>
@@ -25286,7 +25198,7 @@
             <a:r>
               <a:rPr sz="1300">
                 <a:solidFill>
-                  <a:srgbClr val="6D8C97"/>
+                  <a:srgbClr val="7FE0A0"/>
                 </a:solidFill>
                 <a:latin typeface="Consolas"/>
               </a:rPr>
@@ -25311,7 +25223,7 @@
             <a:r>
               <a:rPr sz="1300">
                 <a:solidFill>
-                  <a:srgbClr val="6D8C97"/>
+                  <a:srgbClr val="7FE0A0"/>
                 </a:solidFill>
                 <a:latin typeface="Consolas"/>
               </a:rPr>
@@ -25336,7 +25248,7 @@
             <a:r>
               <a:rPr sz="1300">
                 <a:solidFill>
-                  <a:srgbClr val="6D8C97"/>
+                  <a:srgbClr val="7FE0A0"/>
                 </a:solidFill>
                 <a:latin typeface="Consolas"/>
               </a:rPr>
@@ -25361,7 +25273,7 @@
             <a:r>
               <a:rPr sz="1300">
                 <a:solidFill>
-                  <a:srgbClr val="6D8C97"/>
+                  <a:srgbClr val="7FE0A0"/>
                 </a:solidFill>
                 <a:latin typeface="Consolas"/>
               </a:rPr>
@@ -25386,7 +25298,7 @@
             <a:r>
               <a:rPr sz="1300">
                 <a:solidFill>
-                  <a:srgbClr val="6D8C97"/>
+                  <a:srgbClr val="7FE0A0"/>
                 </a:solidFill>
                 <a:latin typeface="Consolas"/>
               </a:rPr>
@@ -25411,7 +25323,7 @@
             <a:r>
               <a:rPr sz="1300">
                 <a:solidFill>
-                  <a:srgbClr val="6D8C97"/>
+                  <a:srgbClr val="7FE0A0"/>
                 </a:solidFill>
                 <a:latin typeface="Consolas"/>
               </a:rPr>
@@ -25436,7 +25348,7 @@
             <a:r>
               <a:rPr sz="1300">
                 <a:solidFill>
-                  <a:srgbClr val="6D8C97"/>
+                  <a:srgbClr val="7FE0A0"/>
                 </a:solidFill>
                 <a:latin typeface="Consolas"/>
               </a:rPr>
@@ -25461,7 +25373,7 @@
             <a:r>
               <a:rPr sz="1300">
                 <a:solidFill>
-                  <a:srgbClr val="6D8C97"/>
+                  <a:srgbClr val="7FE0A0"/>
                 </a:solidFill>
                 <a:latin typeface="Consolas"/>
               </a:rPr>
@@ -25486,7 +25398,7 @@
             <a:r>
               <a:rPr sz="1300">
                 <a:solidFill>
-                  <a:srgbClr val="6D8C97"/>
+                  <a:srgbClr val="7FE0A0"/>
                 </a:solidFill>
                 <a:latin typeface="Consolas"/>
               </a:rPr>
@@ -25511,7 +25423,7 @@
             <a:r>
               <a:rPr sz="1300">
                 <a:solidFill>
-                  <a:srgbClr val="6D8C97"/>
+                  <a:srgbClr val="7FE0A0"/>
                 </a:solidFill>
                 <a:latin typeface="Consolas"/>
               </a:rPr>
@@ -25536,7 +25448,7 @@
             <a:r>
               <a:rPr sz="1300">
                 <a:solidFill>
-                  <a:srgbClr val="6D8C97"/>
+                  <a:srgbClr val="7FE0A0"/>
                 </a:solidFill>
                 <a:latin typeface="Consolas"/>
               </a:rPr>
@@ -25561,7 +25473,7 @@
             <a:r>
               <a:rPr sz="1300">
                 <a:solidFill>
-                  <a:srgbClr val="6D8C97"/>
+                  <a:srgbClr val="7FE0A0"/>
                 </a:solidFill>
                 <a:latin typeface="Consolas"/>
               </a:rPr>
@@ -25586,7 +25498,7 @@
             <a:r>
               <a:rPr sz="1300">
                 <a:solidFill>
-                  <a:srgbClr val="6D8C97"/>
+                  <a:srgbClr val="7FE0A0"/>
                 </a:solidFill>
                 <a:latin typeface="Consolas"/>
               </a:rPr>
@@ -25611,7 +25523,7 @@
             <a:r>
               <a:rPr sz="1300">
                 <a:solidFill>
-                  <a:srgbClr val="6D8C97"/>
+                  <a:srgbClr val="7FE0A0"/>
                 </a:solidFill>
                 <a:latin typeface="Consolas"/>
               </a:rPr>
@@ -25636,7 +25548,7 @@
             <a:r>
               <a:rPr sz="1300">
                 <a:solidFill>
-                  <a:srgbClr val="6D8C97"/>
+                  <a:srgbClr val="7FE0A0"/>
                 </a:solidFill>
                 <a:latin typeface="Consolas"/>
               </a:rPr>
@@ -25661,7 +25573,7 @@
             <a:r>
               <a:rPr sz="1300">
                 <a:solidFill>
-                  <a:srgbClr val="6D8C97"/>
+                  <a:srgbClr val="7FE0A0"/>
                 </a:solidFill>
                 <a:latin typeface="Consolas"/>
               </a:rPr>
@@ -25686,7 +25598,7 @@
             <a:r>
               <a:rPr sz="1300">
                 <a:solidFill>
-                  <a:srgbClr val="6D8C97"/>
+                  <a:srgbClr val="7FE0A0"/>
                 </a:solidFill>
                 <a:latin typeface="Consolas"/>
               </a:rPr>
@@ -25711,7 +25623,7 @@
             <a:r>
               <a:rPr sz="1300">
                 <a:solidFill>
-                  <a:srgbClr val="6D8C97"/>
+                  <a:srgbClr val="7FE0A0"/>
                 </a:solidFill>
                 <a:latin typeface="Consolas"/>
               </a:rPr>
@@ -25736,7 +25648,7 @@
             <a:r>
               <a:rPr sz="1300">
                 <a:solidFill>
-                  <a:srgbClr val="6D8C97"/>
+                  <a:srgbClr val="7FE0A0"/>
                 </a:solidFill>
                 <a:latin typeface="Consolas"/>
               </a:rPr>
@@ -25761,7 +25673,7 @@
             <a:r>
               <a:rPr sz="1300">
                 <a:solidFill>
-                  <a:srgbClr val="6D8C97"/>
+                  <a:srgbClr val="7FE0A0"/>
                 </a:solidFill>
                 <a:latin typeface="Consolas"/>
               </a:rPr>
@@ -25791,6 +25703,31 @@
                 <a:latin typeface="Consolas"/>
               </a:rPr>
               <a:t>  return readStream(res);   // week 10: no more res.json() - it arrives in bits</a:t>
+            </a:r>
+          </a:p>
+          <a:p>
+            <a:pPr>
+              <a:spcAft>
+                <a:spcPts val="0"/>
+              </a:spcAft>
+            </a:pPr>
+            <a:r>
+              <a:rPr sz="1300">
+                <a:solidFill>
+                  <a:srgbClr val="6D8C97"/>
+                </a:solidFill>
+                <a:latin typeface="Consolas"/>
+              </a:rPr>
+              <a:t> 146  </a:t>
+            </a:r>
+            <a:r>
+              <a:rPr sz="1300">
+                <a:solidFill>
+                  <a:srgbClr val="7FE0A0"/>
+                </a:solidFill>
+                <a:latin typeface="Consolas"/>
+              </a:rPr>
+              <a:t>}</a:t>
             </a:r>
           </a:p>
         </p:txBody>
@@ -25823,7 +25760,7 @@
                   <a:srgbClr val="DCECEF"/>
                 </a:solidFill>
               </a:rPr>
-              <a:t>Hand the streaming response to readStream (next) instead of res.json() - the body arrives in bits now.</a:t>
+              <a:t>That is the whole piece. Check yours looks the same before moving on.</a:t>
             </a:r>
           </a:p>
         </p:txBody>
@@ -25839,14 +25776,6 @@
 <file path=ppt/slides/slide9.xml><?xml version="1.0" encoding="utf-8"?>
 <p:sld xmlns:a="http://schemas.openxmlformats.org/drawingml/2006/main" xmlns:p="http://schemas.openxmlformats.org/presentationml/2006/main" xmlns:r="http://schemas.openxmlformats.org/officeDocument/2006/relationships">
   <p:cSld>
-    <p:bg>
-      <p:bgPr>
-        <a:solidFill>
-          <a:srgbClr val="102127"/>
-        </a:solidFill>
-        <a:effectLst/>
-      </p:bgPr>
-    </p:bg>
     <p:spTree>
       <p:nvGrpSpPr>
         <p:cNvPr id="1" name=""/>
@@ -25856,33 +25785,26 @@
       <p:grpSpPr/>
       <p:sp>
         <p:nvSpPr>
-          <p:cNvPr id="2" name="TextBox 1"/>
-          <p:cNvSpPr txBox="1"/>
-          <p:nvPr/>
+          <p:cNvPr id="2" name="Title 1"/>
+          <p:cNvSpPr>
+            <a:spLocks noGrp="1"/>
+          </p:cNvSpPr>
+          <p:nvPr>
+            <p:ph type="title"/>
+          </p:nvPr>
         </p:nvSpPr>
-        <p:spPr>
-          <a:xfrm>
-            <a:off x="502920" y="274320"/>
-            <a:ext cx="11155680" cy="548640"/>
-          </a:xfrm>
-          <a:prstGeom prst="rect">
-            <a:avLst/>
-          </a:prstGeom>
-          <a:noFill/>
-        </p:spPr>
+        <p:spPr/>
         <p:txBody>
-          <a:bodyPr wrap="none">
-            <a:spAutoFit/>
-          </a:bodyPr>
+          <a:bodyPr/>
           <a:lstStyle/>
           <a:p>
             <a:r>
-              <a:rPr sz="2200" b="1">
-                <a:solidFill>
-                  <a:srgbClr val="01AEFD"/>
-                </a:solidFill>
-              </a:rPr>
-              <a:t>All together in script.js</a:t>
+              <a:rPr sz="3800" b="1">
+                <a:solidFill>
+                  <a:srgbClr val="1F2A37"/>
+                </a:solidFill>
+              </a:rPr>
+              <a:t>What a stream looks like</a:t>
             </a:r>
           </a:p>
         </p:txBody>
@@ -25895,856 +25817,8 @@
         </p:nvSpPr>
         <p:spPr>
           <a:xfrm>
-            <a:off x="502920" y="960120"/>
-            <a:ext cx="11155680" cy="4297680"/>
-          </a:xfrm>
-          <a:prstGeom prst="rect">
-            <a:avLst/>
-          </a:prstGeom>
-          <a:noFill/>
-        </p:spPr>
-        <p:txBody>
-          <a:bodyPr wrap="none">
-            <a:spAutoFit/>
-          </a:bodyPr>
-          <a:lstStyle/>
-          <a:p>
-            <a:pPr>
-              <a:spcAft>
-                <a:spcPts val="0"/>
-              </a:spcAft>
-            </a:pPr>
-            <a:r>
-              <a:rPr sz="1300">
-                <a:solidFill>
-                  <a:srgbClr val="6D8C97"/>
-                </a:solidFill>
-                <a:latin typeface="Consolas"/>
-              </a:rPr>
-              <a:t> 114  </a:t>
-            </a:r>
-            <a:r>
-              <a:rPr sz="1300">
-                <a:solidFill>
-                  <a:srgbClr val="7FE0A0"/>
-                </a:solidFill>
-                <a:latin typeface="Consolas"/>
-              </a:rPr>
-              <a:t> </a:t>
-            </a:r>
-          </a:p>
-          <a:p>
-            <a:pPr>
-              <a:spcAft>
-                <a:spcPts val="0"/>
-              </a:spcAft>
-            </a:pPr>
-            <a:r>
-              <a:rPr sz="1300">
-                <a:solidFill>
-                  <a:srgbClr val="6D8C97"/>
-                </a:solidFill>
-                <a:latin typeface="Consolas"/>
-              </a:rPr>
-              <a:t> 115  </a:t>
-            </a:r>
-            <a:r>
-              <a:rPr sz="1300">
-                <a:solidFill>
-                  <a:srgbClr val="7FE0A0"/>
-                </a:solidFill>
-                <a:latin typeface="Consolas"/>
-              </a:rPr>
-              <a:t>// Week 4: ask the AI a real question.</a:t>
-            </a:r>
-          </a:p>
-          <a:p>
-            <a:pPr>
-              <a:spcAft>
-                <a:spcPts val="0"/>
-              </a:spcAft>
-            </a:pPr>
-            <a:r>
-              <a:rPr sz="1300">
-                <a:solidFill>
-                  <a:srgbClr val="6D8C97"/>
-                </a:solidFill>
-                <a:latin typeface="Consolas"/>
-              </a:rPr>
-              <a:t> 116  </a:t>
-            </a:r>
-            <a:r>
-              <a:rPr sz="1300">
-                <a:solidFill>
-                  <a:srgbClr val="7FE0A0"/>
-                </a:solidFill>
-                <a:latin typeface="Consolas"/>
-              </a:rPr>
-              <a:t>// A chat request is a LIST of messages. Each one says who said it.</a:t>
-            </a:r>
-          </a:p>
-          <a:p>
-            <a:pPr>
-              <a:spcAft>
-                <a:spcPts val="0"/>
-              </a:spcAft>
-            </a:pPr>
-            <a:r>
-              <a:rPr sz="1300">
-                <a:solidFill>
-                  <a:srgbClr val="6D8C97"/>
-                </a:solidFill>
-                <a:latin typeface="Consolas"/>
-              </a:rPr>
-              <a:t> 117  </a:t>
-            </a:r>
-            <a:r>
-              <a:rPr sz="1300">
-                <a:solidFill>
-                  <a:srgbClr val="7FE0A0"/>
-                </a:solidFill>
-                <a:latin typeface="Consolas"/>
-              </a:rPr>
-              <a:t>async function askAI() {</a:t>
-            </a:r>
-          </a:p>
-          <a:p>
-            <a:pPr>
-              <a:spcAft>
-                <a:spcPts val="0"/>
-              </a:spcAft>
-            </a:pPr>
-            <a:r>
-              <a:rPr sz="1300">
-                <a:solidFill>
-                  <a:srgbClr val="6D8C97"/>
-                </a:solidFill>
-                <a:latin typeface="Consolas"/>
-              </a:rPr>
-              <a:t> 118  </a:t>
-            </a:r>
-            <a:r>
-              <a:rPr sz="1300">
-                <a:solidFill>
-                  <a:srgbClr val="7FE0A0"/>
-                </a:solidFill>
-                <a:latin typeface="Consolas"/>
-              </a:rPr>
-              <a:t>  trimHistory();   // week 8: never send more than the server will read</a:t>
-            </a:r>
-          </a:p>
-          <a:p>
-            <a:pPr>
-              <a:spcAft>
-                <a:spcPts val="0"/>
-              </a:spcAft>
-            </a:pPr>
-            <a:r>
-              <a:rPr sz="1300">
-                <a:solidFill>
-                  <a:srgbClr val="6D8C97"/>
-                </a:solidFill>
-                <a:latin typeface="Consolas"/>
-              </a:rPr>
-              <a:t> 119  </a:t>
-            </a:r>
-            <a:r>
-              <a:rPr sz="1300">
-                <a:solidFill>
-                  <a:srgbClr val="7FE0A0"/>
-                </a:solidFill>
-                <a:latin typeface="Consolas"/>
-              </a:rPr>
-              <a:t>  const res = await fetch(AI_BASE + '/v1/chat/completions', {</a:t>
-            </a:r>
-          </a:p>
-          <a:p>
-            <a:pPr>
-              <a:spcAft>
-                <a:spcPts val="0"/>
-              </a:spcAft>
-            </a:pPr>
-            <a:r>
-              <a:rPr sz="1300">
-                <a:solidFill>
-                  <a:srgbClr val="6D8C97"/>
-                </a:solidFill>
-                <a:latin typeface="Consolas"/>
-              </a:rPr>
-              <a:t> 120  </a:t>
-            </a:r>
-            <a:r>
-              <a:rPr sz="1300">
-                <a:solidFill>
-                  <a:srgbClr val="7FE0A0"/>
-                </a:solidFill>
-                <a:latin typeface="Consolas"/>
-              </a:rPr>
-              <a:t>    method: 'POST',                       // POST = I am sending you something</a:t>
-            </a:r>
-          </a:p>
-          <a:p>
-            <a:pPr>
-              <a:spcAft>
-                <a:spcPts val="0"/>
-              </a:spcAft>
-            </a:pPr>
-            <a:r>
-              <a:rPr sz="1300">
-                <a:solidFill>
-                  <a:srgbClr val="6D8C97"/>
-                </a:solidFill>
-                <a:latin typeface="Consolas"/>
-              </a:rPr>
-              <a:t> 121  </a:t>
-            </a:r>
-            <a:r>
-              <a:rPr sz="1300">
-                <a:solidFill>
-                  <a:srgbClr val="7FE0A0"/>
-                </a:solidFill>
-                <a:latin typeface="Consolas"/>
-              </a:rPr>
-              <a:t>    headers: {</a:t>
-            </a:r>
-          </a:p>
-          <a:p>
-            <a:pPr>
-              <a:spcAft>
-                <a:spcPts val="0"/>
-              </a:spcAft>
-            </a:pPr>
-            <a:r>
-              <a:rPr sz="1300">
-                <a:solidFill>
-                  <a:srgbClr val="6D8C97"/>
-                </a:solidFill>
-                <a:latin typeface="Consolas"/>
-              </a:rPr>
-              <a:t> 122  </a:t>
-            </a:r>
-            <a:r>
-              <a:rPr sz="1300">
-                <a:solidFill>
-                  <a:srgbClr val="7FE0A0"/>
-                </a:solidFill>
-                <a:latin typeface="Consolas"/>
-              </a:rPr>
-              <a:t>      'Content-Type': 'application/json', // what I am sending is JSON</a:t>
-            </a:r>
-          </a:p>
-          <a:p>
-            <a:pPr>
-              <a:spcAft>
-                <a:spcPts val="0"/>
-              </a:spcAft>
-            </a:pPr>
-            <a:r>
-              <a:rPr sz="1300">
-                <a:solidFill>
-                  <a:srgbClr val="6D8C97"/>
-                </a:solidFill>
-                <a:latin typeface="Consolas"/>
-              </a:rPr>
-              <a:t> 123  </a:t>
-            </a:r>
-            <a:r>
-              <a:rPr sz="1300">
-                <a:solidFill>
-                  <a:srgbClr val="7FE0A0"/>
-                </a:solidFill>
-                <a:latin typeface="Consolas"/>
-              </a:rPr>
-              <a:t>      'Authorization': 'Bearer ' + API_KEY</a:t>
-            </a:r>
-          </a:p>
-          <a:p>
-            <a:pPr>
-              <a:spcAft>
-                <a:spcPts val="0"/>
-              </a:spcAft>
-            </a:pPr>
-            <a:r>
-              <a:rPr sz="1300">
-                <a:solidFill>
-                  <a:srgbClr val="6D8C97"/>
-                </a:solidFill>
-                <a:latin typeface="Consolas"/>
-              </a:rPr>
-              <a:t> 124  </a:t>
-            </a:r>
-            <a:r>
-              <a:rPr sz="1300">
-                <a:solidFill>
-                  <a:srgbClr val="7FE0A0"/>
-                </a:solidFill>
-                <a:latin typeface="Consolas"/>
-              </a:rPr>
-              <a:t>    },</a:t>
-            </a:r>
-          </a:p>
-          <a:p>
-            <a:pPr>
-              <a:spcAft>
-                <a:spcPts val="0"/>
-              </a:spcAft>
-            </a:pPr>
-            <a:r>
-              <a:rPr sz="1300">
-                <a:solidFill>
-                  <a:srgbClr val="6D8C97"/>
-                </a:solidFill>
-                <a:latin typeface="Consolas"/>
-              </a:rPr>
-              <a:t> 125  </a:t>
-            </a:r>
-            <a:r>
-              <a:rPr sz="1300">
-                <a:solidFill>
-                  <a:srgbClr val="7FE0A0"/>
-                </a:solidFill>
-                <a:latin typeface="Consolas"/>
-              </a:rPr>
-              <a:t>    body: JSON.stringify({</a:t>
-            </a:r>
-          </a:p>
-          <a:p>
-            <a:pPr>
-              <a:spcAft>
-                <a:spcPts val="0"/>
-              </a:spcAft>
-            </a:pPr>
-            <a:r>
-              <a:rPr sz="1300">
-                <a:solidFill>
-                  <a:srgbClr val="6D8C97"/>
-                </a:solidFill>
-                <a:latin typeface="Consolas"/>
-              </a:rPr>
-              <a:t> 126  </a:t>
-            </a:r>
-            <a:r>
-              <a:rPr sz="1300">
-                <a:solidFill>
-                  <a:srgbClr val="7FE0A0"/>
-                </a:solidFill>
-                <a:latin typeface="Consolas"/>
-              </a:rPr>
-              <a:t>      model: modelBox.value,                    // week 9: chosen on the page</a:t>
-            </a:r>
-          </a:p>
-          <a:p>
-            <a:pPr>
-              <a:spcAft>
-                <a:spcPts val="0"/>
-              </a:spcAft>
-            </a:pPr>
-            <a:r>
-              <a:rPr sz="1300">
-                <a:solidFill>
-                  <a:srgbClr val="6D8C97"/>
-                </a:solidFill>
-                <a:latin typeface="Consolas"/>
-              </a:rPr>
-              <a:t> 127  </a:t>
-            </a:r>
-            <a:r>
-              <a:rPr sz="1300">
-                <a:solidFill>
-                  <a:srgbClr val="7FE0A0"/>
-                </a:solidFill>
-                <a:latin typeface="Consolas"/>
-              </a:rPr>
-              <a:t>      temperature: Number(tempBox.value),       // 0 = careful, 1.5 = wild</a:t>
-            </a:r>
-          </a:p>
-          <a:p>
-            <a:pPr>
-              <a:spcAft>
-                <a:spcPts val="0"/>
-              </a:spcAft>
-            </a:pPr>
-            <a:r>
-              <a:rPr sz="1300">
-                <a:solidFill>
-                  <a:srgbClr val="6D8C97"/>
-                </a:solidFill>
-                <a:latin typeface="Consolas"/>
-              </a:rPr>
-              <a:t> 128  </a:t>
-            </a:r>
-            <a:r>
-              <a:rPr sz="1300">
-                <a:solidFill>
-                  <a:srgbClr val="7FE0A0"/>
-                </a:solidFill>
-                <a:latin typeface="Consolas"/>
-              </a:rPr>
-              <a:t>      stream: true,                             // week 10: send it in pieces</a:t>
-            </a:r>
-          </a:p>
-          <a:p>
-            <a:pPr>
-              <a:spcAft>
-                <a:spcPts val="0"/>
-              </a:spcAft>
-            </a:pPr>
-            <a:r>
-              <a:rPr sz="1300">
-                <a:solidFill>
-                  <a:srgbClr val="6D8C97"/>
-                </a:solidFill>
-                <a:latin typeface="Consolas"/>
-              </a:rPr>
-              <a:t> 129  </a:t>
-            </a:r>
-            <a:r>
-              <a:rPr sz="1300">
-                <a:solidFill>
-                  <a:srgbClr val="7FE0A0"/>
-                </a:solidFill>
-                <a:latin typeface="Consolas"/>
-              </a:rPr>
-              <a:t>      messages: [</a:t>
-            </a:r>
-          </a:p>
-          <a:p>
-            <a:pPr>
-              <a:spcAft>
-                <a:spcPts val="0"/>
-              </a:spcAft>
-            </a:pPr>
-            <a:r>
-              <a:rPr sz="1300">
-                <a:solidFill>
-                  <a:srgbClr val="6D8C97"/>
-                </a:solidFill>
-                <a:latin typeface="Consolas"/>
-              </a:rPr>
-              <a:t> 130  </a:t>
-            </a:r>
-            <a:r>
-              <a:rPr sz="1300">
-                <a:solidFill>
-                  <a:srgbClr val="7FE0A0"/>
-                </a:solidFill>
-                <a:latin typeface="Consolas"/>
-              </a:rPr>
-              <a:t>        // Week 6: the standing instruction, read before every single reply.</a:t>
-            </a:r>
-          </a:p>
-          <a:p>
-            <a:pPr>
-              <a:spcAft>
-                <a:spcPts val="0"/>
-              </a:spcAft>
-            </a:pPr>
-            <a:r>
-              <a:rPr sz="1300">
-                <a:solidFill>
-                  <a:srgbClr val="6D8C97"/>
-                </a:solidFill>
-                <a:latin typeface="Consolas"/>
-              </a:rPr>
-              <a:t> 131  </a:t>
-            </a:r>
-            <a:r>
-              <a:rPr sz="1300">
-                <a:solidFill>
-                  <a:srgbClr val="7FE0A0"/>
-                </a:solidFill>
-                <a:latin typeface="Consolas"/>
-              </a:rPr>
-              <a:t>        { role: 'system', content: personaBox.value },</a:t>
-            </a:r>
-          </a:p>
-          <a:p>
-            <a:pPr>
-              <a:spcAft>
-                <a:spcPts val="0"/>
-              </a:spcAft>
-            </a:pPr>
-            <a:r>
-              <a:rPr sz="1300">
-                <a:solidFill>
-                  <a:srgbClr val="6D8C97"/>
-                </a:solidFill>
-                <a:latin typeface="Consolas"/>
-              </a:rPr>
-              <a:t> 132  </a:t>
-            </a:r>
-            <a:r>
-              <a:rPr sz="1300">
-                <a:solidFill>
-                  <a:srgbClr val="7FE0A0"/>
-                </a:solidFill>
-                <a:latin typeface="Consolas"/>
-              </a:rPr>
-              <a:t>        // Week 7: everything said so far, oldest first.</a:t>
-            </a:r>
-          </a:p>
-          <a:p>
-            <a:pPr>
-              <a:spcAft>
-                <a:spcPts val="0"/>
-              </a:spcAft>
-            </a:pPr>
-            <a:r>
-              <a:rPr sz="1300">
-                <a:solidFill>
-                  <a:srgbClr val="6D8C97"/>
-                </a:solidFill>
-                <a:latin typeface="Consolas"/>
-              </a:rPr>
-              <a:t> 133  </a:t>
-            </a:r>
-            <a:r>
-              <a:rPr sz="1300">
-                <a:solidFill>
-                  <a:srgbClr val="7FE0A0"/>
-                </a:solidFill>
-                <a:latin typeface="Consolas"/>
-              </a:rPr>
-              <a:t>        ...history</a:t>
-            </a:r>
-          </a:p>
-          <a:p>
-            <a:pPr>
-              <a:spcAft>
-                <a:spcPts val="0"/>
-              </a:spcAft>
-            </a:pPr>
-            <a:r>
-              <a:rPr sz="1300">
-                <a:solidFill>
-                  <a:srgbClr val="6D8C97"/>
-                </a:solidFill>
-                <a:latin typeface="Consolas"/>
-              </a:rPr>
-              <a:t> 134  </a:t>
-            </a:r>
-            <a:r>
-              <a:rPr sz="1300">
-                <a:solidFill>
-                  <a:srgbClr val="7FE0A0"/>
-                </a:solidFill>
-                <a:latin typeface="Consolas"/>
-              </a:rPr>
-              <a:t>      ]</a:t>
-            </a:r>
-          </a:p>
-          <a:p>
-            <a:pPr>
-              <a:spcAft>
-                <a:spcPts val="0"/>
-              </a:spcAft>
-            </a:pPr>
-            <a:r>
-              <a:rPr sz="1300">
-                <a:solidFill>
-                  <a:srgbClr val="6D8C97"/>
-                </a:solidFill>
-                <a:latin typeface="Consolas"/>
-              </a:rPr>
-              <a:t> 135  </a:t>
-            </a:r>
-            <a:r>
-              <a:rPr sz="1300">
-                <a:solidFill>
-                  <a:srgbClr val="7FE0A0"/>
-                </a:solidFill>
-                <a:latin typeface="Consolas"/>
-              </a:rPr>
-              <a:t>    })</a:t>
-            </a:r>
-          </a:p>
-          <a:p>
-            <a:pPr>
-              <a:spcAft>
-                <a:spcPts val="0"/>
-              </a:spcAft>
-            </a:pPr>
-            <a:r>
-              <a:rPr sz="1300">
-                <a:solidFill>
-                  <a:srgbClr val="6D8C97"/>
-                </a:solidFill>
-                <a:latin typeface="Consolas"/>
-              </a:rPr>
-              <a:t> 136  </a:t>
-            </a:r>
-            <a:r>
-              <a:rPr sz="1300">
-                <a:solidFill>
-                  <a:srgbClr val="7FE0A0"/>
-                </a:solidFill>
-                <a:latin typeface="Consolas"/>
-              </a:rPr>
-              <a:t>  });</a:t>
-            </a:r>
-          </a:p>
-          <a:p>
-            <a:pPr>
-              <a:spcAft>
-                <a:spcPts val="0"/>
-              </a:spcAft>
-            </a:pPr>
-            <a:r>
-              <a:rPr sz="1300">
-                <a:solidFill>
-                  <a:srgbClr val="6D8C97"/>
-                </a:solidFill>
-                <a:latin typeface="Consolas"/>
-              </a:rPr>
-              <a:t> 137  </a:t>
-            </a:r>
-            <a:r>
-              <a:rPr sz="1300">
-                <a:solidFill>
-                  <a:srgbClr val="7FE0A0"/>
-                </a:solidFill>
-                <a:latin typeface="Consolas"/>
-              </a:rPr>
-              <a:t> </a:t>
-            </a:r>
-          </a:p>
-          <a:p>
-            <a:pPr>
-              <a:spcAft>
-                <a:spcPts val="0"/>
-              </a:spcAft>
-            </a:pPr>
-            <a:r>
-              <a:rPr sz="1300">
-                <a:solidFill>
-                  <a:srgbClr val="6D8C97"/>
-                </a:solidFill>
-                <a:latin typeface="Consolas"/>
-              </a:rPr>
-              <a:t> 138  </a:t>
-            </a:r>
-            <a:r>
-              <a:rPr sz="1300">
-                <a:solidFill>
-                  <a:srgbClr val="7FE0A0"/>
-                </a:solidFill>
-                <a:latin typeface="Consolas"/>
-              </a:rPr>
-              <a:t>  // Week 5: fetch does NOT throw when the server says no. A 429 arrives</a:t>
-            </a:r>
-          </a:p>
-          <a:p>
-            <a:pPr>
-              <a:spcAft>
-                <a:spcPts val="0"/>
-              </a:spcAft>
-            </a:pPr>
-            <a:r>
-              <a:rPr sz="1300">
-                <a:solidFill>
-                  <a:srgbClr val="6D8C97"/>
-                </a:solidFill>
-                <a:latin typeface="Consolas"/>
-              </a:rPr>
-              <a:t> 139  </a:t>
-            </a:r>
-            <a:r>
-              <a:rPr sz="1300">
-                <a:solidFill>
-                  <a:srgbClr val="7FE0A0"/>
-                </a:solidFill>
-                <a:latin typeface="Consolas"/>
-              </a:rPr>
-              <a:t>  // looking just like a success until you actually check.</a:t>
-            </a:r>
-          </a:p>
-          <a:p>
-            <a:pPr>
-              <a:spcAft>
-                <a:spcPts val="0"/>
-              </a:spcAft>
-            </a:pPr>
-            <a:r>
-              <a:rPr sz="1300">
-                <a:solidFill>
-                  <a:srgbClr val="6D8C97"/>
-                </a:solidFill>
-                <a:latin typeface="Consolas"/>
-              </a:rPr>
-              <a:t> 140  </a:t>
-            </a:r>
-            <a:r>
-              <a:rPr sz="1300">
-                <a:solidFill>
-                  <a:srgbClr val="7FE0A0"/>
-                </a:solidFill>
-                <a:latin typeface="Consolas"/>
-              </a:rPr>
-              <a:t>  if (!res.ok) {</a:t>
-            </a:r>
-          </a:p>
-          <a:p>
-            <a:pPr>
-              <a:spcAft>
-                <a:spcPts val="0"/>
-              </a:spcAft>
-            </a:pPr>
-            <a:r>
-              <a:rPr sz="1300">
-                <a:solidFill>
-                  <a:srgbClr val="6D8C97"/>
-                </a:solidFill>
-                <a:latin typeface="Consolas"/>
-              </a:rPr>
-              <a:t> 141  </a:t>
-            </a:r>
-            <a:r>
-              <a:rPr sz="1300">
-                <a:solidFill>
-                  <a:srgbClr val="7FE0A0"/>
-                </a:solidFill>
-                <a:latin typeface="Consolas"/>
-              </a:rPr>
-              <a:t>    const problem = await res.json();</a:t>
-            </a:r>
-          </a:p>
-          <a:p>
-            <a:pPr>
-              <a:spcAft>
-                <a:spcPts val="0"/>
-              </a:spcAft>
-            </a:pPr>
-            <a:r>
-              <a:rPr sz="1300">
-                <a:solidFill>
-                  <a:srgbClr val="6D8C97"/>
-                </a:solidFill>
-                <a:latin typeface="Consolas"/>
-              </a:rPr>
-              <a:t> 142  </a:t>
-            </a:r>
-            <a:r>
-              <a:rPr sz="1300">
-                <a:solidFill>
-                  <a:srgbClr val="7FE0A0"/>
-                </a:solidFill>
-                <a:latin typeface="Consolas"/>
-              </a:rPr>
-              <a:t>    throw new Error(explain(res.status, problem));</a:t>
-            </a:r>
-          </a:p>
-          <a:p>
-            <a:pPr>
-              <a:spcAft>
-                <a:spcPts val="0"/>
-              </a:spcAft>
-            </a:pPr>
-            <a:r>
-              <a:rPr sz="1300">
-                <a:solidFill>
-                  <a:srgbClr val="6D8C97"/>
-                </a:solidFill>
-                <a:latin typeface="Consolas"/>
-              </a:rPr>
-              <a:t> 143  </a:t>
-            </a:r>
-            <a:r>
-              <a:rPr sz="1300">
-                <a:solidFill>
-                  <a:srgbClr val="7FE0A0"/>
-                </a:solidFill>
-                <a:latin typeface="Consolas"/>
-              </a:rPr>
-              <a:t>  }</a:t>
-            </a:r>
-          </a:p>
-          <a:p>
-            <a:pPr>
-              <a:spcAft>
-                <a:spcPts val="0"/>
-              </a:spcAft>
-            </a:pPr>
-            <a:r>
-              <a:rPr sz="1300">
-                <a:solidFill>
-                  <a:srgbClr val="6D8C97"/>
-                </a:solidFill>
-                <a:latin typeface="Consolas"/>
-              </a:rPr>
-              <a:t> 144  </a:t>
-            </a:r>
-            <a:r>
-              <a:rPr sz="1300">
-                <a:solidFill>
-                  <a:srgbClr val="7FE0A0"/>
-                </a:solidFill>
-                <a:latin typeface="Consolas"/>
-              </a:rPr>
-              <a:t> </a:t>
-            </a:r>
-          </a:p>
-          <a:p>
-            <a:pPr>
-              <a:spcAft>
-                <a:spcPts val="0"/>
-              </a:spcAft>
-            </a:pPr>
-            <a:r>
-              <a:rPr sz="1300">
-                <a:solidFill>
-                  <a:srgbClr val="6D8C97"/>
-                </a:solidFill>
-                <a:latin typeface="Consolas"/>
-              </a:rPr>
-              <a:t> 145  </a:t>
-            </a:r>
-            <a:r>
-              <a:rPr sz="1300">
-                <a:solidFill>
-                  <a:srgbClr val="7FE0A0"/>
-                </a:solidFill>
-                <a:latin typeface="Consolas"/>
-              </a:rPr>
-              <a:t>  return readStream(res);   // week 10: no more res.json() - it arrives in bits</a:t>
-            </a:r>
-          </a:p>
-          <a:p>
-            <a:pPr>
-              <a:spcAft>
-                <a:spcPts val="0"/>
-              </a:spcAft>
-            </a:pPr>
-            <a:r>
-              <a:rPr sz="1300">
-                <a:solidFill>
-                  <a:srgbClr val="6D8C97"/>
-                </a:solidFill>
-                <a:latin typeface="Consolas"/>
-              </a:rPr>
-              <a:t> 146  </a:t>
-            </a:r>
-            <a:r>
-              <a:rPr sz="1300">
-                <a:solidFill>
-                  <a:srgbClr val="7FE0A0"/>
-                </a:solidFill>
-                <a:latin typeface="Consolas"/>
-              </a:rPr>
-              <a:t>}</a:t>
-            </a:r>
-          </a:p>
-        </p:txBody>
-      </p:sp>
-      <p:sp>
-        <p:nvSpPr>
-          <p:cNvPr id="4" name="TextBox 3"/>
-          <p:cNvSpPr txBox="1"/>
-          <p:nvPr/>
-        </p:nvSpPr>
-        <p:spPr>
-          <a:xfrm>
-            <a:off x="548640" y="5623560"/>
-            <a:ext cx="11064240" cy="1051560"/>
+            <a:off x="822960" y="1828800"/>
+            <a:ext cx="10515600" cy="4206240"/>
           </a:xfrm>
           <a:prstGeom prst="rect">
             <a:avLst/>
@@ -26757,13 +25831,48 @@
           </a:bodyPr>
           <a:lstStyle/>
           <a:p>
-            <a:r>
-              <a:rPr sz="2000">
-                <a:solidFill>
-                  <a:srgbClr val="DCECEF"/>
-                </a:solidFill>
-              </a:rPr>
-              <a:t>That is the whole piece. Check yours looks the same before moving on.</a:t>
+            <a:pPr>
+              <a:spcAft>
+                <a:spcPts val="1400"/>
+              </a:spcAft>
+            </a:pPr>
+            <a:r>
+              <a:rPr sz="2400">
+                <a:solidFill>
+                  <a:srgbClr val="1F2A37"/>
+                </a:solidFill>
+              </a:rPr>
+              <a:t>• data: {"choices":[{"delta":{"content":"Hel"}}]}</a:t>
+            </a:r>
+          </a:p>
+          <a:p>
+            <a:pPr>
+              <a:spcAft>
+                <a:spcPts val="1400"/>
+              </a:spcAft>
+            </a:pPr>
+            <a:r>
+              <a:rPr sz="2400">
+                <a:solidFill>
+                  <a:srgbClr val="1F2A37"/>
+                </a:solidFill>
+              </a:rPr>
+              <a:t>• data: {"choices":[{"delta":{"content":"lo"}}]}</a:t>
+            </a:r>
+          </a:p>
+          <a:p>
+            <a:pPr>
+              <a:spcAft>
+                <a:spcPts val="1400"/>
+              </a:spcAft>
+            </a:pPr>
+            <a:r>
+              <a:rPr sz="2400">
+                <a:solidFill>
+                  <a:srgbClr val="1F2A37"/>
+                </a:solidFill>
+              </a:rPr>
+              <a:t>• data: [DONE]</a:t>
             </a:r>
           </a:p>
         </p:txBody>
